--- a/docs/handbook/sbmig-overview.pptx
+++ b/docs/handbook/sbmig-overview.pptx
@@ -132,7 +132,7 @@
   <p:extLst>
     <p:ext uri="{521415D9-36F7-43E2-AB2F-B90AF26B5E84}">
       <p14:sectionLst xmlns:p14="http://schemas.microsoft.com/office/powerpoint/2010/main">
-        <p14:section name="소개" id="{1f60e9ad-bf62-13ed-4db2-1140d3ca92ea}">
+        <p14:section name="소개" id="{3828c082-f6b5-4fa1-1c16-f06e6b07ae4e}">
           <p14:sldIdLst>
             <p14:sldId id="256"/>
             <p14:sldId id="257"/>
@@ -140,7 +140,7 @@
             <p14:sldId id="259"/>
           </p14:sldIdLst>
         </p14:section>
-        <p14:section name="동작 원리" id="{57671406-8bc7-3db0-f106-06e4ee176fa3}">
+        <p14:section name="동작 원리" id="{7fe38fe9-fefd-6d13-ba20-3b8c2d719aa3}">
           <p14:sldIdLst>
             <p14:sldId id="260"/>
             <p14:sldId id="261"/>
@@ -151,7 +151,7 @@
             <p14:sldId id="266"/>
           </p14:sldIdLst>
         </p14:section>
-        <p14:section name="회사 레이아웃" id="{969f48fb-f9fe-a524-3739-1a5d9f12b952}">
+        <p14:section name="회사 레이아웃" id="{5c4a42cb-4cb7-cdd3-63d6-d5f1a1d91ee5}">
           <p14:sldIdLst>
             <p14:sldId id="267"/>
             <p14:sldId id="268"/>
@@ -159,7 +159,7 @@
             <p14:sldId id="270"/>
           </p14:sldIdLst>
         </p14:section>
-        <p14:section name="아키텍처" id="{84d03f09-f4ad-3381-9d63-173680274ab1}">
+        <p14:section name="아키텍처" id="{56d69062-f3a6-02f9-41ee-496cd48c1497}">
           <p14:sldIdLst>
             <p14:sldId id="271"/>
             <p14:sldId id="272"/>
@@ -167,7 +167,7 @@
             <p14:sldId id="274"/>
           </p14:sldIdLst>
         </p14:section>
-        <p14:section name="운영" id="{d9c47975-5d8f-cc87-4b0c-0487f845feb6}">
+        <p14:section name="운영" id="{33d2aee3-6fc3-11da-5b86-0192db2f4568}">
           <p14:sldIdLst>
             <p14:sldId id="275"/>
             <p14:sldId id="276"/>
@@ -175,7 +175,7 @@
             <p14:sldId id="278"/>
           </p14:sldIdLst>
         </p14:section>
-        <p14:section name="현황과 다음 단계" id="{e1ec257b-936c-ccfd-48a1-b227d290ad3c}">
+        <p14:section name="현황과 다음 단계" id="{882ed8d2-3754-4004-42de-74ee167d7164}">
           <p14:sldIdLst>
             <p14:sldId id="279"/>
             <p14:sldId id="280"/>
@@ -339,7 +339,7 @@
                   <c:v>1295</c:v>
                 </c:pt>
                 <c:pt idx="7">
-                  <c:v>1328</c:v>
+                  <c:v>1369</c:v>
                 </c:pt>
               </c:numCache>
             </c:numRef>
@@ -17185,7 +17185,7 @@
                   <a:schemeClr val="accent1"/>
                 </a:solidFill>
               </a:rPr>
-              <a:t>1,328</a:t>
+              <a:t>1,369</a:t>
             </a:r>
             <a:endParaRPr lang="en-US" sz="3800" dirty="0"/>
           </a:p>

--- a/docs/handbook/sbmig-overview.pptx
+++ b/docs/handbook/sbmig-overview.pptx
@@ -31,9 +31,10 @@
     <p:sldId id="279" r:id="rId25"/>
     <p:sldId id="280" r:id="rId26"/>
     <p:sldId id="281" r:id="rId27"/>
+    <p:sldId id="282" r:id="rId28"/>
   </p:sldIdLst>
   <p:notesMasterIdLst>
-    <p:notesMasterId r:id="rId28"/>
+    <p:notesMasterId r:id="rId29"/>
   </p:notesMasterIdLst>
   <p:sldSz cx="9144000" cy="5143500"/>
   <p:notesSz cx="5143500" cy="9144000"/>
@@ -132,7 +133,7 @@
   <p:extLst>
     <p:ext uri="{521415D9-36F7-43E2-AB2F-B90AF26B5E84}">
       <p14:sectionLst xmlns:p14="http://schemas.microsoft.com/office/powerpoint/2010/main">
-        <p14:section name="소개" id="{3828c082-f6b5-4fa1-1c16-f06e6b07ae4e}">
+        <p14:section name="소개" id="{52a5d126-3c28-9b81-b6cd-9be7662cbff6}">
           <p14:sldIdLst>
             <p14:sldId id="256"/>
             <p14:sldId id="257"/>
@@ -140,7 +141,7 @@
             <p14:sldId id="259"/>
           </p14:sldIdLst>
         </p14:section>
-        <p14:section name="동작 원리" id="{7fe38fe9-fefd-6d13-ba20-3b8c2d719aa3}">
+        <p14:section name="동작 원리" id="{11192ae1-50a0-9583-54ad-bce593200555}">
           <p14:sldIdLst>
             <p14:sldId id="260"/>
             <p14:sldId id="261"/>
@@ -151,7 +152,7 @@
             <p14:sldId id="266"/>
           </p14:sldIdLst>
         </p14:section>
-        <p14:section name="회사 레이아웃" id="{5c4a42cb-4cb7-cdd3-63d6-d5f1a1d91ee5}">
+        <p14:section name="회사 레이아웃" id="{e6299f83-3856-a7f7-8316-c31af9ae8a50}">
           <p14:sldIdLst>
             <p14:sldId id="267"/>
             <p14:sldId id="268"/>
@@ -159,7 +160,7 @@
             <p14:sldId id="270"/>
           </p14:sldIdLst>
         </p14:section>
-        <p14:section name="아키텍처" id="{56d69062-f3a6-02f9-41ee-496cd48c1497}">
+        <p14:section name="아키텍처" id="{e7dbcb67-8c37-c452-a849-f14ce0c6811e}">
           <p14:sldIdLst>
             <p14:sldId id="271"/>
             <p14:sldId id="272"/>
@@ -167,19 +168,20 @@
             <p14:sldId id="274"/>
           </p14:sldIdLst>
         </p14:section>
-        <p14:section name="운영" id="{33d2aee3-6fc3-11da-5b86-0192db2f4568}">
+        <p14:section name="운영" id="{52d99d7a-5c1a-331f-0aa9-1a958b71fcf9}">
           <p14:sldIdLst>
             <p14:sldId id="275"/>
             <p14:sldId id="276"/>
             <p14:sldId id="277"/>
             <p14:sldId id="278"/>
+            <p14:sldId id="279"/>
           </p14:sldIdLst>
         </p14:section>
-        <p14:section name="현황과 다음 단계" id="{882ed8d2-3754-4004-42de-74ee167d7164}">
+        <p14:section name="현황과 다음 단계" id="{b0d664ae-e0a3-a539-dddf-cf2817930aaf}">
           <p14:sldIdLst>
-            <p14:sldId id="279"/>
             <p14:sldId id="280"/>
             <p14:sldId id="281"/>
+            <p14:sldId id="282"/>
           </p14:sldIdLst>
         </p14:section>
       </p14:sectionLst>
@@ -279,9 +281,9 @@
           </c:dLbls>
           <c:cat>
             <c:multiLvlStrRef>
-              <c:f>Sheet1!$A$2:$A$9</c:f>
+              <c:f>Sheet1!$A$2:$A$10</c:f>
               <c:multiLvlStrCache>
-                <c:ptCount val="8"/>
+                <c:ptCount val="9"/>
                 <c:lvl>
                   <c:pt idx="0">
                     <c:v>R6</c:v>
@@ -305,7 +307,10 @@
                     <c:v>R9c</c:v>
                   </c:pt>
                   <c:pt idx="7">
-                    <c:v>현재</c:v>
+                    <c:v>R10 전</c:v>
+                  </c:pt>
+                  <c:pt idx="8">
+                    <c:v>R10</c:v>
                   </c:pt>
                 </c:lvl>
               </c:multiLvlStrCache>
@@ -313,10 +318,10 @@
           </c:cat>
           <c:val>
             <c:numRef>
-              <c:f>Sheet1!$B$2:$B$9</c:f>
+              <c:f>Sheet1!$B$2:$B$10</c:f>
               <c:numCache>
                 <c:formatCode>General</c:formatCode>
-                <c:ptCount val="8"/>
+                <c:ptCount val="9"/>
                 <c:pt idx="0">
                   <c:v>917</c:v>
                 </c:pt>
@@ -339,7 +344,10 @@
                   <c:v>1295</c:v>
                 </c:pt>
                 <c:pt idx="7">
-                  <c:v>1369</c:v>
+                  <c:v>1877</c:v>
+                </c:pt>
+                <c:pt idx="8">
+                  <c:v>2192</c:v>
                 </c:pt>
               </c:numCache>
             </c:numRef>
@@ -420,7 +428,7 @@
         <c:axId val="2094734552"/>
         <c:scaling>
           <c:orientation val="minMax"/>
-          <c:max val="1500"/>
+          <c:max val="2500"/>
           <c:min val="0"/>
         </c:scaling>
         <c:delete val="0"/>
@@ -1767,7 +1775,7 @@
           <a:p>
             <a:r>
               <a:rPr lang="en-US" dirty="0"/>
-              <a:t>상세: 08-config-reference.md. 엑셀 '설정키' 시트에 186개 키 전체가 있습니다.</a:t>
+              <a:t>상세: 08-config-reference.md. 엑셀 '설정키' 시트에 212개 키 전체가 있습니다.</a:t>
             </a:r>
             <a:endParaRPr lang="en-US" dirty="0"/>
           </a:p>
@@ -2119,7 +2127,7 @@
           <a:p>
             <a:r>
               <a:rPr lang="en-US" dirty="0"/>
-              <a:t>report.md와 report.json은 같은 내용입니다. exit code: 0 성공·blocked 없음, 2 blocked/미해결 있음, 3 중단.</a:t>
+              <a:t>500개를 순차로 돌리는 동안 인프라 장애가 프로젝트 실패로 쌓이지 않게 합니다. 상세: 09-operations.md 3.4절(한 줄 결과), 6.6절(인프라 문제), 7절(플릿).</a:t>
             </a:r>
             <a:endParaRPr lang="en-US" dirty="0"/>
           </a:p>
@@ -2207,7 +2215,7 @@
           <a:p>
             <a:r>
               <a:rPr lang="en-US" dirty="0"/>
-              <a:t>모두 같은 날 수정되어 main에 반영되었고 테스트가 추가되었습니다. FAQ: 09-operations.md 9장.</a:t>
+              <a:t>report.md와 report.json은 같은 내용입니다. exit code: 0 성공·blocked 없음, 2 blocked/미해결 있음, 3 중단.</a:t>
             </a:r>
             <a:endParaRPr lang="en-US" dirty="0"/>
           </a:p>
@@ -2295,7 +2303,7 @@
           <a:p>
             <a:r>
               <a:rPr lang="en-US" dirty="0"/>
-              <a:t>오프라인 테스트는 Python만으로 약 3분, e2e는 JDK 21 + Maven + Maven Central 접근이 필요합니다.</a:t>
+              <a:t>모두 같은 날 수정되어 main에 반영되었고 테스트가 추가되었습니다. FAQ: 09-operations.md 9장.</a:t>
             </a:r>
             <a:endParaRPr lang="en-US" dirty="0"/>
           </a:p>
@@ -2383,7 +2391,7 @@
           <a:p>
             <a:r>
               <a:rPr lang="en-US" dirty="0"/>
-              <a:t>결정은 회사 몫이며, 각 항목은 CLAUDE.md 'Known follow-ups'에 적혀 있습니다.</a:t>
+              <a:t>오프라인 테스트는 Python만으로 약 3분, e2e는 JDK 21 + Maven + Maven Central 접근이 필요합니다.</a:t>
             </a:r>
             <a:endParaRPr lang="en-US" dirty="0"/>
           </a:p>
@@ -2471,7 +2479,7 @@
           <a:p>
             <a:r>
               <a:rPr lang="en-US" dirty="0"/>
-              <a:t>제출물: docs/handbook/ 의 마크다운 9편 + 이 PPT + sbmig-reference.xlsx.</a:t>
+              <a:t>결정은 회사 몫이며, 각 항목은 CLAUDE.md 'Known follow-ups'에 적혀 있습니다.</a:t>
             </a:r>
             <a:endParaRPr lang="en-US" dirty="0"/>
           </a:p>
@@ -2495,6 +2503,94 @@
             <a:fld id="{F7021451-1387-4CA6-816F-3879F97B5CBC}" type="slidenum">
               <a:rPr lang="en-US"/>
               <a:t>26</a:t>
+            </a:fld>
+            <a:endParaRPr lang="en-US"/>
+          </a:p>
+        </p:txBody>
+      </p:sp>
+    </p:spTree>
+    <p:extLst>
+      <p:ext uri="{BB962C8B-B14F-4D97-AF65-F5344CB8AC3E}">
+        <p14:creationId xmlns:p14="http://schemas.microsoft.com/office/powerpoint/2010/main" val="1024086991"/>
+      </p:ext>
+    </p:extLst>
+  </p:cSld>
+  <p:clrMapOvr>
+    <a:masterClrMapping/>
+  </p:clrMapOvr>
+</p:notes>
+</file>
+
+<file path=ppt/notesSlides/notesSlide27.xml><?xml version="1.0" encoding="utf-8"?>
+<p:notes xmlns:a="http://schemas.openxmlformats.org/drawingml/2006/main" xmlns:r="http://schemas.openxmlformats.org/officeDocument/2006/relationships" xmlns:p="http://schemas.openxmlformats.org/presentationml/2006/main">
+  <p:cSld>
+    <p:spTree>
+      <p:nvGrpSpPr>
+        <p:cNvPr id="1" name=""/>
+        <p:cNvGrpSpPr/>
+        <p:nvPr/>
+      </p:nvGrpSpPr>
+      <p:grpSpPr>
+        <a:xfrm>
+          <a:off x="0" y="0"/>
+          <a:ext cx="0" cy="0"/>
+          <a:chOff x="0" y="0"/>
+          <a:chExt cx="0" cy="0"/>
+        </a:xfrm>
+      </p:grpSpPr>
+      <p:sp>
+        <p:nvSpPr>
+          <p:cNvPr id="2" name="Slide Image Placeholder 1"/>
+          <p:cNvSpPr>
+            <a:spLocks noGrp="1" noRot="1" noChangeAspect="1"/>
+          </p:cNvSpPr>
+          <p:nvPr>
+            <p:ph type="sldImg"/>
+          </p:nvPr>
+        </p:nvSpPr>
+        <p:spPr/>
+      </p:sp>
+      <p:sp>
+        <p:nvSpPr>
+          <p:cNvPr id="3" name="Notes Placeholder 2"/>
+          <p:cNvSpPr>
+            <a:spLocks noGrp="1"/>
+          </p:cNvSpPr>
+          <p:nvPr>
+            <p:ph type="body" idx="1"/>
+          </p:nvPr>
+        </p:nvSpPr>
+        <p:spPr/>
+        <p:txBody>
+          <a:bodyPr/>
+          <a:lstStyle/>
+          <a:p>
+            <a:r>
+              <a:rPr lang="en-US" dirty="0"/>
+              <a:t>제출물: docs/handbook/ 의 마크다운 9편 + 이 PPT + sbmig-reference.xlsx.</a:t>
+            </a:r>
+            <a:endParaRPr lang="en-US" dirty="0"/>
+          </a:p>
+        </p:txBody>
+      </p:sp>
+      <p:sp>
+        <p:nvSpPr>
+          <p:cNvPr id="4" name="Slide Number Placeholder 3"/>
+          <p:cNvSpPr>
+            <a:spLocks noGrp="1"/>
+          </p:cNvSpPr>
+          <p:nvPr>
+            <p:ph type="sldNum" sz="quarter" idx="10"/>
+          </p:nvPr>
+        </p:nvSpPr>
+        <p:spPr/>
+        <p:txBody>
+          <a:bodyPr/>
+          <a:lstStyle/>
+          <a:p>
+            <a:fld id="{F7021451-1387-4CA6-816F-3879F97B5CBC}" type="slidenum">
+              <a:rPr lang="en-US"/>
+              <a:t>27</a:t>
             </a:fld>
             <a:endParaRPr lang="en-US"/>
           </a:p>
@@ -3087,7 +3183,7 @@
           <a:p>
             <a:r>
               <a:rPr lang="en-US" dirty="0"/>
-              <a:t>전체 23종과 트리거는 엑셀 '핸들러' 시트, 설명은 04 문서 5장. 선제(pre-emptive) 핸들러는 첫 빌드 전에 프로필만 보고 미리 돌아 빌드 1회를 아낍니다.</a:t>
+              <a:t>전체 32종과 트리거는 엑셀 '핸들러' 시트, 설명은 04 문서 5장. 선제(pre-emptive) 핸들러는 첫 빌드 전에 프로필만 보고 미리 돌아 빌드 1회를 아낍니다. round 10: jdk-base64-shim, remove-tools-jar, boot4-type-relocation-sweep, security-path-pattern-matcher, spring-data-specification-unrestricted.</a:t>
             </a:r>
             <a:endParaRPr lang="en-US" dirty="0"/>
           </a:p>
@@ -13962,7 +14058,7 @@
                   <a:schemeClr val="tx2"/>
                 </a:solidFill>
               </a:rPr>
-              <a:t>개발자에게 보낼 세 줄</a:t>
+              <a:t>옮겨 적을 줄</a:t>
             </a:r>
             <a:endParaRPr lang="en-US" sz="1300" dirty="0"/>
           </a:p>
@@ -14002,7 +14098,7 @@
                   <a:schemeClr val="tx1"/>
                 </a:solidFill>
               </a:rPr>
-              <a:t>워치독 줄: fix loop quiet for Ns since '…'</a:t>
+              <a:t>SBMIG-RESULT … 한 줄(결과·주의 코드)</a:t>
             </a:r>
             <a:endParaRPr lang="en-US" sz="1150" dirty="0"/>
           </a:p>
@@ -14020,7 +14116,7 @@
                   <a:schemeClr val="tx1"/>
                 </a:solidFill>
               </a:rPr>
-              <a:t>클러스터의 first error: 줄</a:t>
+              <a:t>워치독 줄 + 클러스터의 first error: 줄</a:t>
             </a:r>
             <a:endParaRPr lang="en-US" sz="1150" dirty="0"/>
           </a:p>
@@ -14038,7 +14134,7 @@
                   <a:schemeClr val="tx1"/>
                 </a:solidFill>
               </a:rPr>
-              <a:t>/api/threads 또는 threads-*.txt의 --- thread sbmig-run- 블록</a:t>
+              <a:t>덤프의 --- thread sbmig-run- 블록 맨 아래 15줄</a:t>
             </a:r>
             <a:endParaRPr lang="en-US" sz="1150" dirty="0"/>
           </a:p>
@@ -14108,7 +14204,7 @@
                   <a:schemeClr val="tx2"/>
                 </a:solidFill>
               </a:rPr>
-              <a:t>PowerShell 한 줄</a:t>
+              <a:t>PowerShell (round 10)</a:t>
             </a:r>
             <a:endParaRPr lang="en-US" sz="1300" dirty="0"/>
           </a:p>
@@ -14143,14 +14239,14 @@
               <a:buChar char="•"/>
             </a:pPr>
             <a:r>
-              <a:rPr lang="en-US" sz="1100" dirty="0">
+              <a:rPr lang="en-US" sz="1050" dirty="0">
                 <a:solidFill>
                   <a:schemeClr val="tx1"/>
                 </a:solidFill>
               </a:rPr>
-              <a:t>Get-Content out\web\&lt;id&gt;\sbmig.log -Wait -Tail 20</a:t>
-            </a:r>
-            <a:endParaRPr lang="en-US" sz="1100" dirty="0"/>
+              <a:t>Get-Content &lt;run dir&gt;\sbmig.log -Encoding UTF8 -Tail 20</a:t>
+            </a:r>
+            <a:endParaRPr lang="en-US" sz="1050" dirty="0"/>
           </a:p>
           <a:p>
             <a:pPr marL="342900" indent="-342900">
@@ -14161,14 +14257,14 @@
               <a:buChar char="•"/>
             </a:pPr>
             <a:r>
-              <a:rPr lang="en-US" sz="1100" dirty="0">
+              <a:rPr lang="en-US" sz="1050" dirty="0">
                 <a:solidFill>
                   <a:schemeClr val="tx1"/>
                 </a:solidFill>
               </a:rPr>
-              <a:t>Select-String -Path &lt;log&gt; -Pattern 'first error|quiet for'</a:t>
-            </a:r>
-            <a:endParaRPr lang="en-US" sz="1100" dirty="0"/>
+              <a:t>New-Item &lt;run dir&gt;\dump-threads -ItemType File  (덤프)</a:t>
+            </a:r>
+            <a:endParaRPr lang="en-US" sz="1050" dirty="0"/>
           </a:p>
           <a:p>
             <a:pPr marL="342900" indent="-342900">
@@ -14179,14 +14275,14 @@
               <a:buChar char="•"/>
             </a:pPr>
             <a:r>
-              <a:rPr lang="en-US" sz="1100" dirty="0">
+              <a:rPr lang="en-US" sz="1050" dirty="0">
                 <a:solidFill>
                   <a:schemeClr val="tx1"/>
                 </a:solidFill>
               </a:rPr>
-              <a:t>curl.exe http://127.0.0.1:8765/api/threads</a:t>
-            </a:r>
-            <a:endParaRPr lang="en-US" sz="1100" dirty="0"/>
+              <a:t>CLI 콘솔은 Ctrl+Break, sbmig serve는 /api/threads</a:t>
+            </a:r>
+            <a:endParaRPr lang="en-US" sz="1050" dirty="0"/>
           </a:p>
         </p:txBody>
       </p:sp>
@@ -14292,49 +14388,1495 @@
                   <a:schemeClr val="tx2"/>
                 </a:solidFill>
               </a:rPr>
-              <a:t>리포트 읽는 법: Handover부터</a:t>
+              <a:t>플릿 안전장치와 한 줄 결과 (round 10)</a:t>
             </a:r>
             <a:endParaRPr lang="en-US" sz="2600" dirty="0"/>
           </a:p>
         </p:txBody>
       </p:sp>
-      <p:sp>
-        <p:nvSpPr>
-          <p:cNvPr id="4" name="Shape 1"/>
-          <p:cNvSpPr/>
-          <p:nvPr/>
-        </p:nvSpPr>
-        <p:spPr>
-          <a:xfrm>
-            <a:off x="457200" y="1097280"/>
-            <a:ext cx="2194560" cy="512064"/>
-          </a:xfrm>
-          <a:prstGeom prst="roundRect">
-            <a:avLst>
-              <a:gd name="adj" fmla="val 14286"/>
-            </a:avLst>
-          </a:prstGeom>
-          <a:solidFill>
-            <a:srgbClr val="2C5F2D"/>
-          </a:solidFill>
-          <a:ln w="9525">
-            <a:solidFill>
-              <a:srgbClr val="2C5F2D"/>
-            </a:solidFill>
-            <a:prstDash val="solid"/>
-          </a:ln>
-        </p:spPr>
-      </p:sp>
-      <p:sp>
-        <p:nvSpPr>
-          <p:cNvPr id="5" name="Text 2"/>
+      <p:graphicFrame>
+        <p:nvGraphicFramePr>
+          <p:cNvPr id="23" name="Table 0"/>
+          <p:cNvGraphicFramePr>
+            <a:graphicFrameLocks noGrp="1"/>
+          </p:cNvGraphicFramePr>
+          <p:nvPr>
+            <p:extLst>
+              <p:ext uri="{D42A27DB-BD31-4B8C-83A1-F6EECF244321}">
+                <p14:modId xmlns:p14="http://schemas.microsoft.com/office/powerpoint/2010/main" val="1579011935"/>
+              </p:ext>
+            </p:extLst>
+          </p:nvPr>
+        </p:nvGraphicFramePr>
+        <p:xfrm>
+          <a:off x="457200" y="1097280"/>
+          <a:ext cx="8229600" cy="914400"/>
+        </p:xfrm>
+        <a:graphic>
+          <a:graphicData uri="http://schemas.openxmlformats.org/drawingml/2006/table">
+            <a:tbl>
+              <a:tblPr/>
+              <a:tblGrid>
+                <a:gridCol w="1188720"/>
+                <a:gridCol w="3657600"/>
+                <a:gridCol w="3383280"/>
+              </a:tblGrid>
+              <a:tr h="0">
+                <a:tc>
+                  <a:txBody>
+                    <a:bodyPr/>
+                    <a:lstStyle/>
+                    <a:p>
+                      <a:pPr indent="0" marL="0">
+                        <a:buNone/>
+                      </a:pPr>
+                      <a:r>
+                        <a:rPr lang="en-US" sz="950" b="1" dirty="0">
+                          <a:solidFill>
+                            <a:srgbClr val="FFFFFF"/>
+                          </a:solidFill>
+                          <a:latin typeface="Calibri" pitchFamily="34" charset="0"/>
+                          <a:ea typeface="Calibri" pitchFamily="34" charset="-122"/>
+                          <a:cs typeface="Calibri" pitchFamily="34" charset="-120"/>
+                        </a:rPr>
+                        <a:t>장치</a:t>
+                      </a:r>
+                      <a:endParaRPr lang="en-US" sz="950" dirty="0">
+                        <a:latin typeface="Calibri" charset="0"/>
+                        <a:ea typeface="Calibri" charset="0"/>
+                        <a:cs typeface="Calibri" charset="0"/>
+                      </a:endParaRPr>
+                    </a:p>
+                  </a:txBody>
+                  <a:tcPr marL="45720" marR="45720" marT="45720" marB="45720" anchor="ctr">
+                    <a:lnL w="6350" cap="flat" cmpd="sng" algn="ctr">
+                      <a:solidFill>
+                        <a:srgbClr val="D5DBD3"/>
+                      </a:solidFill>
+                      <a:prstDash val="solid"/>
+                      <a:round/>
+                      <a:headEnd type="none" w="med" len="med"/>
+                      <a:tailEnd type="none" w="med" len="med"/>
+                    </a:lnL>
+                    <a:lnR w="6350" cap="flat" cmpd="sng" algn="ctr">
+                      <a:solidFill>
+                        <a:srgbClr val="D5DBD3"/>
+                      </a:solidFill>
+                      <a:prstDash val="solid"/>
+                      <a:round/>
+                      <a:headEnd type="none" w="med" len="med"/>
+                      <a:tailEnd type="none" w="med" len="med"/>
+                    </a:lnR>
+                    <a:lnT w="6350" cap="flat" cmpd="sng" algn="ctr">
+                      <a:solidFill>
+                        <a:srgbClr val="D5DBD3"/>
+                      </a:solidFill>
+                      <a:prstDash val="solid"/>
+                      <a:round/>
+                      <a:headEnd type="none" w="med" len="med"/>
+                      <a:tailEnd type="none" w="med" len="med"/>
+                    </a:lnT>
+                    <a:lnB w="6350" cap="flat" cmpd="sng" algn="ctr">
+                      <a:solidFill>
+                        <a:srgbClr val="D5DBD3"/>
+                      </a:solidFill>
+                      <a:prstDash val="solid"/>
+                      <a:round/>
+                      <a:headEnd type="none" w="med" len="med"/>
+                      <a:tailEnd type="none" w="med" len="med"/>
+                    </a:lnB>
+                    <a:solidFill>
+                      <a:srgbClr val="2C5F2D"/>
+                    </a:solidFill>
+                  </a:tcPr>
+                </a:tc>
+                <a:tc>
+                  <a:txBody>
+                    <a:bodyPr/>
+                    <a:lstStyle/>
+                    <a:p>
+                      <a:pPr indent="0" marL="0">
+                        <a:buNone/>
+                      </a:pPr>
+                      <a:r>
+                        <a:rPr lang="en-US" sz="950" b="1" dirty="0">
+                          <a:solidFill>
+                            <a:srgbClr val="FFFFFF"/>
+                          </a:solidFill>
+                          <a:latin typeface="Calibri" pitchFamily="34" charset="0"/>
+                          <a:ea typeface="Calibri" pitchFamily="34" charset="-122"/>
+                          <a:cs typeface="Calibri" pitchFamily="34" charset="-120"/>
+                        </a:rPr>
+                        <a:t>운영자가 보는 줄</a:t>
+                      </a:r>
+                      <a:endParaRPr lang="en-US" sz="950" dirty="0">
+                        <a:latin typeface="Calibri" charset="0"/>
+                        <a:ea typeface="Calibri" charset="0"/>
+                        <a:cs typeface="Calibri" charset="0"/>
+                      </a:endParaRPr>
+                    </a:p>
+                  </a:txBody>
+                  <a:tcPr marL="45720" marR="45720" marT="45720" marB="45720" anchor="ctr">
+                    <a:lnL w="6350" cap="flat" cmpd="sng" algn="ctr">
+                      <a:solidFill>
+                        <a:srgbClr val="D5DBD3"/>
+                      </a:solidFill>
+                      <a:prstDash val="solid"/>
+                      <a:round/>
+                      <a:headEnd type="none" w="med" len="med"/>
+                      <a:tailEnd type="none" w="med" len="med"/>
+                    </a:lnL>
+                    <a:lnR w="6350" cap="flat" cmpd="sng" algn="ctr">
+                      <a:solidFill>
+                        <a:srgbClr val="D5DBD3"/>
+                      </a:solidFill>
+                      <a:prstDash val="solid"/>
+                      <a:round/>
+                      <a:headEnd type="none" w="med" len="med"/>
+                      <a:tailEnd type="none" w="med" len="med"/>
+                    </a:lnR>
+                    <a:lnT w="6350" cap="flat" cmpd="sng" algn="ctr">
+                      <a:solidFill>
+                        <a:srgbClr val="D5DBD3"/>
+                      </a:solidFill>
+                      <a:prstDash val="solid"/>
+                      <a:round/>
+                      <a:headEnd type="none" w="med" len="med"/>
+                      <a:tailEnd type="none" w="med" len="med"/>
+                    </a:lnT>
+                    <a:lnB w="6350" cap="flat" cmpd="sng" algn="ctr">
+                      <a:solidFill>
+                        <a:srgbClr val="D5DBD3"/>
+                      </a:solidFill>
+                      <a:prstDash val="solid"/>
+                      <a:round/>
+                      <a:headEnd type="none" w="med" len="med"/>
+                      <a:tailEnd type="none" w="med" len="med"/>
+                    </a:lnB>
+                    <a:solidFill>
+                      <a:srgbClr val="2C5F2D"/>
+                    </a:solidFill>
+                  </a:tcPr>
+                </a:tc>
+                <a:tc>
+                  <a:txBody>
+                    <a:bodyPr/>
+                    <a:lstStyle/>
+                    <a:p>
+                      <a:pPr indent="0" marL="0">
+                        <a:buNone/>
+                      </a:pPr>
+                      <a:r>
+                        <a:rPr lang="en-US" sz="950" b="1" dirty="0">
+                          <a:solidFill>
+                            <a:srgbClr val="FFFFFF"/>
+                          </a:solidFill>
+                          <a:latin typeface="Calibri" pitchFamily="34" charset="0"/>
+                          <a:ea typeface="Calibri" pitchFamily="34" charset="-122"/>
+                          <a:cs typeface="Calibri" pitchFamily="34" charset="-120"/>
+                        </a:rPr>
+                        <a:t>동작</a:t>
+                      </a:r>
+                      <a:endParaRPr lang="en-US" sz="950" dirty="0">
+                        <a:latin typeface="Calibri" charset="0"/>
+                        <a:ea typeface="Calibri" charset="0"/>
+                        <a:cs typeface="Calibri" charset="0"/>
+                      </a:endParaRPr>
+                    </a:p>
+                  </a:txBody>
+                  <a:tcPr marL="45720" marR="45720" marT="45720" marB="45720" anchor="ctr">
+                    <a:lnL w="6350" cap="flat" cmpd="sng" algn="ctr">
+                      <a:solidFill>
+                        <a:srgbClr val="D5DBD3"/>
+                      </a:solidFill>
+                      <a:prstDash val="solid"/>
+                      <a:round/>
+                      <a:headEnd type="none" w="med" len="med"/>
+                      <a:tailEnd type="none" w="med" len="med"/>
+                    </a:lnL>
+                    <a:lnR w="6350" cap="flat" cmpd="sng" algn="ctr">
+                      <a:solidFill>
+                        <a:srgbClr val="D5DBD3"/>
+                      </a:solidFill>
+                      <a:prstDash val="solid"/>
+                      <a:round/>
+                      <a:headEnd type="none" w="med" len="med"/>
+                      <a:tailEnd type="none" w="med" len="med"/>
+                    </a:lnR>
+                    <a:lnT w="6350" cap="flat" cmpd="sng" algn="ctr">
+                      <a:solidFill>
+                        <a:srgbClr val="D5DBD3"/>
+                      </a:solidFill>
+                      <a:prstDash val="solid"/>
+                      <a:round/>
+                      <a:headEnd type="none" w="med" len="med"/>
+                      <a:tailEnd type="none" w="med" len="med"/>
+                    </a:lnT>
+                    <a:lnB w="6350" cap="flat" cmpd="sng" algn="ctr">
+                      <a:solidFill>
+                        <a:srgbClr val="D5DBD3"/>
+                      </a:solidFill>
+                      <a:prstDash val="solid"/>
+                      <a:round/>
+                      <a:headEnd type="none" w="med" len="med"/>
+                      <a:tailEnd type="none" w="med" len="med"/>
+                    </a:lnB>
+                    <a:solidFill>
+                      <a:srgbClr val="2C5F2D"/>
+                    </a:solidFill>
+                  </a:tcPr>
+                </a:tc>
+              </a:tr>
+              <a:tr h="0">
+                <a:tc>
+                  <a:txBody>
+                    <a:bodyPr/>
+                    <a:lstStyle/>
+                    <a:p>
+                      <a:pPr indent="0" marL="0">
+                        <a:buNone/>
+                      </a:pPr>
+                      <a:r>
+                        <a:rPr lang="en-US" sz="950" dirty="0">
+                          <a:solidFill>
+                            <a:srgbClr val="1C2A1E"/>
+                          </a:solidFill>
+                          <a:latin typeface="Calibri" pitchFamily="34" charset="0"/>
+                          <a:ea typeface="Calibri" pitchFamily="34" charset="-122"/>
+                          <a:cs typeface="Calibri" pitchFamily="34" charset="-120"/>
+                        </a:rPr>
+                        <a:t>사전 점검</a:t>
+                      </a:r>
+                      <a:endParaRPr lang="en-US" sz="950" dirty="0">
+                        <a:latin typeface="Calibri" charset="0"/>
+                        <a:ea typeface="Calibri" charset="0"/>
+                        <a:cs typeface="Calibri" charset="0"/>
+                      </a:endParaRPr>
+                    </a:p>
+                  </a:txBody>
+                  <a:tcPr marL="45720" marR="45720" marT="45720" marB="45720" anchor="t">
+                    <a:lnL w="6350" cap="flat" cmpd="sng" algn="ctr">
+                      <a:solidFill>
+                        <a:srgbClr val="D5DBD3"/>
+                      </a:solidFill>
+                      <a:prstDash val="solid"/>
+                      <a:round/>
+                      <a:headEnd type="none" w="med" len="med"/>
+                      <a:tailEnd type="none" w="med" len="med"/>
+                    </a:lnL>
+                    <a:lnR w="6350" cap="flat" cmpd="sng" algn="ctr">
+                      <a:solidFill>
+                        <a:srgbClr val="D5DBD3"/>
+                      </a:solidFill>
+                      <a:prstDash val="solid"/>
+                      <a:round/>
+                      <a:headEnd type="none" w="med" len="med"/>
+                      <a:tailEnd type="none" w="med" len="med"/>
+                    </a:lnR>
+                    <a:lnT w="6350" cap="flat" cmpd="sng" algn="ctr">
+                      <a:solidFill>
+                        <a:srgbClr val="D5DBD3"/>
+                      </a:solidFill>
+                      <a:prstDash val="solid"/>
+                      <a:round/>
+                      <a:headEnd type="none" w="med" len="med"/>
+                      <a:tailEnd type="none" w="med" len="med"/>
+                    </a:lnT>
+                    <a:lnB w="6350" cap="flat" cmpd="sng" algn="ctr">
+                      <a:solidFill>
+                        <a:srgbClr val="D5DBD3"/>
+                      </a:solidFill>
+                      <a:prstDash val="solid"/>
+                      <a:round/>
+                      <a:headEnd type="none" w="med" len="med"/>
+                      <a:tailEnd type="none" w="med" len="med"/>
+                    </a:lnB>
+                    <a:solidFill>
+                      <a:srgbClr val="EEF3EA"/>
+                    </a:solidFill>
+                  </a:tcPr>
+                </a:tc>
+                <a:tc>
+                  <a:txBody>
+                    <a:bodyPr/>
+                    <a:lstStyle/>
+                    <a:p>
+                      <a:pPr indent="0" marL="0">
+                        <a:buNone/>
+                      </a:pPr>
+                      <a:r>
+                        <a:rPr lang="en-US" sz="950" dirty="0">
+                          <a:solidFill>
+                            <a:srgbClr val="1C2A1E"/>
+                          </a:solidFill>
+                          <a:latin typeface="Calibri" pitchFamily="34" charset="0"/>
+                          <a:ea typeface="Calibri" pitchFamily="34" charset="-122"/>
+                          <a:cs typeface="Calibri" pitchFamily="34" charset="-120"/>
+                        </a:rPr>
+                        <a:t>preflight: java FAIL 17 but build.require_java_major is 21 …</a:t>
+                      </a:r>
+                      <a:endParaRPr lang="en-US" sz="950" dirty="0">
+                        <a:latin typeface="Calibri" charset="0"/>
+                        <a:ea typeface="Calibri" charset="0"/>
+                        <a:cs typeface="Calibri" charset="0"/>
+                      </a:endParaRPr>
+                    </a:p>
+                  </a:txBody>
+                  <a:tcPr marL="45720" marR="45720" marT="45720" marB="45720" anchor="t">
+                    <a:lnL w="6350" cap="flat" cmpd="sng" algn="ctr">
+                      <a:solidFill>
+                        <a:srgbClr val="D5DBD3"/>
+                      </a:solidFill>
+                      <a:prstDash val="solid"/>
+                      <a:round/>
+                      <a:headEnd type="none" w="med" len="med"/>
+                      <a:tailEnd type="none" w="med" len="med"/>
+                    </a:lnL>
+                    <a:lnR w="6350" cap="flat" cmpd="sng" algn="ctr">
+                      <a:solidFill>
+                        <a:srgbClr val="D5DBD3"/>
+                      </a:solidFill>
+                      <a:prstDash val="solid"/>
+                      <a:round/>
+                      <a:headEnd type="none" w="med" len="med"/>
+                      <a:tailEnd type="none" w="med" len="med"/>
+                    </a:lnR>
+                    <a:lnT w="6350" cap="flat" cmpd="sng" algn="ctr">
+                      <a:solidFill>
+                        <a:srgbClr val="D5DBD3"/>
+                      </a:solidFill>
+                      <a:prstDash val="solid"/>
+                      <a:round/>
+                      <a:headEnd type="none" w="med" len="med"/>
+                      <a:tailEnd type="none" w="med" len="med"/>
+                    </a:lnT>
+                    <a:lnB w="6350" cap="flat" cmpd="sng" algn="ctr">
+                      <a:solidFill>
+                        <a:srgbClr val="D5DBD3"/>
+                      </a:solidFill>
+                      <a:prstDash val="solid"/>
+                      <a:round/>
+                      <a:headEnd type="none" w="med" len="med"/>
+                      <a:tailEnd type="none" w="med" len="med"/>
+                    </a:lnB>
+                    <a:solidFill>
+                      <a:srgbClr val="EEF3EA"/>
+                    </a:solidFill>
+                  </a:tcPr>
+                </a:tc>
+                <a:tc>
+                  <a:txBody>
+                    <a:bodyPr/>
+                    <a:lstStyle/>
+                    <a:p>
+                      <a:pPr indent="0" marL="0">
+                        <a:buNone/>
+                      </a:pPr>
+                      <a:r>
+                        <a:rPr lang="en-US" sz="950" dirty="0">
+                          <a:solidFill>
+                            <a:srgbClr val="1C2A1E"/>
+                          </a:solidFill>
+                          <a:latin typeface="Calibri" pitchFamily="34" charset="0"/>
+                          <a:ea typeface="Calibri" pitchFamily="34" charset="-122"/>
+                          <a:cs typeface="Calibri" pitchFamily="34" charset="-120"/>
+                        </a:rPr>
+                        <a:t>첫 프로젝트 전 disk · maven · java · settings · repository · llm 점검, 설정 오류면 바로 멈춤</a:t>
+                      </a:r>
+                      <a:endParaRPr lang="en-US" sz="950" dirty="0">
+                        <a:latin typeface="Calibri" charset="0"/>
+                        <a:ea typeface="Calibri" charset="0"/>
+                        <a:cs typeface="Calibri" charset="0"/>
+                      </a:endParaRPr>
+                    </a:p>
+                  </a:txBody>
+                  <a:tcPr marL="45720" marR="45720" marT="45720" marB="45720" anchor="t">
+                    <a:lnL w="6350" cap="flat" cmpd="sng" algn="ctr">
+                      <a:solidFill>
+                        <a:srgbClr val="D5DBD3"/>
+                      </a:solidFill>
+                      <a:prstDash val="solid"/>
+                      <a:round/>
+                      <a:headEnd type="none" w="med" len="med"/>
+                      <a:tailEnd type="none" w="med" len="med"/>
+                    </a:lnL>
+                    <a:lnR w="6350" cap="flat" cmpd="sng" algn="ctr">
+                      <a:solidFill>
+                        <a:srgbClr val="D5DBD3"/>
+                      </a:solidFill>
+                      <a:prstDash val="solid"/>
+                      <a:round/>
+                      <a:headEnd type="none" w="med" len="med"/>
+                      <a:tailEnd type="none" w="med" len="med"/>
+                    </a:lnR>
+                    <a:lnT w="6350" cap="flat" cmpd="sng" algn="ctr">
+                      <a:solidFill>
+                        <a:srgbClr val="D5DBD3"/>
+                      </a:solidFill>
+                      <a:prstDash val="solid"/>
+                      <a:round/>
+                      <a:headEnd type="none" w="med" len="med"/>
+                      <a:tailEnd type="none" w="med" len="med"/>
+                    </a:lnT>
+                    <a:lnB w="6350" cap="flat" cmpd="sng" algn="ctr">
+                      <a:solidFill>
+                        <a:srgbClr val="D5DBD3"/>
+                      </a:solidFill>
+                      <a:prstDash val="solid"/>
+                      <a:round/>
+                      <a:headEnd type="none" w="med" len="med"/>
+                      <a:tailEnd type="none" w="med" len="med"/>
+                    </a:lnB>
+                    <a:solidFill>
+                      <a:srgbClr val="EEF3EA"/>
+                    </a:solidFill>
+                  </a:tcPr>
+                </a:tc>
+              </a:tr>
+              <a:tr h="0">
+                <a:tc>
+                  <a:txBody>
+                    <a:bodyPr/>
+                    <a:lstStyle/>
+                    <a:p>
+                      <a:pPr indent="0" marL="0">
+                        <a:buNone/>
+                      </a:pPr>
+                      <a:r>
+                        <a:rPr lang="en-US" sz="950" dirty="0">
+                          <a:solidFill>
+                            <a:srgbClr val="1C2A1E"/>
+                          </a:solidFill>
+                          <a:latin typeface="Calibri" pitchFamily="34" charset="0"/>
+                          <a:ea typeface="Calibri" pitchFamily="34" charset="-122"/>
+                          <a:cs typeface="Calibri" pitchFamily="34" charset="-120"/>
+                        </a:rPr>
+                        <a:t>인프라 차단기</a:t>
+                      </a:r>
+                      <a:endParaRPr lang="en-US" sz="950" dirty="0">
+                        <a:latin typeface="Calibri" charset="0"/>
+                        <a:ea typeface="Calibri" charset="0"/>
+                        <a:cs typeface="Calibri" charset="0"/>
+                      </a:endParaRPr>
+                    </a:p>
+                  </a:txBody>
+                  <a:tcPr marL="45720" marR="45720" marT="45720" marB="45720" anchor="t">
+                    <a:lnL w="6350" cap="flat" cmpd="sng" algn="ctr">
+                      <a:solidFill>
+                        <a:srgbClr val="D5DBD3"/>
+                      </a:solidFill>
+                      <a:prstDash val="solid"/>
+                      <a:round/>
+                      <a:headEnd type="none" w="med" len="med"/>
+                      <a:tailEnd type="none" w="med" len="med"/>
+                    </a:lnL>
+                    <a:lnR w="6350" cap="flat" cmpd="sng" algn="ctr">
+                      <a:solidFill>
+                        <a:srgbClr val="D5DBD3"/>
+                      </a:solidFill>
+                      <a:prstDash val="solid"/>
+                      <a:round/>
+                      <a:headEnd type="none" w="med" len="med"/>
+                      <a:tailEnd type="none" w="med" len="med"/>
+                    </a:lnR>
+                    <a:lnT w="6350" cap="flat" cmpd="sng" algn="ctr">
+                      <a:solidFill>
+                        <a:srgbClr val="D5DBD3"/>
+                      </a:solidFill>
+                      <a:prstDash val="solid"/>
+                      <a:round/>
+                      <a:headEnd type="none" w="med" len="med"/>
+                      <a:tailEnd type="none" w="med" len="med"/>
+                    </a:lnT>
+                    <a:lnB w="6350" cap="flat" cmpd="sng" algn="ctr">
+                      <a:solidFill>
+                        <a:srgbClr val="D5DBD3"/>
+                      </a:solidFill>
+                      <a:prstDash val="solid"/>
+                      <a:round/>
+                      <a:headEnd type="none" w="med" len="med"/>
+                      <a:tailEnd type="none" w="med" len="med"/>
+                    </a:lnB>
+                    <a:solidFill>
+                      <a:srgbClr val="FFFFFF"/>
+                    </a:solidFill>
+                  </a:tcPr>
+                </a:tc>
+                <a:tc>
+                  <a:txBody>
+                    <a:bodyPr/>
+                    <a:lstStyle/>
+                    <a:p>
+                      <a:pPr indent="0" marL="0">
+                        <a:buNone/>
+                      </a:pPr>
+                      <a:r>
+                        <a:rPr lang="en-US" sz="950" dirty="0">
+                          <a:solidFill>
+                            <a:srgbClr val="1C2A1E"/>
+                          </a:solidFill>
+                          <a:latin typeface="Calibri" pitchFamily="34" charset="0"/>
+                          <a:ea typeface="Calibri" pitchFamily="34" charset="-122"/>
+                          <a:cs typeface="Calibri" pitchFamily="34" charset="-120"/>
+                        </a:rPr>
+                        <a:t>fleet: infrastructure llm unavailable since &lt;project&gt; - waiting 15 min …</a:t>
+                      </a:r>
+                      <a:endParaRPr lang="en-US" sz="950" dirty="0">
+                        <a:latin typeface="Calibri" charset="0"/>
+                        <a:ea typeface="Calibri" charset="0"/>
+                        <a:cs typeface="Calibri" charset="0"/>
+                      </a:endParaRPr>
+                    </a:p>
+                  </a:txBody>
+                  <a:tcPr marL="45720" marR="45720" marT="45720" marB="45720" anchor="t">
+                    <a:lnL w="6350" cap="flat" cmpd="sng" algn="ctr">
+                      <a:solidFill>
+                        <a:srgbClr val="D5DBD3"/>
+                      </a:solidFill>
+                      <a:prstDash val="solid"/>
+                      <a:round/>
+                      <a:headEnd type="none" w="med" len="med"/>
+                      <a:tailEnd type="none" w="med" len="med"/>
+                    </a:lnL>
+                    <a:lnR w="6350" cap="flat" cmpd="sng" algn="ctr">
+                      <a:solidFill>
+                        <a:srgbClr val="D5DBD3"/>
+                      </a:solidFill>
+                      <a:prstDash val="solid"/>
+                      <a:round/>
+                      <a:headEnd type="none" w="med" len="med"/>
+                      <a:tailEnd type="none" w="med" len="med"/>
+                    </a:lnR>
+                    <a:lnT w="6350" cap="flat" cmpd="sng" algn="ctr">
+                      <a:solidFill>
+                        <a:srgbClr val="D5DBD3"/>
+                      </a:solidFill>
+                      <a:prstDash val="solid"/>
+                      <a:round/>
+                      <a:headEnd type="none" w="med" len="med"/>
+                      <a:tailEnd type="none" w="med" len="med"/>
+                    </a:lnT>
+                    <a:lnB w="6350" cap="flat" cmpd="sng" algn="ctr">
+                      <a:solidFill>
+                        <a:srgbClr val="D5DBD3"/>
+                      </a:solidFill>
+                      <a:prstDash val="solid"/>
+                      <a:round/>
+                      <a:headEnd type="none" w="med" len="med"/>
+                      <a:tailEnd type="none" w="med" len="med"/>
+                    </a:lnB>
+                    <a:solidFill>
+                      <a:srgbClr val="FFFFFF"/>
+                    </a:solidFill>
+                  </a:tcPr>
+                </a:tc>
+                <a:tc>
+                  <a:txBody>
+                    <a:bodyPr/>
+                    <a:lstStyle/>
+                    <a:p>
+                      <a:pPr indent="0" marL="0">
+                        <a:buNone/>
+                      </a:pPr>
+                      <a:r>
+                        <a:rPr lang="en-US" sz="950" dirty="0">
+                          <a:solidFill>
+                            <a:srgbClr val="1C2A1E"/>
+                          </a:solidFill>
+                          <a:latin typeface="Calibri" pitchFamily="34" charset="0"/>
+                          <a:ea typeface="Calibri" pitchFamily="34" charset="-122"/>
+                          <a:cs typeface="Calibri" pitchFamily="34" charset="-120"/>
+                        </a:rPr>
+                        <a:t>infra:&lt;kind&gt;로 끝난 프로젝트는 pending. 연속 3개면 15분 대기 후 재점검, 4번 넘으면 fleet stopped(exit 3) → 같은 명령으로 재개</a:t>
+                      </a:r>
+                      <a:endParaRPr lang="en-US" sz="950" dirty="0">
+                        <a:latin typeface="Calibri" charset="0"/>
+                        <a:ea typeface="Calibri" charset="0"/>
+                        <a:cs typeface="Calibri" charset="0"/>
+                      </a:endParaRPr>
+                    </a:p>
+                  </a:txBody>
+                  <a:tcPr marL="45720" marR="45720" marT="45720" marB="45720" anchor="t">
+                    <a:lnL w="6350" cap="flat" cmpd="sng" algn="ctr">
+                      <a:solidFill>
+                        <a:srgbClr val="D5DBD3"/>
+                      </a:solidFill>
+                      <a:prstDash val="solid"/>
+                      <a:round/>
+                      <a:headEnd type="none" w="med" len="med"/>
+                      <a:tailEnd type="none" w="med" len="med"/>
+                    </a:lnL>
+                    <a:lnR w="6350" cap="flat" cmpd="sng" algn="ctr">
+                      <a:solidFill>
+                        <a:srgbClr val="D5DBD3"/>
+                      </a:solidFill>
+                      <a:prstDash val="solid"/>
+                      <a:round/>
+                      <a:headEnd type="none" w="med" len="med"/>
+                      <a:tailEnd type="none" w="med" len="med"/>
+                    </a:lnR>
+                    <a:lnT w="6350" cap="flat" cmpd="sng" algn="ctr">
+                      <a:solidFill>
+                        <a:srgbClr val="D5DBD3"/>
+                      </a:solidFill>
+                      <a:prstDash val="solid"/>
+                      <a:round/>
+                      <a:headEnd type="none" w="med" len="med"/>
+                      <a:tailEnd type="none" w="med" len="med"/>
+                    </a:lnT>
+                    <a:lnB w="6350" cap="flat" cmpd="sng" algn="ctr">
+                      <a:solidFill>
+                        <a:srgbClr val="D5DBD3"/>
+                      </a:solidFill>
+                      <a:prstDash val="solid"/>
+                      <a:round/>
+                      <a:headEnd type="none" w="med" len="med"/>
+                      <a:tailEnd type="none" w="med" len="med"/>
+                    </a:lnB>
+                    <a:solidFill>
+                      <a:srgbClr val="FFFFFF"/>
+                    </a:solidFill>
+                  </a:tcPr>
+                </a:tc>
+              </a:tr>
+              <a:tr h="0">
+                <a:tc>
+                  <a:txBody>
+                    <a:bodyPr/>
+                    <a:lstStyle/>
+                    <a:p>
+                      <a:pPr indent="0" marL="0">
+                        <a:buNone/>
+                      </a:pPr>
+                      <a:r>
+                        <a:rPr lang="en-US" sz="950" dirty="0">
+                          <a:solidFill>
+                            <a:srgbClr val="1C2A1E"/>
+                          </a:solidFill>
+                          <a:latin typeface="Calibri" pitchFamily="34" charset="0"/>
+                          <a:ea typeface="Calibri" pitchFamily="34" charset="-122"/>
+                          <a:cs typeface="Calibri" pitchFamily="34" charset="-120"/>
+                        </a:rPr>
+                        <a:t>디스크</a:t>
+                      </a:r>
+                      <a:endParaRPr lang="en-US" sz="950" dirty="0">
+                        <a:latin typeface="Calibri" charset="0"/>
+                        <a:ea typeface="Calibri" charset="0"/>
+                        <a:cs typeface="Calibri" charset="0"/>
+                      </a:endParaRPr>
+                    </a:p>
+                  </a:txBody>
+                  <a:tcPr marL="45720" marR="45720" marT="45720" marB="45720" anchor="t">
+                    <a:lnL w="6350" cap="flat" cmpd="sng" algn="ctr">
+                      <a:solidFill>
+                        <a:srgbClr val="D5DBD3"/>
+                      </a:solidFill>
+                      <a:prstDash val="solid"/>
+                      <a:round/>
+                      <a:headEnd type="none" w="med" len="med"/>
+                      <a:tailEnd type="none" w="med" len="med"/>
+                    </a:lnL>
+                    <a:lnR w="6350" cap="flat" cmpd="sng" algn="ctr">
+                      <a:solidFill>
+                        <a:srgbClr val="D5DBD3"/>
+                      </a:solidFill>
+                      <a:prstDash val="solid"/>
+                      <a:round/>
+                      <a:headEnd type="none" w="med" len="med"/>
+                      <a:tailEnd type="none" w="med" len="med"/>
+                    </a:lnR>
+                    <a:lnT w="6350" cap="flat" cmpd="sng" algn="ctr">
+                      <a:solidFill>
+                        <a:srgbClr val="D5DBD3"/>
+                      </a:solidFill>
+                      <a:prstDash val="solid"/>
+                      <a:round/>
+                      <a:headEnd type="none" w="med" len="med"/>
+                      <a:tailEnd type="none" w="med" len="med"/>
+                    </a:lnT>
+                    <a:lnB w="6350" cap="flat" cmpd="sng" algn="ctr">
+                      <a:solidFill>
+                        <a:srgbClr val="D5DBD3"/>
+                      </a:solidFill>
+                      <a:prstDash val="solid"/>
+                      <a:round/>
+                      <a:headEnd type="none" w="med" len="med"/>
+                      <a:tailEnd type="none" w="med" len="med"/>
+                    </a:lnB>
+                    <a:solidFill>
+                      <a:srgbClr val="EEF3EA"/>
+                    </a:solidFill>
+                  </a:tcPr>
+                </a:tc>
+                <a:tc>
+                  <a:txBody>
+                    <a:bodyPr/>
+                    <a:lstStyle/>
+                    <a:p>
+                      <a:pPr indent="0" marL="0">
+                        <a:buNone/>
+                      </a:pPr>
+                      <a:r>
+                        <a:rPr lang="en-US" sz="950" dirty="0">
+                          <a:solidFill>
+                            <a:srgbClr val="1C2A1E"/>
+                          </a:solidFill>
+                          <a:latin typeface="Calibri" pitchFamily="34" charset="0"/>
+                          <a:ea typeface="Calibri" pitchFamily="34" charset="-122"/>
+                          <a:cs typeface="Calibri" pitchFamily="34" charset="-120"/>
+                        </a:rPr>
+                        <a:t>preflight: disk FAIL … GB free … (min 5)</a:t>
+                      </a:r>
+                      <a:endParaRPr lang="en-US" sz="950" dirty="0">
+                        <a:latin typeface="Calibri" charset="0"/>
+                        <a:ea typeface="Calibri" charset="0"/>
+                        <a:cs typeface="Calibri" charset="0"/>
+                      </a:endParaRPr>
+                    </a:p>
+                  </a:txBody>
+                  <a:tcPr marL="45720" marR="45720" marT="45720" marB="45720" anchor="t">
+                    <a:lnL w="6350" cap="flat" cmpd="sng" algn="ctr">
+                      <a:solidFill>
+                        <a:srgbClr val="D5DBD3"/>
+                      </a:solidFill>
+                      <a:prstDash val="solid"/>
+                      <a:round/>
+                      <a:headEnd type="none" w="med" len="med"/>
+                      <a:tailEnd type="none" w="med" len="med"/>
+                    </a:lnL>
+                    <a:lnR w="6350" cap="flat" cmpd="sng" algn="ctr">
+                      <a:solidFill>
+                        <a:srgbClr val="D5DBD3"/>
+                      </a:solidFill>
+                      <a:prstDash val="solid"/>
+                      <a:round/>
+                      <a:headEnd type="none" w="med" len="med"/>
+                      <a:tailEnd type="none" w="med" len="med"/>
+                    </a:lnR>
+                    <a:lnT w="6350" cap="flat" cmpd="sng" algn="ctr">
+                      <a:solidFill>
+                        <a:srgbClr val="D5DBD3"/>
+                      </a:solidFill>
+                      <a:prstDash val="solid"/>
+                      <a:round/>
+                      <a:headEnd type="none" w="med" len="med"/>
+                      <a:tailEnd type="none" w="med" len="med"/>
+                    </a:lnT>
+                    <a:lnB w="6350" cap="flat" cmpd="sng" algn="ctr">
+                      <a:solidFill>
+                        <a:srgbClr val="D5DBD3"/>
+                      </a:solidFill>
+                      <a:prstDash val="solid"/>
+                      <a:round/>
+                      <a:headEnd type="none" w="med" len="med"/>
+                      <a:tailEnd type="none" w="med" len="med"/>
+                    </a:lnB>
+                    <a:solidFill>
+                      <a:srgbClr val="EEF3EA"/>
+                    </a:solidFill>
+                  </a:tcPr>
+                </a:tc>
+                <a:tc>
+                  <a:txBody>
+                    <a:bodyPr/>
+                    <a:lstStyle/>
+                    <a:p>
+                      <a:pPr indent="0" marL="0">
+                        <a:buNone/>
+                      </a:pPr>
+                      <a:r>
+                        <a:rPr lang="en-US" sz="950" dirty="0">
+                          <a:solidFill>
+                            <a:srgbClr val="1C2A1E"/>
+                          </a:solidFill>
+                          <a:latin typeface="Calibri" pitchFamily="34" charset="0"/>
+                          <a:ea typeface="Calibri" pitchFamily="34" charset="-122"/>
+                          <a:cs typeface="Calibri" pitchFamily="34" charset="-120"/>
+                        </a:rPr>
+                        <a:t>프로젝트마다 여유 공간 확인, 끝나면 target/ 삭제(fleet.cleanup), 쌓인 사본은 sbmig clean</a:t>
+                      </a:r>
+                      <a:endParaRPr lang="en-US" sz="950" dirty="0">
+                        <a:latin typeface="Calibri" charset="0"/>
+                        <a:ea typeface="Calibri" charset="0"/>
+                        <a:cs typeface="Calibri" charset="0"/>
+                      </a:endParaRPr>
+                    </a:p>
+                  </a:txBody>
+                  <a:tcPr marL="45720" marR="45720" marT="45720" marB="45720" anchor="t">
+                    <a:lnL w="6350" cap="flat" cmpd="sng" algn="ctr">
+                      <a:solidFill>
+                        <a:srgbClr val="D5DBD3"/>
+                      </a:solidFill>
+                      <a:prstDash val="solid"/>
+                      <a:round/>
+                      <a:headEnd type="none" w="med" len="med"/>
+                      <a:tailEnd type="none" w="med" len="med"/>
+                    </a:lnL>
+                    <a:lnR w="6350" cap="flat" cmpd="sng" algn="ctr">
+                      <a:solidFill>
+                        <a:srgbClr val="D5DBD3"/>
+                      </a:solidFill>
+                      <a:prstDash val="solid"/>
+                      <a:round/>
+                      <a:headEnd type="none" w="med" len="med"/>
+                      <a:tailEnd type="none" w="med" len="med"/>
+                    </a:lnR>
+                    <a:lnT w="6350" cap="flat" cmpd="sng" algn="ctr">
+                      <a:solidFill>
+                        <a:srgbClr val="D5DBD3"/>
+                      </a:solidFill>
+                      <a:prstDash val="solid"/>
+                      <a:round/>
+                      <a:headEnd type="none" w="med" len="med"/>
+                      <a:tailEnd type="none" w="med" len="med"/>
+                    </a:lnT>
+                    <a:lnB w="6350" cap="flat" cmpd="sng" algn="ctr">
+                      <a:solidFill>
+                        <a:srgbClr val="D5DBD3"/>
+                      </a:solidFill>
+                      <a:prstDash val="solid"/>
+                      <a:round/>
+                      <a:headEnd type="none" w="med" len="med"/>
+                      <a:tailEnd type="none" w="med" len="med"/>
+                    </a:lnB>
+                    <a:solidFill>
+                      <a:srgbClr val="EEF3EA"/>
+                    </a:solidFill>
+                  </a:tcPr>
+                </a:tc>
+              </a:tr>
+              <a:tr h="0">
+                <a:tc>
+                  <a:txBody>
+                    <a:bodyPr/>
+                    <a:lstStyle/>
+                    <a:p>
+                      <a:pPr indent="0" marL="0">
+                        <a:buNone/>
+                      </a:pPr>
+                      <a:r>
+                        <a:rPr lang="en-US" sz="950" dirty="0">
+                          <a:solidFill>
+                            <a:srgbClr val="1C2A1E"/>
+                          </a:solidFill>
+                          <a:latin typeface="Calibri" pitchFamily="34" charset="0"/>
+                          <a:ea typeface="Calibri" pitchFamily="34" charset="-122"/>
+                          <a:cs typeface="Calibri" pitchFamily="34" charset="-120"/>
+                        </a:rPr>
+                        <a:t>한 줄 결과</a:t>
+                      </a:r>
+                      <a:endParaRPr lang="en-US" sz="950" dirty="0">
+                        <a:latin typeface="Calibri" charset="0"/>
+                        <a:ea typeface="Calibri" charset="0"/>
+                        <a:cs typeface="Calibri" charset="0"/>
+                      </a:endParaRPr>
+                    </a:p>
+                  </a:txBody>
+                  <a:tcPr marL="45720" marR="45720" marT="45720" marB="45720" anchor="t">
+                    <a:lnL w="6350" cap="flat" cmpd="sng" algn="ctr">
+                      <a:solidFill>
+                        <a:srgbClr val="D5DBD3"/>
+                      </a:solidFill>
+                      <a:prstDash val="solid"/>
+                      <a:round/>
+                      <a:headEnd type="none" w="med" len="med"/>
+                      <a:tailEnd type="none" w="med" len="med"/>
+                    </a:lnL>
+                    <a:lnR w="6350" cap="flat" cmpd="sng" algn="ctr">
+                      <a:solidFill>
+                        <a:srgbClr val="D5DBD3"/>
+                      </a:solidFill>
+                      <a:prstDash val="solid"/>
+                      <a:round/>
+                      <a:headEnd type="none" w="med" len="med"/>
+                      <a:tailEnd type="none" w="med" len="med"/>
+                    </a:lnR>
+                    <a:lnT w="6350" cap="flat" cmpd="sng" algn="ctr">
+                      <a:solidFill>
+                        <a:srgbClr val="D5DBD3"/>
+                      </a:solidFill>
+                      <a:prstDash val="solid"/>
+                      <a:round/>
+                      <a:headEnd type="none" w="med" len="med"/>
+                      <a:tailEnd type="none" w="med" len="med"/>
+                    </a:lnT>
+                    <a:lnB w="6350" cap="flat" cmpd="sng" algn="ctr">
+                      <a:solidFill>
+                        <a:srgbClr val="D5DBD3"/>
+                      </a:solidFill>
+                      <a:prstDash val="solid"/>
+                      <a:round/>
+                      <a:headEnd type="none" w="med" len="med"/>
+                      <a:tailEnd type="none" w="med" len="med"/>
+                    </a:lnB>
+                    <a:solidFill>
+                      <a:srgbClr val="FFFFFF"/>
+                    </a:solidFill>
+                  </a:tcPr>
+                </a:tc>
+                <a:tc>
+                  <a:txBody>
+                    <a:bodyPr/>
+                    <a:lstStyle/>
+                    <a:p>
+                      <a:pPr indent="0" marL="0">
+                        <a:buNone/>
+                      </a:pPr>
+                      <a:r>
+                        <a:rPr lang="en-US" sz="950" dirty="0">
+                          <a:solidFill>
+                            <a:srgbClr val="1C2A1E"/>
+                          </a:solidFill>
+                          <a:latin typeface="Calibri" pitchFamily="34" charset="0"/>
+                          <a:ea typeface="Calibri" pitchFamily="34" charset="-122"/>
+                          <a:cs typeface="Calibri" pitchFamily="34" charset="-120"/>
+                        </a:rPr>
+                        <a:t>SBMIG-RESULT run=… exit=2 build=FAIL unresolved=3 blocked=1 llm=7 attn=…</a:t>
+                      </a:r>
+                      <a:endParaRPr lang="en-US" sz="950" dirty="0">
+                        <a:latin typeface="Calibri" charset="0"/>
+                        <a:ea typeface="Calibri" charset="0"/>
+                        <a:cs typeface="Calibri" charset="0"/>
+                      </a:endParaRPr>
+                    </a:p>
+                  </a:txBody>
+                  <a:tcPr marL="45720" marR="45720" marT="45720" marB="45720" anchor="t">
+                    <a:lnL w="6350" cap="flat" cmpd="sng" algn="ctr">
+                      <a:solidFill>
+                        <a:srgbClr val="D5DBD3"/>
+                      </a:solidFill>
+                      <a:prstDash val="solid"/>
+                      <a:round/>
+                      <a:headEnd type="none" w="med" len="med"/>
+                      <a:tailEnd type="none" w="med" len="med"/>
+                    </a:lnL>
+                    <a:lnR w="6350" cap="flat" cmpd="sng" algn="ctr">
+                      <a:solidFill>
+                        <a:srgbClr val="D5DBD3"/>
+                      </a:solidFill>
+                      <a:prstDash val="solid"/>
+                      <a:round/>
+                      <a:headEnd type="none" w="med" len="med"/>
+                      <a:tailEnd type="none" w="med" len="med"/>
+                    </a:lnR>
+                    <a:lnT w="6350" cap="flat" cmpd="sng" algn="ctr">
+                      <a:solidFill>
+                        <a:srgbClr val="D5DBD3"/>
+                      </a:solidFill>
+                      <a:prstDash val="solid"/>
+                      <a:round/>
+                      <a:headEnd type="none" w="med" len="med"/>
+                      <a:tailEnd type="none" w="med" len="med"/>
+                    </a:lnT>
+                    <a:lnB w="6350" cap="flat" cmpd="sng" algn="ctr">
+                      <a:solidFill>
+                        <a:srgbClr val="D5DBD3"/>
+                      </a:solidFill>
+                      <a:prstDash val="solid"/>
+                      <a:round/>
+                      <a:headEnd type="none" w="med" len="med"/>
+                      <a:tailEnd type="none" w="med" len="med"/>
+                    </a:lnB>
+                    <a:solidFill>
+                      <a:srgbClr val="FFFFFF"/>
+                    </a:solidFill>
+                  </a:tcPr>
+                </a:tc>
+                <a:tc>
+                  <a:txBody>
+                    <a:bodyPr/>
+                    <a:lstStyle/>
+                    <a:p>
+                      <a:pPr indent="0" marL="0">
+                        <a:buNone/>
+                      </a:pPr>
+                      <a:r>
+                        <a:rPr lang="en-US" sz="950" dirty="0">
+                          <a:solidFill>
+                            <a:srgbClr val="1C2A1E"/>
+                          </a:solidFill>
+                          <a:latin typeface="Calibri" pitchFamily="34" charset="0"/>
+                          <a:ea typeface="Calibri" pitchFamily="34" charset="-122"/>
+                          <a:cs typeface="Calibri" pitchFamily="34" charset="-120"/>
+                        </a:rPr>
+                        <a:t>ASCII 한 줄 — 문제를 알릴 때 이 줄을 옮겨 적음. fleet status --attention이 주의 코드별로 묶음</a:t>
+                      </a:r>
+                      <a:endParaRPr lang="en-US" sz="950" dirty="0">
+                        <a:latin typeface="Calibri" charset="0"/>
+                        <a:ea typeface="Calibri" charset="0"/>
+                        <a:cs typeface="Calibri" charset="0"/>
+                      </a:endParaRPr>
+                    </a:p>
+                  </a:txBody>
+                  <a:tcPr marL="45720" marR="45720" marT="45720" marB="45720" anchor="t">
+                    <a:lnL w="6350" cap="flat" cmpd="sng" algn="ctr">
+                      <a:solidFill>
+                        <a:srgbClr val="D5DBD3"/>
+                      </a:solidFill>
+                      <a:prstDash val="solid"/>
+                      <a:round/>
+                      <a:headEnd type="none" w="med" len="med"/>
+                      <a:tailEnd type="none" w="med" len="med"/>
+                    </a:lnL>
+                    <a:lnR w="6350" cap="flat" cmpd="sng" algn="ctr">
+                      <a:solidFill>
+                        <a:srgbClr val="D5DBD3"/>
+                      </a:solidFill>
+                      <a:prstDash val="solid"/>
+                      <a:round/>
+                      <a:headEnd type="none" w="med" len="med"/>
+                      <a:tailEnd type="none" w="med" len="med"/>
+                    </a:lnR>
+                    <a:lnT w="6350" cap="flat" cmpd="sng" algn="ctr">
+                      <a:solidFill>
+                        <a:srgbClr val="D5DBD3"/>
+                      </a:solidFill>
+                      <a:prstDash val="solid"/>
+                      <a:round/>
+                      <a:headEnd type="none" w="med" len="med"/>
+                      <a:tailEnd type="none" w="med" len="med"/>
+                    </a:lnT>
+                    <a:lnB w="6350" cap="flat" cmpd="sng" algn="ctr">
+                      <a:solidFill>
+                        <a:srgbClr val="D5DBD3"/>
+                      </a:solidFill>
+                      <a:prstDash val="solid"/>
+                      <a:round/>
+                      <a:headEnd type="none" w="med" len="med"/>
+                      <a:tailEnd type="none" w="med" len="med"/>
+                    </a:lnB>
+                    <a:solidFill>
+                      <a:srgbClr val="FFFFFF"/>
+                    </a:solidFill>
+                  </a:tcPr>
+                </a:tc>
+              </a:tr>
+              <a:tr h="0">
+                <a:tc>
+                  <a:txBody>
+                    <a:bodyPr/>
+                    <a:lstStyle/>
+                    <a:p>
+                      <a:pPr indent="0" marL="0">
+                        <a:buNone/>
+                      </a:pPr>
+                      <a:r>
+                        <a:rPr lang="en-US" sz="950" dirty="0">
+                          <a:solidFill>
+                            <a:srgbClr val="1C2A1E"/>
+                          </a:solidFill>
+                          <a:latin typeface="Calibri" pitchFamily="34" charset="0"/>
+                          <a:ea typeface="Calibri" pitchFamily="34" charset="-122"/>
+                          <a:cs typeface="Calibri" pitchFamily="34" charset="-120"/>
+                        </a:rPr>
+                        <a:t>JDK 점검</a:t>
+                      </a:r>
+                      <a:endParaRPr lang="en-US" sz="950" dirty="0">
+                        <a:latin typeface="Calibri" charset="0"/>
+                        <a:ea typeface="Calibri" charset="0"/>
+                        <a:cs typeface="Calibri" charset="0"/>
+                      </a:endParaRPr>
+                    </a:p>
+                  </a:txBody>
+                  <a:tcPr marL="45720" marR="45720" marT="45720" marB="45720" anchor="t">
+                    <a:lnL w="6350" cap="flat" cmpd="sng" algn="ctr">
+                      <a:solidFill>
+                        <a:srgbClr val="D5DBD3"/>
+                      </a:solidFill>
+                      <a:prstDash val="solid"/>
+                      <a:round/>
+                      <a:headEnd type="none" w="med" len="med"/>
+                      <a:tailEnd type="none" w="med" len="med"/>
+                    </a:lnL>
+                    <a:lnR w="6350" cap="flat" cmpd="sng" algn="ctr">
+                      <a:solidFill>
+                        <a:srgbClr val="D5DBD3"/>
+                      </a:solidFill>
+                      <a:prstDash val="solid"/>
+                      <a:round/>
+                      <a:headEnd type="none" w="med" len="med"/>
+                      <a:tailEnd type="none" w="med" len="med"/>
+                    </a:lnR>
+                    <a:lnT w="6350" cap="flat" cmpd="sng" algn="ctr">
+                      <a:solidFill>
+                        <a:srgbClr val="D5DBD3"/>
+                      </a:solidFill>
+                      <a:prstDash val="solid"/>
+                      <a:round/>
+                      <a:headEnd type="none" w="med" len="med"/>
+                      <a:tailEnd type="none" w="med" len="med"/>
+                    </a:lnT>
+                    <a:lnB w="6350" cap="flat" cmpd="sng" algn="ctr">
+                      <a:solidFill>
+                        <a:srgbClr val="D5DBD3"/>
+                      </a:solidFill>
+                      <a:prstDash val="solid"/>
+                      <a:round/>
+                      <a:headEnd type="none" w="med" len="med"/>
+                      <a:tailEnd type="none" w="med" len="med"/>
+                    </a:lnB>
+                    <a:solidFill>
+                      <a:srgbClr val="EEF3EA"/>
+                    </a:solidFill>
+                  </a:tcPr>
+                </a:tc>
+                <a:tc>
+                  <a:txBody>
+                    <a:bodyPr/>
+                    <a:lstStyle/>
+                    <a:p>
+                      <a:pPr indent="0" marL="0">
+                        <a:buNone/>
+                      </a:pPr>
+                      <a:r>
+                        <a:rPr lang="en-US" sz="950" dirty="0">
+                          <a:solidFill>
+                            <a:srgbClr val="1C2A1E"/>
+                          </a:solidFill>
+                          <a:latin typeface="Calibri" pitchFamily="34" charset="0"/>
+                          <a:ea typeface="Calibri" pitchFamily="34" charset="-122"/>
+                          <a:cs typeface="Calibri" pitchFamily="34" charset="-120"/>
+                        </a:rPr>
+                        <a:t>run aborted: Maven runs on Java 17.0.9 (…), not Java 21</a:t>
+                      </a:r>
+                      <a:endParaRPr lang="en-US" sz="950" dirty="0">
+                        <a:latin typeface="Calibri" charset="0"/>
+                        <a:ea typeface="Calibri" charset="0"/>
+                        <a:cs typeface="Calibri" charset="0"/>
+                      </a:endParaRPr>
+                    </a:p>
+                  </a:txBody>
+                  <a:tcPr marL="45720" marR="45720" marT="45720" marB="45720" anchor="t">
+                    <a:lnL w="6350" cap="flat" cmpd="sng" algn="ctr">
+                      <a:solidFill>
+                        <a:srgbClr val="D5DBD3"/>
+                      </a:solidFill>
+                      <a:prstDash val="solid"/>
+                      <a:round/>
+                      <a:headEnd type="none" w="med" len="med"/>
+                      <a:tailEnd type="none" w="med" len="med"/>
+                    </a:lnL>
+                    <a:lnR w="6350" cap="flat" cmpd="sng" algn="ctr">
+                      <a:solidFill>
+                        <a:srgbClr val="D5DBD3"/>
+                      </a:solidFill>
+                      <a:prstDash val="solid"/>
+                      <a:round/>
+                      <a:headEnd type="none" w="med" len="med"/>
+                      <a:tailEnd type="none" w="med" len="med"/>
+                    </a:lnR>
+                    <a:lnT w="6350" cap="flat" cmpd="sng" algn="ctr">
+                      <a:solidFill>
+                        <a:srgbClr val="D5DBD3"/>
+                      </a:solidFill>
+                      <a:prstDash val="solid"/>
+                      <a:round/>
+                      <a:headEnd type="none" w="med" len="med"/>
+                      <a:tailEnd type="none" w="med" len="med"/>
+                    </a:lnT>
+                    <a:lnB w="6350" cap="flat" cmpd="sng" algn="ctr">
+                      <a:solidFill>
+                        <a:srgbClr val="D5DBD3"/>
+                      </a:solidFill>
+                      <a:prstDash val="solid"/>
+                      <a:round/>
+                      <a:headEnd type="none" w="med" len="med"/>
+                      <a:tailEnd type="none" w="med" len="med"/>
+                    </a:lnB>
+                    <a:solidFill>
+                      <a:srgbClr val="EEF3EA"/>
+                    </a:solidFill>
+                  </a:tcPr>
+                </a:tc>
+                <a:tc>
+                  <a:txBody>
+                    <a:bodyPr/>
+                    <a:lstStyle/>
+                    <a:p>
+                      <a:pPr indent="0" marL="0">
+                        <a:buNone/>
+                      </a:pPr>
+                      <a:r>
+                        <a:rPr lang="en-US" sz="950" dirty="0">
+                          <a:solidFill>
+                            <a:srgbClr val="1C2A1E"/>
+                          </a:solidFill>
+                          <a:latin typeface="Calibri" pitchFamily="34" charset="0"/>
+                          <a:ea typeface="Calibri" pitchFamily="34" charset="-122"/>
+                          <a:cs typeface="Calibri" pitchFamily="34" charset="-120"/>
+                        </a:rPr>
+                        <a:t>첫 빌드 전에 중단(jdk-not-21) → build.java_home 수정</a:t>
+                      </a:r>
+                      <a:endParaRPr lang="en-US" sz="950" dirty="0">
+                        <a:latin typeface="Calibri" charset="0"/>
+                        <a:ea typeface="Calibri" charset="0"/>
+                        <a:cs typeface="Calibri" charset="0"/>
+                      </a:endParaRPr>
+                    </a:p>
+                  </a:txBody>
+                  <a:tcPr marL="45720" marR="45720" marT="45720" marB="45720" anchor="t">
+                    <a:lnL w="6350" cap="flat" cmpd="sng" algn="ctr">
+                      <a:solidFill>
+                        <a:srgbClr val="D5DBD3"/>
+                      </a:solidFill>
+                      <a:prstDash val="solid"/>
+                      <a:round/>
+                      <a:headEnd type="none" w="med" len="med"/>
+                      <a:tailEnd type="none" w="med" len="med"/>
+                    </a:lnL>
+                    <a:lnR w="6350" cap="flat" cmpd="sng" algn="ctr">
+                      <a:solidFill>
+                        <a:srgbClr val="D5DBD3"/>
+                      </a:solidFill>
+                      <a:prstDash val="solid"/>
+                      <a:round/>
+                      <a:headEnd type="none" w="med" len="med"/>
+                      <a:tailEnd type="none" w="med" len="med"/>
+                    </a:lnR>
+                    <a:lnT w="6350" cap="flat" cmpd="sng" algn="ctr">
+                      <a:solidFill>
+                        <a:srgbClr val="D5DBD3"/>
+                      </a:solidFill>
+                      <a:prstDash val="solid"/>
+                      <a:round/>
+                      <a:headEnd type="none" w="med" len="med"/>
+                      <a:tailEnd type="none" w="med" len="med"/>
+                    </a:lnT>
+                    <a:lnB w="6350" cap="flat" cmpd="sng" algn="ctr">
+                      <a:solidFill>
+                        <a:srgbClr val="D5DBD3"/>
+                      </a:solidFill>
+                      <a:prstDash val="solid"/>
+                      <a:round/>
+                      <a:headEnd type="none" w="med" len="med"/>
+                      <a:tailEnd type="none" w="med" len="med"/>
+                    </a:lnB>
+                    <a:solidFill>
+                      <a:srgbClr val="EEF3EA"/>
+                    </a:solidFill>
+                  </a:tcPr>
+                </a:tc>
+              </a:tr>
+              <a:tr h="0">
+                <a:tc>
+                  <a:txBody>
+                    <a:bodyPr/>
+                    <a:lstStyle/>
+                    <a:p>
+                      <a:pPr indent="0" marL="0">
+                        <a:buNone/>
+                      </a:pPr>
+                      <a:r>
+                        <a:rPr lang="en-US" sz="950" dirty="0">
+                          <a:solidFill>
+                            <a:srgbClr val="1C2A1E"/>
+                          </a:solidFill>
+                          <a:latin typeface="Calibri" pitchFamily="34" charset="0"/>
+                          <a:ea typeface="Calibri" pitchFamily="34" charset="-122"/>
+                          <a:cs typeface="Calibri" pitchFamily="34" charset="-120"/>
+                        </a:rPr>
+                        <a:t>웹 토큰</a:t>
+                      </a:r>
+                      <a:endParaRPr lang="en-US" sz="950" dirty="0">
+                        <a:latin typeface="Calibri" charset="0"/>
+                        <a:ea typeface="Calibri" charset="0"/>
+                        <a:cs typeface="Calibri" charset="0"/>
+                      </a:endParaRPr>
+                    </a:p>
+                  </a:txBody>
+                  <a:tcPr marL="45720" marR="45720" marT="45720" marB="45720" anchor="t">
+                    <a:lnL w="6350" cap="flat" cmpd="sng" algn="ctr">
+                      <a:solidFill>
+                        <a:srgbClr val="D5DBD3"/>
+                      </a:solidFill>
+                      <a:prstDash val="solid"/>
+                      <a:round/>
+                      <a:headEnd type="none" w="med" len="med"/>
+                      <a:tailEnd type="none" w="med" len="med"/>
+                    </a:lnL>
+                    <a:lnR w="6350" cap="flat" cmpd="sng" algn="ctr">
+                      <a:solidFill>
+                        <a:srgbClr val="D5DBD3"/>
+                      </a:solidFill>
+                      <a:prstDash val="solid"/>
+                      <a:round/>
+                      <a:headEnd type="none" w="med" len="med"/>
+                      <a:tailEnd type="none" w="med" len="med"/>
+                    </a:lnR>
+                    <a:lnT w="6350" cap="flat" cmpd="sng" algn="ctr">
+                      <a:solidFill>
+                        <a:srgbClr val="D5DBD3"/>
+                      </a:solidFill>
+                      <a:prstDash val="solid"/>
+                      <a:round/>
+                      <a:headEnd type="none" w="med" len="med"/>
+                      <a:tailEnd type="none" w="med" len="med"/>
+                    </a:lnT>
+                    <a:lnB w="6350" cap="flat" cmpd="sng" algn="ctr">
+                      <a:solidFill>
+                        <a:srgbClr val="D5DBD3"/>
+                      </a:solidFill>
+                      <a:prstDash val="solid"/>
+                      <a:round/>
+                      <a:headEnd type="none" w="med" len="med"/>
+                      <a:tailEnd type="none" w="med" len="med"/>
+                    </a:lnB>
+                    <a:solidFill>
+                      <a:srgbClr val="FFFFFF"/>
+                    </a:solidFill>
+                  </a:tcPr>
+                </a:tc>
+                <a:tc>
+                  <a:txBody>
+                    <a:bodyPr/>
+                    <a:lstStyle/>
+                    <a:p>
+                      <a:pPr indent="0" marL="0">
+                        <a:buNone/>
+                      </a:pPr>
+                      <a:r>
+                        <a:rPr lang="en-US" sz="950" dirty="0">
+                          <a:solidFill>
+                            <a:srgbClr val="1C2A1E"/>
+                          </a:solidFill>
+                          <a:latin typeface="Calibri" pitchFamily="34" charset="0"/>
+                          <a:ea typeface="Calibri" pitchFamily="34" charset="-122"/>
+                          <a:cs typeface="Calibri" pitchFamily="34" charset="-120"/>
+                        </a:rPr>
+                        <a:t>refusing to serve on 0.0.0.0 without a token</a:t>
+                      </a:r>
+                      <a:endParaRPr lang="en-US" sz="950" dirty="0">
+                        <a:latin typeface="Calibri" charset="0"/>
+                        <a:ea typeface="Calibri" charset="0"/>
+                        <a:cs typeface="Calibri" charset="0"/>
+                      </a:endParaRPr>
+                    </a:p>
+                  </a:txBody>
+                  <a:tcPr marL="45720" marR="45720" marT="45720" marB="45720" anchor="t">
+                    <a:lnL w="6350" cap="flat" cmpd="sng" algn="ctr">
+                      <a:solidFill>
+                        <a:srgbClr val="D5DBD3"/>
+                      </a:solidFill>
+                      <a:prstDash val="solid"/>
+                      <a:round/>
+                      <a:headEnd type="none" w="med" len="med"/>
+                      <a:tailEnd type="none" w="med" len="med"/>
+                    </a:lnL>
+                    <a:lnR w="6350" cap="flat" cmpd="sng" algn="ctr">
+                      <a:solidFill>
+                        <a:srgbClr val="D5DBD3"/>
+                      </a:solidFill>
+                      <a:prstDash val="solid"/>
+                      <a:round/>
+                      <a:headEnd type="none" w="med" len="med"/>
+                      <a:tailEnd type="none" w="med" len="med"/>
+                    </a:lnR>
+                    <a:lnT w="6350" cap="flat" cmpd="sng" algn="ctr">
+                      <a:solidFill>
+                        <a:srgbClr val="D5DBD3"/>
+                      </a:solidFill>
+                      <a:prstDash val="solid"/>
+                      <a:round/>
+                      <a:headEnd type="none" w="med" len="med"/>
+                      <a:tailEnd type="none" w="med" len="med"/>
+                    </a:lnT>
+                    <a:lnB w="6350" cap="flat" cmpd="sng" algn="ctr">
+                      <a:solidFill>
+                        <a:srgbClr val="D5DBD3"/>
+                      </a:solidFill>
+                      <a:prstDash val="solid"/>
+                      <a:round/>
+                      <a:headEnd type="none" w="med" len="med"/>
+                      <a:tailEnd type="none" w="med" len="med"/>
+                    </a:lnB>
+                    <a:solidFill>
+                      <a:srgbClr val="FFFFFF"/>
+                    </a:solidFill>
+                  </a:tcPr>
+                </a:tc>
+                <a:tc>
+                  <a:txBody>
+                    <a:bodyPr/>
+                    <a:lstStyle/>
+                    <a:p>
+                      <a:pPr indent="0" marL="0">
+                        <a:buNone/>
+                      </a:pPr>
+                      <a:r>
+                        <a:rPr lang="en-US" sz="950" dirty="0">
+                          <a:solidFill>
+                            <a:srgbClr val="1C2A1E"/>
+                          </a:solidFill>
+                          <a:latin typeface="Calibri" pitchFamily="34" charset="0"/>
+                          <a:ea typeface="Calibri" pitchFamily="34" charset="-122"/>
+                          <a:cs typeface="Calibri" pitchFamily="34" charset="-120"/>
+                        </a:rPr>
+                        <a:t>LAN 공유는 SBMIG_WEB_TOKEN 필수, 없으면 이 PC만</a:t>
+                      </a:r>
+                      <a:endParaRPr lang="en-US" sz="950" dirty="0">
+                        <a:latin typeface="Calibri" charset="0"/>
+                        <a:ea typeface="Calibri" charset="0"/>
+                        <a:cs typeface="Calibri" charset="0"/>
+                      </a:endParaRPr>
+                    </a:p>
+                  </a:txBody>
+                  <a:tcPr marL="45720" marR="45720" marT="45720" marB="45720" anchor="t">
+                    <a:lnL w="6350" cap="flat" cmpd="sng" algn="ctr">
+                      <a:solidFill>
+                        <a:srgbClr val="D5DBD3"/>
+                      </a:solidFill>
+                      <a:prstDash val="solid"/>
+                      <a:round/>
+                      <a:headEnd type="none" w="med" len="med"/>
+                      <a:tailEnd type="none" w="med" len="med"/>
+                    </a:lnL>
+                    <a:lnR w="6350" cap="flat" cmpd="sng" algn="ctr">
+                      <a:solidFill>
+                        <a:srgbClr val="D5DBD3"/>
+                      </a:solidFill>
+                      <a:prstDash val="solid"/>
+                      <a:round/>
+                      <a:headEnd type="none" w="med" len="med"/>
+                      <a:tailEnd type="none" w="med" len="med"/>
+                    </a:lnR>
+                    <a:lnT w="6350" cap="flat" cmpd="sng" algn="ctr">
+                      <a:solidFill>
+                        <a:srgbClr val="D5DBD3"/>
+                      </a:solidFill>
+                      <a:prstDash val="solid"/>
+                      <a:round/>
+                      <a:headEnd type="none" w="med" len="med"/>
+                      <a:tailEnd type="none" w="med" len="med"/>
+                    </a:lnT>
+                    <a:lnB w="6350" cap="flat" cmpd="sng" algn="ctr">
+                      <a:solidFill>
+                        <a:srgbClr val="D5DBD3"/>
+                      </a:solidFill>
+                      <a:prstDash val="solid"/>
+                      <a:round/>
+                      <a:headEnd type="none" w="med" len="med"/>
+                      <a:tailEnd type="none" w="med" len="med"/>
+                    </a:lnB>
+                    <a:solidFill>
+                      <a:srgbClr val="FFFFFF"/>
+                    </a:solidFill>
+                  </a:tcPr>
+                </a:tc>
+              </a:tr>
+            </a:tbl>
+          </a:graphicData>
+        </a:graphic>
+      </p:graphicFrame>
+      <p:sp>
+        <p:nvSpPr>
+          <p:cNvPr id="5" name="Text 1"/>
           <p:cNvSpPr txBox="1"/>
           <p:nvPr/>
         </p:nvSpPr>
         <p:spPr>
           <a:xfrm>
-            <a:off x="548640" y="1097280"/>
-            <a:ext cx="2011680" cy="512064"/>
+            <a:off x="457200" y="4160520"/>
+            <a:ext cx="8229600" cy="548640"/>
           </a:xfrm>
           <a:prstGeom prst="rect">
             <a:avLst/>
@@ -14343,714 +15885,21 @@
           <a:ln/>
         </p:spPr>
         <p:txBody>
-          <a:bodyPr wrap="square" lIns="0" tIns="0" rIns="0" bIns="0" rtlCol="0" anchor="ctr"/>
+          <a:bodyPr wrap="square" lIns="0" tIns="0" rIns="0" bIns="0" rtlCol="0" anchor="t"/>
           <a:lstStyle/>
           <a:p>
             <a:pPr algn="l" indent="0" marL="0">
               <a:buNone/>
             </a:pPr>
             <a:r>
-              <a:rPr lang="en-US" sz="1200" b="1" dirty="0">
-                <a:solidFill>
-                  <a:schemeClr val="bg1"/>
-                </a:solidFill>
-              </a:rPr>
-              <a:t>Result</a:t>
-            </a:r>
-            <a:endParaRPr lang="en-US" sz="1200" dirty="0"/>
-          </a:p>
-        </p:txBody>
-      </p:sp>
-      <p:sp>
-        <p:nvSpPr>
-          <p:cNvPr id="6" name="Shape 3"/>
-          <p:cNvSpPr/>
-          <p:nvPr/>
-        </p:nvSpPr>
-        <p:spPr>
-          <a:xfrm>
-            <a:off x="2743200" y="1097280"/>
-            <a:ext cx="5943600" cy="512064"/>
-          </a:xfrm>
-          <a:prstGeom prst="roundRect">
-            <a:avLst>
-              <a:gd name="adj" fmla="val 14286"/>
-            </a:avLst>
-          </a:prstGeom>
-          <a:solidFill>
-            <a:srgbClr val="EEF3EA"/>
-          </a:solidFill>
-          <a:ln w="9525">
-            <a:solidFill>
-              <a:srgbClr val="EEF3EA"/>
-            </a:solidFill>
-            <a:prstDash val="solid"/>
-          </a:ln>
-        </p:spPr>
-      </p:sp>
-      <p:sp>
-        <p:nvSpPr>
-          <p:cNvPr id="7" name="Text 4"/>
-          <p:cNvSpPr txBox="1"/>
-          <p:nvPr/>
-        </p:nvSpPr>
-        <p:spPr>
-          <a:xfrm>
-            <a:off x="2880360" y="1097280"/>
-            <a:ext cx="5669280" cy="512064"/>
-          </a:xfrm>
-          <a:prstGeom prst="rect">
-            <a:avLst/>
-          </a:prstGeom>
-          <a:noFill/>
-          <a:ln/>
-        </p:spPr>
-        <p:txBody>
-          <a:bodyPr wrap="square" lIns="0" tIns="0" rIns="0" bIns="0" rtlCol="0" anchor="ctr"/>
-          <a:lstStyle/>
-          <a:p>
-            <a:pPr algn="l" indent="0" marL="0">
-              <a:buNone/>
-            </a:pPr>
-            <a:r>
-              <a:rPr lang="en-US" sz="1100" dirty="0">
+              <a:rPr lang="en-US" sz="1050" i="1" dirty="0">
                 <a:solidFill>
                   <a:schemeClr val="tx1"/>
                 </a:solidFill>
               </a:rPr>
-              <a:t>최종 clean package 결과, 케이스, as-is 버전, LLM 호출·토큰</a:t>
-            </a:r>
-            <a:endParaRPr lang="en-US" sz="1100" dirty="0"/>
-          </a:p>
-        </p:txBody>
-      </p:sp>
-      <p:sp>
-        <p:nvSpPr>
-          <p:cNvPr id="8" name="Shape 5"/>
-          <p:cNvSpPr/>
-          <p:nvPr/>
-        </p:nvSpPr>
-        <p:spPr>
-          <a:xfrm>
-            <a:off x="457200" y="1682496"/>
-            <a:ext cx="2194560" cy="512064"/>
-          </a:xfrm>
-          <a:prstGeom prst="roundRect">
-            <a:avLst>
-              <a:gd name="adj" fmla="val 14286"/>
-            </a:avLst>
-          </a:prstGeom>
-          <a:solidFill>
-            <a:srgbClr val="E07A5F"/>
-          </a:solidFill>
-          <a:ln w="9525">
-            <a:solidFill>
-              <a:srgbClr val="E07A5F"/>
-            </a:solidFill>
-            <a:prstDash val="solid"/>
-          </a:ln>
-        </p:spPr>
-      </p:sp>
-      <p:sp>
-        <p:nvSpPr>
-          <p:cNvPr id="9" name="Text 6"/>
-          <p:cNvSpPr txBox="1"/>
-          <p:nvPr/>
-        </p:nvSpPr>
-        <p:spPr>
-          <a:xfrm>
-            <a:off x="548640" y="1682496"/>
-            <a:ext cx="2011680" cy="512064"/>
-          </a:xfrm>
-          <a:prstGeom prst="rect">
-            <a:avLst/>
-          </a:prstGeom>
-          <a:noFill/>
-          <a:ln/>
-        </p:spPr>
-        <p:txBody>
-          <a:bodyPr wrap="square" lIns="0" tIns="0" rIns="0" bIns="0" rtlCol="0" anchor="ctr"/>
-          <a:lstStyle/>
-          <a:p>
-            <a:pPr algn="l" indent="0" marL="0">
-              <a:buNone/>
-            </a:pPr>
-            <a:r>
-              <a:rPr lang="en-US" sz="1200" b="1" dirty="0">
-                <a:solidFill>
-                  <a:schemeClr val="bg1"/>
-                </a:solidFill>
-              </a:rPr>
-              <a:t>Handover (인수인계)</a:t>
-            </a:r>
-            <a:endParaRPr lang="en-US" sz="1200" dirty="0"/>
-          </a:p>
-        </p:txBody>
-      </p:sp>
-      <p:sp>
-        <p:nvSpPr>
-          <p:cNvPr id="10" name="Shape 7"/>
-          <p:cNvSpPr/>
-          <p:nvPr/>
-        </p:nvSpPr>
-        <p:spPr>
-          <a:xfrm>
-            <a:off x="2743200" y="1682496"/>
-            <a:ext cx="5943600" cy="512064"/>
-          </a:xfrm>
-          <a:prstGeom prst="roundRect">
-            <a:avLst>
-              <a:gd name="adj" fmla="val 14286"/>
-            </a:avLst>
-          </a:prstGeom>
-          <a:solidFill>
-            <a:srgbClr val="EEF3EA"/>
-          </a:solidFill>
-          <a:ln w="9525">
-            <a:solidFill>
-              <a:srgbClr val="EEF3EA"/>
-            </a:solidFill>
-            <a:prstDash val="solid"/>
-          </a:ln>
-        </p:spPr>
-      </p:sp>
-      <p:sp>
-        <p:nvSpPr>
-          <p:cNvPr id="11" name="Text 8"/>
-          <p:cNvSpPr txBox="1"/>
-          <p:nvPr/>
-        </p:nvSpPr>
-        <p:spPr>
-          <a:xfrm>
-            <a:off x="2880360" y="1682496"/>
-            <a:ext cx="5669280" cy="512064"/>
-          </a:xfrm>
-          <a:prstGeom prst="rect">
-            <a:avLst/>
-          </a:prstGeom>
-          <a:noFill/>
-          <a:ln/>
-        </p:spPr>
-        <p:txBody>
-          <a:bodyPr wrap="square" lIns="0" tIns="0" rIns="0" bIns="0" rtlCol="0" anchor="ctr"/>
-          <a:lstStyle/>
-          <a:p>
-            <a:pPr algn="l" indent="0" marL="0">
-              <a:buNone/>
-            </a:pPr>
-            <a:r>
-              <a:rPr lang="en-US" sz="1100" dirty="0">
-                <a:solidFill>
-                  <a:schemeClr val="tx1"/>
-                </a:solidFill>
-              </a:rPr>
-              <a:t>미해결 에러 · blocked(외부 원인) · 어드바이저리 · 실행 전 채울 속성(__SET_ME__) · merge 충돌 · LLM이 고친 파일</a:t>
-            </a:r>
-            <a:endParaRPr lang="en-US" sz="1100" dirty="0"/>
-          </a:p>
-        </p:txBody>
-      </p:sp>
-      <p:sp>
-        <p:nvSpPr>
-          <p:cNvPr id="12" name="Shape 9"/>
-          <p:cNvSpPr/>
-          <p:nvPr/>
-        </p:nvSpPr>
-        <p:spPr>
-          <a:xfrm>
-            <a:off x="457200" y="2267712"/>
-            <a:ext cx="2194560" cy="512064"/>
-          </a:xfrm>
-          <a:prstGeom prst="roundRect">
-            <a:avLst>
-              <a:gd name="adj" fmla="val 14286"/>
-            </a:avLst>
-          </a:prstGeom>
-          <a:solidFill>
-            <a:srgbClr val="2C5F2D"/>
-          </a:solidFill>
-          <a:ln w="9525">
-            <a:solidFill>
-              <a:srgbClr val="2C5F2D"/>
-            </a:solidFill>
-            <a:prstDash val="solid"/>
-          </a:ln>
-        </p:spPr>
-      </p:sp>
-      <p:sp>
-        <p:nvSpPr>
-          <p:cNvPr id="13" name="Text 10"/>
-          <p:cNvSpPr txBox="1"/>
-          <p:nvPr/>
-        </p:nvSpPr>
-        <p:spPr>
-          <a:xfrm>
-            <a:off x="548640" y="2267712"/>
-            <a:ext cx="2011680" cy="512064"/>
-          </a:xfrm>
-          <a:prstGeom prst="rect">
-            <a:avLst/>
-          </a:prstGeom>
-          <a:noFill/>
-          <a:ln/>
-        </p:spPr>
-        <p:txBody>
-          <a:bodyPr wrap="square" lIns="0" tIns="0" rIns="0" bIns="0" rtlCol="0" anchor="ctr"/>
-          <a:lstStyle/>
-          <a:p>
-            <a:pPr algn="l" indent="0" marL="0">
-              <a:buNone/>
-            </a:pPr>
-            <a:r>
-              <a:rPr lang="en-US" sz="1200" b="1" dirty="0">
-                <a:solidFill>
-                  <a:schemeClr val="bg1"/>
-                </a:solidFill>
-              </a:rPr>
-              <a:t>Unresolved errors</a:t>
-            </a:r>
-            <a:endParaRPr lang="en-US" sz="1200" dirty="0"/>
-          </a:p>
-        </p:txBody>
-      </p:sp>
-      <p:sp>
-        <p:nvSpPr>
-          <p:cNvPr id="14" name="Shape 11"/>
-          <p:cNvSpPr/>
-          <p:nvPr/>
-        </p:nvSpPr>
-        <p:spPr>
-          <a:xfrm>
-            <a:off x="2743200" y="2267712"/>
-            <a:ext cx="5943600" cy="512064"/>
-          </a:xfrm>
-          <a:prstGeom prst="roundRect">
-            <a:avLst>
-              <a:gd name="adj" fmla="val 14286"/>
-            </a:avLst>
-          </a:prstGeom>
-          <a:solidFill>
-            <a:srgbClr val="EEF3EA"/>
-          </a:solidFill>
-          <a:ln w="9525">
-            <a:solidFill>
-              <a:srgbClr val="EEF3EA"/>
-            </a:solidFill>
-            <a:prstDash val="solid"/>
-          </a:ln>
-        </p:spPr>
-      </p:sp>
-      <p:sp>
-        <p:nvSpPr>
-          <p:cNvPr id="15" name="Text 12"/>
-          <p:cNvSpPr txBox="1"/>
-          <p:nvPr/>
-        </p:nvSpPr>
-        <p:spPr>
-          <a:xfrm>
-            <a:off x="2880360" y="2267712"/>
-            <a:ext cx="5669280" cy="512064"/>
-          </a:xfrm>
-          <a:prstGeom prst="rect">
-            <a:avLst/>
-          </a:prstGeom>
-          <a:noFill/>
-          <a:ln/>
-        </p:spPr>
-        <p:txBody>
-          <a:bodyPr wrap="square" lIns="0" tIns="0" rIns="0" bIns="0" rtlCol="0" anchor="ctr"/>
-          <a:lstStyle/>
-          <a:p>
-            <a:pPr algn="l" indent="0" marL="0">
-              <a:buNone/>
-            </a:pPr>
-            <a:r>
-              <a:rPr lang="en-US" sz="1100" dirty="0">
-                <a:solidFill>
-                  <a:schemeClr val="tx1"/>
-                </a:solidFill>
-              </a:rPr>
-              <a:t>최종 빌드에 남은 에러와 마지막 로그 경로</a:t>
-            </a:r>
-            <a:endParaRPr lang="en-US" sz="1100" dirty="0"/>
-          </a:p>
-        </p:txBody>
-      </p:sp>
-      <p:sp>
-        <p:nvSpPr>
-          <p:cNvPr id="16" name="Shape 13"/>
-          <p:cNvSpPr/>
-          <p:nvPr/>
-        </p:nvSpPr>
-        <p:spPr>
-          <a:xfrm>
-            <a:off x="457200" y="2852928"/>
-            <a:ext cx="2194560" cy="512064"/>
-          </a:xfrm>
-          <a:prstGeom prst="roundRect">
-            <a:avLst>
-              <a:gd name="adj" fmla="val 14286"/>
-            </a:avLst>
-          </a:prstGeom>
-          <a:solidFill>
-            <a:srgbClr val="2C5F2D"/>
-          </a:solidFill>
-          <a:ln w="9525">
-            <a:solidFill>
-              <a:srgbClr val="2C5F2D"/>
-            </a:solidFill>
-            <a:prstDash val="solid"/>
-          </a:ln>
-        </p:spPr>
-      </p:sp>
-      <p:sp>
-        <p:nvSpPr>
-          <p:cNvPr id="17" name="Text 14"/>
-          <p:cNvSpPr txBox="1"/>
-          <p:nvPr/>
-        </p:nvSpPr>
-        <p:spPr>
-          <a:xfrm>
-            <a:off x="548640" y="2852928"/>
-            <a:ext cx="2011680" cy="512064"/>
-          </a:xfrm>
-          <a:prstGeom prst="rect">
-            <a:avLst/>
-          </a:prstGeom>
-          <a:noFill/>
-          <a:ln/>
-        </p:spPr>
-        <p:txBody>
-          <a:bodyPr wrap="square" lIns="0" tIns="0" rIns="0" bIns="0" rtlCol="0" anchor="ctr"/>
-          <a:lstStyle/>
-          <a:p>
-            <a:pPr algn="l" indent="0" marL="0">
-              <a:buNone/>
-            </a:pPr>
-            <a:r>
-              <a:rPr lang="en-US" sz="1200" b="1" dirty="0">
-                <a:solidFill>
-                  <a:schemeClr val="bg1"/>
-                </a:solidFill>
-              </a:rPr>
-              <a:t>Manual follow-ups</a:t>
-            </a:r>
-            <a:endParaRPr lang="en-US" sz="1200" dirty="0"/>
-          </a:p>
-        </p:txBody>
-      </p:sp>
-      <p:sp>
-        <p:nvSpPr>
-          <p:cNvPr id="18" name="Shape 15"/>
-          <p:cNvSpPr/>
-          <p:nvPr/>
-        </p:nvSpPr>
-        <p:spPr>
-          <a:xfrm>
-            <a:off x="2743200" y="2852928"/>
-            <a:ext cx="5943600" cy="512064"/>
-          </a:xfrm>
-          <a:prstGeom prst="roundRect">
-            <a:avLst>
-              <a:gd name="adj" fmla="val 14286"/>
-            </a:avLst>
-          </a:prstGeom>
-          <a:solidFill>
-            <a:srgbClr val="EEF3EA"/>
-          </a:solidFill>
-          <a:ln w="9525">
-            <a:solidFill>
-              <a:srgbClr val="EEF3EA"/>
-            </a:solidFill>
-            <a:prstDash val="solid"/>
-          </a:ln>
-        </p:spPr>
-      </p:sp>
-      <p:sp>
-        <p:nvSpPr>
-          <p:cNvPr id="19" name="Text 16"/>
-          <p:cNvSpPr txBox="1"/>
-          <p:nvPr/>
-        </p:nvSpPr>
-        <p:spPr>
-          <a:xfrm>
-            <a:off x="2880360" y="2852928"/>
-            <a:ext cx="5669280" cy="512064"/>
-          </a:xfrm>
-          <a:prstGeom prst="rect">
-            <a:avLst/>
-          </a:prstGeom>
-          <a:noFill/>
-          <a:ln/>
-        </p:spPr>
-        <p:txBody>
-          <a:bodyPr wrap="square" lIns="0" tIns="0" rIns="0" bIns="0" rtlCol="0" anchor="ctr"/>
-          <a:lstStyle/>
-          <a:p>
-            <a:pPr algn="l" indent="0" marL="0">
-              <a:buNone/>
-            </a:pPr>
-            <a:r>
-              <a:rPr lang="en-US" sz="1100" dirty="0">
-                <a:solidFill>
-                  <a:schemeClr val="tx1"/>
-                </a:solidFill>
-              </a:rPr>
-              <a:t>사람이 해야 할 일 목록(설정 누락, Nexus 프록시, 런타임 확인)</a:t>
-            </a:r>
-            <a:endParaRPr lang="en-US" sz="1100" dirty="0"/>
-          </a:p>
-        </p:txBody>
-      </p:sp>
-      <p:sp>
-        <p:nvSpPr>
-          <p:cNvPr id="20" name="Shape 17"/>
-          <p:cNvSpPr/>
-          <p:nvPr/>
-        </p:nvSpPr>
-        <p:spPr>
-          <a:xfrm>
-            <a:off x="457200" y="3438144"/>
-            <a:ext cx="2194560" cy="512064"/>
-          </a:xfrm>
-          <a:prstGeom prst="roundRect">
-            <a:avLst>
-              <a:gd name="adj" fmla="val 14286"/>
-            </a:avLst>
-          </a:prstGeom>
-          <a:solidFill>
-            <a:srgbClr val="2C5F2D"/>
-          </a:solidFill>
-          <a:ln w="9525">
-            <a:solidFill>
-              <a:srgbClr val="2C5F2D"/>
-            </a:solidFill>
-            <a:prstDash val="solid"/>
-          </a:ln>
-        </p:spPr>
-      </p:sp>
-      <p:sp>
-        <p:nvSpPr>
-          <p:cNvPr id="21" name="Text 18"/>
-          <p:cNvSpPr txBox="1"/>
-          <p:nvPr/>
-        </p:nvSpPr>
-        <p:spPr>
-          <a:xfrm>
-            <a:off x="548640" y="3438144"/>
-            <a:ext cx="2011680" cy="512064"/>
-          </a:xfrm>
-          <a:prstGeom prst="rect">
-            <a:avLst/>
-          </a:prstGeom>
-          <a:noFill/>
-          <a:ln/>
-        </p:spPr>
-        <p:txBody>
-          <a:bodyPr wrap="square" lIns="0" tIns="0" rIns="0" bIns="0" rtlCol="0" anchor="ctr"/>
-          <a:lstStyle/>
-          <a:p>
-            <a:pPr algn="l" indent="0" marL="0">
-              <a:buNone/>
-            </a:pPr>
-            <a:r>
-              <a:rPr lang="en-US" sz="1200" b="1" dirty="0">
-                <a:solidFill>
-                  <a:schemeClr val="bg1"/>
-                </a:solidFill>
-              </a:rPr>
-              <a:t>What we changed</a:t>
-            </a:r>
-            <a:endParaRPr lang="en-US" sz="1200" dirty="0"/>
-          </a:p>
-        </p:txBody>
-      </p:sp>
-      <p:sp>
-        <p:nvSpPr>
-          <p:cNvPr id="22" name="Shape 19"/>
-          <p:cNvSpPr/>
-          <p:nvPr/>
-        </p:nvSpPr>
-        <p:spPr>
-          <a:xfrm>
-            <a:off x="2743200" y="3438144"/>
-            <a:ext cx="5943600" cy="512064"/>
-          </a:xfrm>
-          <a:prstGeom prst="roundRect">
-            <a:avLst>
-              <a:gd name="adj" fmla="val 14286"/>
-            </a:avLst>
-          </a:prstGeom>
-          <a:solidFill>
-            <a:srgbClr val="EEF3EA"/>
-          </a:solidFill>
-          <a:ln w="9525">
-            <a:solidFill>
-              <a:srgbClr val="EEF3EA"/>
-            </a:solidFill>
-            <a:prstDash val="solid"/>
-          </a:ln>
-        </p:spPr>
-      </p:sp>
-      <p:sp>
-        <p:nvSpPr>
-          <p:cNvPr id="23" name="Text 20"/>
-          <p:cNvSpPr txBox="1"/>
-          <p:nvPr/>
-        </p:nvSpPr>
-        <p:spPr>
-          <a:xfrm>
-            <a:off x="2880360" y="3438144"/>
-            <a:ext cx="5669280" cy="512064"/>
-          </a:xfrm>
-          <a:prstGeom prst="rect">
-            <a:avLst/>
-          </a:prstGeom>
-          <a:noFill/>
-          <a:ln/>
-        </p:spPr>
-        <p:txBody>
-          <a:bodyPr wrap="square" lIns="0" tIns="0" rIns="0" bIns="0" rtlCol="0" anchor="ctr"/>
-          <a:lstStyle/>
-          <a:p>
-            <a:pPr algn="l" indent="0" marL="0">
-              <a:buNone/>
-            </a:pPr>
-            <a:r>
-              <a:rPr lang="en-US" sz="1100" dirty="0">
-                <a:solidFill>
-                  <a:schemeClr val="tx1"/>
-                </a:solidFill>
-              </a:rPr>
-              <a:t>실행된 스텝, OpenRewrite 실행 표, 핸들러·재구성 변경</a:t>
-            </a:r>
-            <a:endParaRPr lang="en-US" sz="1100" dirty="0"/>
-          </a:p>
-        </p:txBody>
-      </p:sp>
-      <p:sp>
-        <p:nvSpPr>
-          <p:cNvPr id="24" name="Shape 21"/>
-          <p:cNvSpPr/>
-          <p:nvPr/>
-        </p:nvSpPr>
-        <p:spPr>
-          <a:xfrm>
-            <a:off x="457200" y="4023360"/>
-            <a:ext cx="2194560" cy="512064"/>
-          </a:xfrm>
-          <a:prstGeom prst="roundRect">
-            <a:avLst>
-              <a:gd name="adj" fmla="val 14286"/>
-            </a:avLst>
-          </a:prstGeom>
-          <a:solidFill>
-            <a:srgbClr val="2C5F2D"/>
-          </a:solidFill>
-          <a:ln w="9525">
-            <a:solidFill>
-              <a:srgbClr val="2C5F2D"/>
-            </a:solidFill>
-            <a:prstDash val="solid"/>
-          </a:ln>
-        </p:spPr>
-      </p:sp>
-      <p:sp>
-        <p:nvSpPr>
-          <p:cNvPr id="25" name="Text 22"/>
-          <p:cNvSpPr txBox="1"/>
-          <p:nvPr/>
-        </p:nvSpPr>
-        <p:spPr>
-          <a:xfrm>
-            <a:off x="548640" y="4023360"/>
-            <a:ext cx="2011680" cy="512064"/>
-          </a:xfrm>
-          <a:prstGeom prst="rect">
-            <a:avLst/>
-          </a:prstGeom>
-          <a:noFill/>
-          <a:ln/>
-        </p:spPr>
-        <p:txBody>
-          <a:bodyPr wrap="square" lIns="0" tIns="0" rIns="0" bIns="0" rtlCol="0" anchor="ctr"/>
-          <a:lstStyle/>
-          <a:p>
-            <a:pPr algn="l" indent="0" marL="0">
-              <a:buNone/>
-            </a:pPr>
-            <a:r>
-              <a:rPr lang="en-US" sz="1200" b="1" dirty="0">
-                <a:solidFill>
-                  <a:schemeClr val="bg1"/>
-                </a:solidFill>
-              </a:rPr>
-              <a:t>flags</a:t>
-            </a:r>
-            <a:endParaRPr lang="en-US" sz="1200" dirty="0"/>
-          </a:p>
-        </p:txBody>
-      </p:sp>
-      <p:sp>
-        <p:nvSpPr>
-          <p:cNvPr id="26" name="Shape 23"/>
-          <p:cNvSpPr/>
-          <p:nvPr/>
-        </p:nvSpPr>
-        <p:spPr>
-          <a:xfrm>
-            <a:off x="2743200" y="4023360"/>
-            <a:ext cx="5943600" cy="512064"/>
-          </a:xfrm>
-          <a:prstGeom prst="roundRect">
-            <a:avLst>
-              <a:gd name="adj" fmla="val 14286"/>
-            </a:avLst>
-          </a:prstGeom>
-          <a:solidFill>
-            <a:srgbClr val="EEF3EA"/>
-          </a:solidFill>
-          <a:ln w="9525">
-            <a:solidFill>
-              <a:srgbClr val="EEF3EA"/>
-            </a:solidFill>
-            <a:prstDash val="solid"/>
-          </a:ln>
-        </p:spPr>
-      </p:sp>
-      <p:sp>
-        <p:nvSpPr>
-          <p:cNvPr id="27" name="Text 24"/>
-          <p:cNvSpPr txBox="1"/>
-          <p:nvPr/>
-        </p:nvSpPr>
-        <p:spPr>
-          <a:xfrm>
-            <a:off x="2880360" y="4023360"/>
-            <a:ext cx="5669280" cy="512064"/>
-          </a:xfrm>
-          <a:prstGeom prst="rect">
-            <a:avLst/>
-          </a:prstGeom>
-          <a:noFill/>
-          <a:ln/>
-        </p:spPr>
-        <p:txBody>
-          <a:bodyPr wrap="square" lIns="0" tIns="0" rIns="0" bIns="0" rtlCol="0" anchor="ctr"/>
-          <a:lstStyle/>
-          <a:p>
-            <a:pPr algn="l" indent="0" marL="0">
-              <a:buNone/>
-            </a:pPr>
-            <a:r>
-              <a:rPr lang="en-US" sz="1100" dirty="0">
-                <a:solidFill>
-                  <a:schemeClr val="tx1"/>
-                </a:solidFill>
-              </a:rPr>
-              <a:t>tests-skipped, restructure-failed, source-encoding-set:cp949, enforcer-skipped … (exit code를 바꾸지 않는 주의 표시)</a:t>
-            </a:r>
-            <a:endParaRPr lang="en-US" sz="1100" dirty="0"/>
+              <a:t>KB 형식이 바뀌어(L2 시그니처 세분화, 패키지 단위 치환 쌍, schema_version 2) 회사 KB는 한 번 지우고 다시 쌓습니다. KB 쓰기는 kb/.lock으로 직렬화되고 비밀값은 저장 전에 가립니다.</a:t>
+            </a:r>
+            <a:endParaRPr lang="en-US" sz="1050" dirty="0"/>
           </a:p>
         </p:txBody>
       </p:sp>
@@ -15156,6 +16005,870 @@
                   <a:schemeClr val="tx2"/>
                 </a:solidFill>
               </a:rPr>
+              <a:t>리포트 읽는 법: Handover부터</a:t>
+            </a:r>
+            <a:endParaRPr lang="en-US" sz="2600" dirty="0"/>
+          </a:p>
+        </p:txBody>
+      </p:sp>
+      <p:sp>
+        <p:nvSpPr>
+          <p:cNvPr id="4" name="Shape 1"/>
+          <p:cNvSpPr/>
+          <p:nvPr/>
+        </p:nvSpPr>
+        <p:spPr>
+          <a:xfrm>
+            <a:off x="457200" y="1097280"/>
+            <a:ext cx="2194560" cy="512064"/>
+          </a:xfrm>
+          <a:prstGeom prst="roundRect">
+            <a:avLst>
+              <a:gd name="adj" fmla="val 14286"/>
+            </a:avLst>
+          </a:prstGeom>
+          <a:solidFill>
+            <a:srgbClr val="2C5F2D"/>
+          </a:solidFill>
+          <a:ln w="9525">
+            <a:solidFill>
+              <a:srgbClr val="2C5F2D"/>
+            </a:solidFill>
+            <a:prstDash val="solid"/>
+          </a:ln>
+        </p:spPr>
+      </p:sp>
+      <p:sp>
+        <p:nvSpPr>
+          <p:cNvPr id="5" name="Text 2"/>
+          <p:cNvSpPr txBox="1"/>
+          <p:nvPr/>
+        </p:nvSpPr>
+        <p:spPr>
+          <a:xfrm>
+            <a:off x="548640" y="1097280"/>
+            <a:ext cx="2011680" cy="512064"/>
+          </a:xfrm>
+          <a:prstGeom prst="rect">
+            <a:avLst/>
+          </a:prstGeom>
+          <a:noFill/>
+          <a:ln/>
+        </p:spPr>
+        <p:txBody>
+          <a:bodyPr wrap="square" lIns="0" tIns="0" rIns="0" bIns="0" rtlCol="0" anchor="ctr"/>
+          <a:lstStyle/>
+          <a:p>
+            <a:pPr algn="l" indent="0" marL="0">
+              <a:buNone/>
+            </a:pPr>
+            <a:r>
+              <a:rPr lang="en-US" sz="1200" b="1" dirty="0">
+                <a:solidFill>
+                  <a:schemeClr val="bg1"/>
+                </a:solidFill>
+              </a:rPr>
+              <a:t>Result</a:t>
+            </a:r>
+            <a:endParaRPr lang="en-US" sz="1200" dirty="0"/>
+          </a:p>
+        </p:txBody>
+      </p:sp>
+      <p:sp>
+        <p:nvSpPr>
+          <p:cNvPr id="6" name="Shape 3"/>
+          <p:cNvSpPr/>
+          <p:nvPr/>
+        </p:nvSpPr>
+        <p:spPr>
+          <a:xfrm>
+            <a:off x="2743200" y="1097280"/>
+            <a:ext cx="5943600" cy="512064"/>
+          </a:xfrm>
+          <a:prstGeom prst="roundRect">
+            <a:avLst>
+              <a:gd name="adj" fmla="val 14286"/>
+            </a:avLst>
+          </a:prstGeom>
+          <a:solidFill>
+            <a:srgbClr val="EEF3EA"/>
+          </a:solidFill>
+          <a:ln w="9525">
+            <a:solidFill>
+              <a:srgbClr val="EEF3EA"/>
+            </a:solidFill>
+            <a:prstDash val="solid"/>
+          </a:ln>
+        </p:spPr>
+      </p:sp>
+      <p:sp>
+        <p:nvSpPr>
+          <p:cNvPr id="7" name="Text 4"/>
+          <p:cNvSpPr txBox="1"/>
+          <p:nvPr/>
+        </p:nvSpPr>
+        <p:spPr>
+          <a:xfrm>
+            <a:off x="2880360" y="1097280"/>
+            <a:ext cx="5669280" cy="512064"/>
+          </a:xfrm>
+          <a:prstGeom prst="rect">
+            <a:avLst/>
+          </a:prstGeom>
+          <a:noFill/>
+          <a:ln/>
+        </p:spPr>
+        <p:txBody>
+          <a:bodyPr wrap="square" lIns="0" tIns="0" rIns="0" bIns="0" rtlCol="0" anchor="ctr"/>
+          <a:lstStyle/>
+          <a:p>
+            <a:pPr algn="l" indent="0" marL="0">
+              <a:buNone/>
+            </a:pPr>
+            <a:r>
+              <a:rPr lang="en-US" sz="1100" dirty="0">
+                <a:solidFill>
+                  <a:schemeClr val="tx1"/>
+                </a:solidFill>
+              </a:rPr>
+              <a:t>최종 clean package 결과, 케이스, as-is 버전, LLM 호출·토큰</a:t>
+            </a:r>
+            <a:endParaRPr lang="en-US" sz="1100" dirty="0"/>
+          </a:p>
+        </p:txBody>
+      </p:sp>
+      <p:sp>
+        <p:nvSpPr>
+          <p:cNvPr id="8" name="Shape 5"/>
+          <p:cNvSpPr/>
+          <p:nvPr/>
+        </p:nvSpPr>
+        <p:spPr>
+          <a:xfrm>
+            <a:off x="457200" y="1682496"/>
+            <a:ext cx="2194560" cy="512064"/>
+          </a:xfrm>
+          <a:prstGeom prst="roundRect">
+            <a:avLst>
+              <a:gd name="adj" fmla="val 14286"/>
+            </a:avLst>
+          </a:prstGeom>
+          <a:solidFill>
+            <a:srgbClr val="E07A5F"/>
+          </a:solidFill>
+          <a:ln w="9525">
+            <a:solidFill>
+              <a:srgbClr val="E07A5F"/>
+            </a:solidFill>
+            <a:prstDash val="solid"/>
+          </a:ln>
+        </p:spPr>
+      </p:sp>
+      <p:sp>
+        <p:nvSpPr>
+          <p:cNvPr id="9" name="Text 6"/>
+          <p:cNvSpPr txBox="1"/>
+          <p:nvPr/>
+        </p:nvSpPr>
+        <p:spPr>
+          <a:xfrm>
+            <a:off x="548640" y="1682496"/>
+            <a:ext cx="2011680" cy="512064"/>
+          </a:xfrm>
+          <a:prstGeom prst="rect">
+            <a:avLst/>
+          </a:prstGeom>
+          <a:noFill/>
+          <a:ln/>
+        </p:spPr>
+        <p:txBody>
+          <a:bodyPr wrap="square" lIns="0" tIns="0" rIns="0" bIns="0" rtlCol="0" anchor="ctr"/>
+          <a:lstStyle/>
+          <a:p>
+            <a:pPr algn="l" indent="0" marL="0">
+              <a:buNone/>
+            </a:pPr>
+            <a:r>
+              <a:rPr lang="en-US" sz="1200" b="1" dirty="0">
+                <a:solidFill>
+                  <a:schemeClr val="bg1"/>
+                </a:solidFill>
+              </a:rPr>
+              <a:t>Handover (인수인계)</a:t>
+            </a:r>
+            <a:endParaRPr lang="en-US" sz="1200" dirty="0"/>
+          </a:p>
+        </p:txBody>
+      </p:sp>
+      <p:sp>
+        <p:nvSpPr>
+          <p:cNvPr id="10" name="Shape 7"/>
+          <p:cNvSpPr/>
+          <p:nvPr/>
+        </p:nvSpPr>
+        <p:spPr>
+          <a:xfrm>
+            <a:off x="2743200" y="1682496"/>
+            <a:ext cx="5943600" cy="512064"/>
+          </a:xfrm>
+          <a:prstGeom prst="roundRect">
+            <a:avLst>
+              <a:gd name="adj" fmla="val 14286"/>
+            </a:avLst>
+          </a:prstGeom>
+          <a:solidFill>
+            <a:srgbClr val="EEF3EA"/>
+          </a:solidFill>
+          <a:ln w="9525">
+            <a:solidFill>
+              <a:srgbClr val="EEF3EA"/>
+            </a:solidFill>
+            <a:prstDash val="solid"/>
+          </a:ln>
+        </p:spPr>
+      </p:sp>
+      <p:sp>
+        <p:nvSpPr>
+          <p:cNvPr id="11" name="Text 8"/>
+          <p:cNvSpPr txBox="1"/>
+          <p:nvPr/>
+        </p:nvSpPr>
+        <p:spPr>
+          <a:xfrm>
+            <a:off x="2880360" y="1682496"/>
+            <a:ext cx="5669280" cy="512064"/>
+          </a:xfrm>
+          <a:prstGeom prst="rect">
+            <a:avLst/>
+          </a:prstGeom>
+          <a:noFill/>
+          <a:ln/>
+        </p:spPr>
+        <p:txBody>
+          <a:bodyPr wrap="square" lIns="0" tIns="0" rIns="0" bIns="0" rtlCol="0" anchor="ctr"/>
+          <a:lstStyle/>
+          <a:p>
+            <a:pPr algn="l" indent="0" marL="0">
+              <a:buNone/>
+            </a:pPr>
+            <a:r>
+              <a:rPr lang="en-US" sz="1100" dirty="0">
+                <a:solidFill>
+                  <a:schemeClr val="tx1"/>
+                </a:solidFill>
+              </a:rPr>
+              <a:t>미해결 에러 · blocked(외부 원인) · 어드바이저리 · 실행 전 채울 속성(__SET_ME__) · merge 충돌 · LLM이 고친 파일</a:t>
+            </a:r>
+            <a:endParaRPr lang="en-US" sz="1100" dirty="0"/>
+          </a:p>
+        </p:txBody>
+      </p:sp>
+      <p:sp>
+        <p:nvSpPr>
+          <p:cNvPr id="12" name="Shape 9"/>
+          <p:cNvSpPr/>
+          <p:nvPr/>
+        </p:nvSpPr>
+        <p:spPr>
+          <a:xfrm>
+            <a:off x="457200" y="2267712"/>
+            <a:ext cx="2194560" cy="512064"/>
+          </a:xfrm>
+          <a:prstGeom prst="roundRect">
+            <a:avLst>
+              <a:gd name="adj" fmla="val 14286"/>
+            </a:avLst>
+          </a:prstGeom>
+          <a:solidFill>
+            <a:srgbClr val="2C5F2D"/>
+          </a:solidFill>
+          <a:ln w="9525">
+            <a:solidFill>
+              <a:srgbClr val="2C5F2D"/>
+            </a:solidFill>
+            <a:prstDash val="solid"/>
+          </a:ln>
+        </p:spPr>
+      </p:sp>
+      <p:sp>
+        <p:nvSpPr>
+          <p:cNvPr id="13" name="Text 10"/>
+          <p:cNvSpPr txBox="1"/>
+          <p:nvPr/>
+        </p:nvSpPr>
+        <p:spPr>
+          <a:xfrm>
+            <a:off x="548640" y="2267712"/>
+            <a:ext cx="2011680" cy="512064"/>
+          </a:xfrm>
+          <a:prstGeom prst="rect">
+            <a:avLst/>
+          </a:prstGeom>
+          <a:noFill/>
+          <a:ln/>
+        </p:spPr>
+        <p:txBody>
+          <a:bodyPr wrap="square" lIns="0" tIns="0" rIns="0" bIns="0" rtlCol="0" anchor="ctr"/>
+          <a:lstStyle/>
+          <a:p>
+            <a:pPr algn="l" indent="0" marL="0">
+              <a:buNone/>
+            </a:pPr>
+            <a:r>
+              <a:rPr lang="en-US" sz="1200" b="1" dirty="0">
+                <a:solidFill>
+                  <a:schemeClr val="bg1"/>
+                </a:solidFill>
+              </a:rPr>
+              <a:t>Unresolved errors</a:t>
+            </a:r>
+            <a:endParaRPr lang="en-US" sz="1200" dirty="0"/>
+          </a:p>
+        </p:txBody>
+      </p:sp>
+      <p:sp>
+        <p:nvSpPr>
+          <p:cNvPr id="14" name="Shape 11"/>
+          <p:cNvSpPr/>
+          <p:nvPr/>
+        </p:nvSpPr>
+        <p:spPr>
+          <a:xfrm>
+            <a:off x="2743200" y="2267712"/>
+            <a:ext cx="5943600" cy="512064"/>
+          </a:xfrm>
+          <a:prstGeom prst="roundRect">
+            <a:avLst>
+              <a:gd name="adj" fmla="val 14286"/>
+            </a:avLst>
+          </a:prstGeom>
+          <a:solidFill>
+            <a:srgbClr val="EEF3EA"/>
+          </a:solidFill>
+          <a:ln w="9525">
+            <a:solidFill>
+              <a:srgbClr val="EEF3EA"/>
+            </a:solidFill>
+            <a:prstDash val="solid"/>
+          </a:ln>
+        </p:spPr>
+      </p:sp>
+      <p:sp>
+        <p:nvSpPr>
+          <p:cNvPr id="15" name="Text 12"/>
+          <p:cNvSpPr txBox="1"/>
+          <p:nvPr/>
+        </p:nvSpPr>
+        <p:spPr>
+          <a:xfrm>
+            <a:off x="2880360" y="2267712"/>
+            <a:ext cx="5669280" cy="512064"/>
+          </a:xfrm>
+          <a:prstGeom prst="rect">
+            <a:avLst/>
+          </a:prstGeom>
+          <a:noFill/>
+          <a:ln/>
+        </p:spPr>
+        <p:txBody>
+          <a:bodyPr wrap="square" lIns="0" tIns="0" rIns="0" bIns="0" rtlCol="0" anchor="ctr"/>
+          <a:lstStyle/>
+          <a:p>
+            <a:pPr algn="l" indent="0" marL="0">
+              <a:buNone/>
+            </a:pPr>
+            <a:r>
+              <a:rPr lang="en-US" sz="1100" dirty="0">
+                <a:solidFill>
+                  <a:schemeClr val="tx1"/>
+                </a:solidFill>
+              </a:rPr>
+              <a:t>최종 빌드에 남은 에러와 마지막 로그 경로</a:t>
+            </a:r>
+            <a:endParaRPr lang="en-US" sz="1100" dirty="0"/>
+          </a:p>
+        </p:txBody>
+      </p:sp>
+      <p:sp>
+        <p:nvSpPr>
+          <p:cNvPr id="16" name="Shape 13"/>
+          <p:cNvSpPr/>
+          <p:nvPr/>
+        </p:nvSpPr>
+        <p:spPr>
+          <a:xfrm>
+            <a:off x="457200" y="2852928"/>
+            <a:ext cx="2194560" cy="512064"/>
+          </a:xfrm>
+          <a:prstGeom prst="roundRect">
+            <a:avLst>
+              <a:gd name="adj" fmla="val 14286"/>
+            </a:avLst>
+          </a:prstGeom>
+          <a:solidFill>
+            <a:srgbClr val="2C5F2D"/>
+          </a:solidFill>
+          <a:ln w="9525">
+            <a:solidFill>
+              <a:srgbClr val="2C5F2D"/>
+            </a:solidFill>
+            <a:prstDash val="solid"/>
+          </a:ln>
+        </p:spPr>
+      </p:sp>
+      <p:sp>
+        <p:nvSpPr>
+          <p:cNvPr id="17" name="Text 14"/>
+          <p:cNvSpPr txBox="1"/>
+          <p:nvPr/>
+        </p:nvSpPr>
+        <p:spPr>
+          <a:xfrm>
+            <a:off x="548640" y="2852928"/>
+            <a:ext cx="2011680" cy="512064"/>
+          </a:xfrm>
+          <a:prstGeom prst="rect">
+            <a:avLst/>
+          </a:prstGeom>
+          <a:noFill/>
+          <a:ln/>
+        </p:spPr>
+        <p:txBody>
+          <a:bodyPr wrap="square" lIns="0" tIns="0" rIns="0" bIns="0" rtlCol="0" anchor="ctr"/>
+          <a:lstStyle/>
+          <a:p>
+            <a:pPr algn="l" indent="0" marL="0">
+              <a:buNone/>
+            </a:pPr>
+            <a:r>
+              <a:rPr lang="en-US" sz="1200" b="1" dirty="0">
+                <a:solidFill>
+                  <a:schemeClr val="bg1"/>
+                </a:solidFill>
+              </a:rPr>
+              <a:t>Manual follow-ups</a:t>
+            </a:r>
+            <a:endParaRPr lang="en-US" sz="1200" dirty="0"/>
+          </a:p>
+        </p:txBody>
+      </p:sp>
+      <p:sp>
+        <p:nvSpPr>
+          <p:cNvPr id="18" name="Shape 15"/>
+          <p:cNvSpPr/>
+          <p:nvPr/>
+        </p:nvSpPr>
+        <p:spPr>
+          <a:xfrm>
+            <a:off x="2743200" y="2852928"/>
+            <a:ext cx="5943600" cy="512064"/>
+          </a:xfrm>
+          <a:prstGeom prst="roundRect">
+            <a:avLst>
+              <a:gd name="adj" fmla="val 14286"/>
+            </a:avLst>
+          </a:prstGeom>
+          <a:solidFill>
+            <a:srgbClr val="EEF3EA"/>
+          </a:solidFill>
+          <a:ln w="9525">
+            <a:solidFill>
+              <a:srgbClr val="EEF3EA"/>
+            </a:solidFill>
+            <a:prstDash val="solid"/>
+          </a:ln>
+        </p:spPr>
+      </p:sp>
+      <p:sp>
+        <p:nvSpPr>
+          <p:cNvPr id="19" name="Text 16"/>
+          <p:cNvSpPr txBox="1"/>
+          <p:nvPr/>
+        </p:nvSpPr>
+        <p:spPr>
+          <a:xfrm>
+            <a:off x="2880360" y="2852928"/>
+            <a:ext cx="5669280" cy="512064"/>
+          </a:xfrm>
+          <a:prstGeom prst="rect">
+            <a:avLst/>
+          </a:prstGeom>
+          <a:noFill/>
+          <a:ln/>
+        </p:spPr>
+        <p:txBody>
+          <a:bodyPr wrap="square" lIns="0" tIns="0" rIns="0" bIns="0" rtlCol="0" anchor="ctr"/>
+          <a:lstStyle/>
+          <a:p>
+            <a:pPr algn="l" indent="0" marL="0">
+              <a:buNone/>
+            </a:pPr>
+            <a:r>
+              <a:rPr lang="en-US" sz="1100" dirty="0">
+                <a:solidFill>
+                  <a:schemeClr val="tx1"/>
+                </a:solidFill>
+              </a:rPr>
+              <a:t>사람이 해야 할 일 목록(설정 누락, Nexus 프록시, 런타임 확인)</a:t>
+            </a:r>
+            <a:endParaRPr lang="en-US" sz="1100" dirty="0"/>
+          </a:p>
+        </p:txBody>
+      </p:sp>
+      <p:sp>
+        <p:nvSpPr>
+          <p:cNvPr id="20" name="Shape 17"/>
+          <p:cNvSpPr/>
+          <p:nvPr/>
+        </p:nvSpPr>
+        <p:spPr>
+          <a:xfrm>
+            <a:off x="457200" y="3438144"/>
+            <a:ext cx="2194560" cy="512064"/>
+          </a:xfrm>
+          <a:prstGeom prst="roundRect">
+            <a:avLst>
+              <a:gd name="adj" fmla="val 14286"/>
+            </a:avLst>
+          </a:prstGeom>
+          <a:solidFill>
+            <a:srgbClr val="2C5F2D"/>
+          </a:solidFill>
+          <a:ln w="9525">
+            <a:solidFill>
+              <a:srgbClr val="2C5F2D"/>
+            </a:solidFill>
+            <a:prstDash val="solid"/>
+          </a:ln>
+        </p:spPr>
+      </p:sp>
+      <p:sp>
+        <p:nvSpPr>
+          <p:cNvPr id="21" name="Text 18"/>
+          <p:cNvSpPr txBox="1"/>
+          <p:nvPr/>
+        </p:nvSpPr>
+        <p:spPr>
+          <a:xfrm>
+            <a:off x="548640" y="3438144"/>
+            <a:ext cx="2011680" cy="512064"/>
+          </a:xfrm>
+          <a:prstGeom prst="rect">
+            <a:avLst/>
+          </a:prstGeom>
+          <a:noFill/>
+          <a:ln/>
+        </p:spPr>
+        <p:txBody>
+          <a:bodyPr wrap="square" lIns="0" tIns="0" rIns="0" bIns="0" rtlCol="0" anchor="ctr"/>
+          <a:lstStyle/>
+          <a:p>
+            <a:pPr algn="l" indent="0" marL="0">
+              <a:buNone/>
+            </a:pPr>
+            <a:r>
+              <a:rPr lang="en-US" sz="1200" b="1" dirty="0">
+                <a:solidFill>
+                  <a:schemeClr val="bg1"/>
+                </a:solidFill>
+              </a:rPr>
+              <a:t>What we changed</a:t>
+            </a:r>
+            <a:endParaRPr lang="en-US" sz="1200" dirty="0"/>
+          </a:p>
+        </p:txBody>
+      </p:sp>
+      <p:sp>
+        <p:nvSpPr>
+          <p:cNvPr id="22" name="Shape 19"/>
+          <p:cNvSpPr/>
+          <p:nvPr/>
+        </p:nvSpPr>
+        <p:spPr>
+          <a:xfrm>
+            <a:off x="2743200" y="3438144"/>
+            <a:ext cx="5943600" cy="512064"/>
+          </a:xfrm>
+          <a:prstGeom prst="roundRect">
+            <a:avLst>
+              <a:gd name="adj" fmla="val 14286"/>
+            </a:avLst>
+          </a:prstGeom>
+          <a:solidFill>
+            <a:srgbClr val="EEF3EA"/>
+          </a:solidFill>
+          <a:ln w="9525">
+            <a:solidFill>
+              <a:srgbClr val="EEF3EA"/>
+            </a:solidFill>
+            <a:prstDash val="solid"/>
+          </a:ln>
+        </p:spPr>
+      </p:sp>
+      <p:sp>
+        <p:nvSpPr>
+          <p:cNvPr id="23" name="Text 20"/>
+          <p:cNvSpPr txBox="1"/>
+          <p:nvPr/>
+        </p:nvSpPr>
+        <p:spPr>
+          <a:xfrm>
+            <a:off x="2880360" y="3438144"/>
+            <a:ext cx="5669280" cy="512064"/>
+          </a:xfrm>
+          <a:prstGeom prst="rect">
+            <a:avLst/>
+          </a:prstGeom>
+          <a:noFill/>
+          <a:ln/>
+        </p:spPr>
+        <p:txBody>
+          <a:bodyPr wrap="square" lIns="0" tIns="0" rIns="0" bIns="0" rtlCol="0" anchor="ctr"/>
+          <a:lstStyle/>
+          <a:p>
+            <a:pPr algn="l" indent="0" marL="0">
+              <a:buNone/>
+            </a:pPr>
+            <a:r>
+              <a:rPr lang="en-US" sz="1100" dirty="0">
+                <a:solidFill>
+                  <a:schemeClr val="tx1"/>
+                </a:solidFill>
+              </a:rPr>
+              <a:t>실행된 스텝, OpenRewrite 실행 표, 핸들러·재구성 변경</a:t>
+            </a:r>
+            <a:endParaRPr lang="en-US" sz="1100" dirty="0"/>
+          </a:p>
+        </p:txBody>
+      </p:sp>
+      <p:sp>
+        <p:nvSpPr>
+          <p:cNvPr id="24" name="Shape 21"/>
+          <p:cNvSpPr/>
+          <p:nvPr/>
+        </p:nvSpPr>
+        <p:spPr>
+          <a:xfrm>
+            <a:off x="457200" y="4023360"/>
+            <a:ext cx="2194560" cy="512064"/>
+          </a:xfrm>
+          <a:prstGeom prst="roundRect">
+            <a:avLst>
+              <a:gd name="adj" fmla="val 14286"/>
+            </a:avLst>
+          </a:prstGeom>
+          <a:solidFill>
+            <a:srgbClr val="2C5F2D"/>
+          </a:solidFill>
+          <a:ln w="9525">
+            <a:solidFill>
+              <a:srgbClr val="2C5F2D"/>
+            </a:solidFill>
+            <a:prstDash val="solid"/>
+          </a:ln>
+        </p:spPr>
+      </p:sp>
+      <p:sp>
+        <p:nvSpPr>
+          <p:cNvPr id="25" name="Text 22"/>
+          <p:cNvSpPr txBox="1"/>
+          <p:nvPr/>
+        </p:nvSpPr>
+        <p:spPr>
+          <a:xfrm>
+            <a:off x="548640" y="4023360"/>
+            <a:ext cx="2011680" cy="512064"/>
+          </a:xfrm>
+          <a:prstGeom prst="rect">
+            <a:avLst/>
+          </a:prstGeom>
+          <a:noFill/>
+          <a:ln/>
+        </p:spPr>
+        <p:txBody>
+          <a:bodyPr wrap="square" lIns="0" tIns="0" rIns="0" bIns="0" rtlCol="0" anchor="ctr"/>
+          <a:lstStyle/>
+          <a:p>
+            <a:pPr algn="l" indent="0" marL="0">
+              <a:buNone/>
+            </a:pPr>
+            <a:r>
+              <a:rPr lang="en-US" sz="1200" b="1" dirty="0">
+                <a:solidFill>
+                  <a:schemeClr val="bg1"/>
+                </a:solidFill>
+              </a:rPr>
+              <a:t>flags</a:t>
+            </a:r>
+            <a:endParaRPr lang="en-US" sz="1200" dirty="0"/>
+          </a:p>
+        </p:txBody>
+      </p:sp>
+      <p:sp>
+        <p:nvSpPr>
+          <p:cNvPr id="26" name="Shape 23"/>
+          <p:cNvSpPr/>
+          <p:nvPr/>
+        </p:nvSpPr>
+        <p:spPr>
+          <a:xfrm>
+            <a:off x="2743200" y="4023360"/>
+            <a:ext cx="5943600" cy="512064"/>
+          </a:xfrm>
+          <a:prstGeom prst="roundRect">
+            <a:avLst>
+              <a:gd name="adj" fmla="val 14286"/>
+            </a:avLst>
+          </a:prstGeom>
+          <a:solidFill>
+            <a:srgbClr val="EEF3EA"/>
+          </a:solidFill>
+          <a:ln w="9525">
+            <a:solidFill>
+              <a:srgbClr val="EEF3EA"/>
+            </a:solidFill>
+            <a:prstDash val="solid"/>
+          </a:ln>
+        </p:spPr>
+      </p:sp>
+      <p:sp>
+        <p:nvSpPr>
+          <p:cNvPr id="27" name="Text 24"/>
+          <p:cNvSpPr txBox="1"/>
+          <p:nvPr/>
+        </p:nvSpPr>
+        <p:spPr>
+          <a:xfrm>
+            <a:off x="2880360" y="4023360"/>
+            <a:ext cx="5669280" cy="512064"/>
+          </a:xfrm>
+          <a:prstGeom prst="rect">
+            <a:avLst/>
+          </a:prstGeom>
+          <a:noFill/>
+          <a:ln/>
+        </p:spPr>
+        <p:txBody>
+          <a:bodyPr wrap="square" lIns="0" tIns="0" rIns="0" bIns="0" rtlCol="0" anchor="ctr"/>
+          <a:lstStyle/>
+          <a:p>
+            <a:pPr algn="l" indent="0" marL="0">
+              <a:buNone/>
+            </a:pPr>
+            <a:r>
+              <a:rPr lang="en-US" sz="1100" dirty="0">
+                <a:solidFill>
+                  <a:schemeClr val="tx1"/>
+                </a:solidFill>
+              </a:rPr>
+              <a:t>tests-skipped, restructure-failed, source-encoding-set:cp949, enforcer-skipped … (exit code를 바꾸지 않는 주의 표시)</a:t>
+            </a:r>
+            <a:endParaRPr lang="en-US" sz="1100" dirty="0"/>
+          </a:p>
+        </p:txBody>
+      </p:sp>
+      <p:sp>
+        <p:nvSpPr>
+          <p:cNvPr id="25" name="Slide Number Placeholder 0"/>
+          <p:cNvSpPr>
+            <a:spLocks noGrp="1"/>
+          </p:cNvSpPr>
+          <p:nvPr>
+            <p:ph type="sldNum" sz="quarter" idx="4294967295"/>
+          </p:nvPr>
+        </p:nvSpPr>
+        <p:spPr>
+          <a:xfrm>
+            <a:off x="8229600" y="4800600"/>
+            <a:ext cx="457200" cy="228600"/>
+          </a:xfrm>
+          <a:prstGeom prst="rect">
+            <a:avLst/>
+          </a:prstGeom>
+          <a:extLst>
+            <a:ext uri="{C572A759-6A51-4108-AA02-DFA0A04FC94B}">
+              <ma14:wrappingTextBoxFlag xmlns:ma14="http://schemas.microsoft.com/office/mac/drawingml/2011/main" val="0"/>
+            </a:ext>
+          </a:extLst>
+        </p:spPr>
+        <p:txBody>
+          <a:bodyPr/>
+          <a:lstStyle>
+            <a:lvl1pPr>
+              <a:defRPr sz="900">
+                <a:solidFill>
+                  <a:srgbClr val="8A8F8A"/>
+                </a:solidFill>
+              </a:defRPr>
+            </a:lvl1pPr>
+          </a:lstStyle>
+          <a:p>
+            <a:pPr algn="r"/>
+            <a:fld id="{F7021451-1387-4CA6-816F-3879F97B5CBC}" type="slidenum">
+              <a:rPr b="0" lang="en-US"/>
+              <a:t>23</a:t>
+            </a:fld>
+            <a:endParaRPr lang="en-US"/>
+          </a:p>
+        </p:txBody>
+      </p:sp>
+    </p:spTree>
+  </p:cSld>
+  <p:clrMapOvr>
+    <a:masterClrMapping/>
+  </p:clrMapOvr>
+</p:sld>
+</file>
+
+<file path=ppt/slides/slide24.xml><?xml version="1.0" encoding="utf-8"?>
+<p:sld xmlns:a="http://schemas.openxmlformats.org/drawingml/2006/main" xmlns:r="http://schemas.openxmlformats.org/officeDocument/2006/relationships" xmlns:p="http://schemas.openxmlformats.org/presentationml/2006/main">
+  <p:cSld name="Slide 24">
+    <p:spTree>
+      <p:nvGrpSpPr>
+        <p:cNvPr id="1" name=""/>
+        <p:cNvGrpSpPr/>
+        <p:nvPr/>
+      </p:nvGrpSpPr>
+      <p:grpSpPr>
+        <a:xfrm>
+          <a:off x="0" y="0"/>
+          <a:ext cx="0" cy="0"/>
+          <a:chOff x="0" y="0"/>
+          <a:chExt cx="0" cy="0"/>
+        </a:xfrm>
+      </p:grpSpPr>
+      <p:sp>
+        <p:nvSpPr>
+          <p:cNvPr id="2" name="Text 0"/>
+          <p:cNvSpPr/>
+          <p:nvPr>
+            <p:ph idx="100" type="title" hasCustomPrompt="1"/>
+          </p:nvPr>
+        </p:nvSpPr>
+        <p:spPr>
+          <a:xfrm>
+            <a:off x="457200" y="274320"/>
+            <a:ext cx="8229600" cy="640080"/>
+          </a:xfrm>
+          <a:prstGeom prst="rect">
+            <a:avLst/>
+          </a:prstGeom>
+          <a:noFill/>
+          <a:ln/>
+        </p:spPr>
+        <p:txBody>
+          <a:bodyPr wrap="square" lIns="0" tIns="0" rIns="0" bIns="0" rtlCol="0" anchor="ctr"/>
+          <a:lstStyle/>
+          <a:p>
+            <a:pPr algn="l" indent="0" marL="0">
+              <a:buNone/>
+            </a:pPr>
+            <a:r>
+              <a:rPr lang="en-US" sz="2600" b="1" dirty="0">
+                <a:solidFill>
+                  <a:schemeClr val="tx2"/>
+                </a:solidFill>
+              </a:rPr>
               <a:t>첫 회사 실행(2026-10-21, Windows)에서 배운 것</a:t>
             </a:r>
             <a:endParaRPr lang="en-US" sz="2600" dirty="0"/>
@@ -15164,7 +16877,7 @@
       </p:sp>
       <p:graphicFrame>
         <p:nvGraphicFramePr>
-          <p:cNvPr id="24" name="Table 0"/>
+          <p:cNvPr id="25" name="Table 0"/>
           <p:cNvGraphicFramePr>
             <a:graphicFrameLocks noGrp="1"/>
           </p:cNvGraphicFramePr>
@@ -17086,582 +18799,6 @@
             <a:pPr algn="r"/>
             <a:fld id="{F7021451-1387-4CA6-816F-3879F97B5CBC}" type="slidenum">
               <a:rPr b="0" lang="en-US"/>
-              <a:t>23</a:t>
-            </a:fld>
-            <a:endParaRPr lang="en-US"/>
-          </a:p>
-        </p:txBody>
-      </p:sp>
-    </p:spTree>
-  </p:cSld>
-  <p:clrMapOvr>
-    <a:masterClrMapping/>
-  </p:clrMapOvr>
-</p:sld>
-</file>
-
-<file path=ppt/slides/slide24.xml><?xml version="1.0" encoding="utf-8"?>
-<p:sld xmlns:a="http://schemas.openxmlformats.org/drawingml/2006/main" xmlns:r="http://schemas.openxmlformats.org/officeDocument/2006/relationships" xmlns:p="http://schemas.openxmlformats.org/presentationml/2006/main">
-  <p:cSld name="Slide 24">
-    <p:spTree>
-      <p:nvGrpSpPr>
-        <p:cNvPr id="1" name=""/>
-        <p:cNvGrpSpPr/>
-        <p:nvPr/>
-      </p:nvGrpSpPr>
-      <p:grpSpPr>
-        <a:xfrm>
-          <a:off x="0" y="0"/>
-          <a:ext cx="0" cy="0"/>
-          <a:chOff x="0" y="0"/>
-          <a:chExt cx="0" cy="0"/>
-        </a:xfrm>
-      </p:grpSpPr>
-      <p:sp>
-        <p:nvSpPr>
-          <p:cNvPr id="2" name="Text 0"/>
-          <p:cNvSpPr/>
-          <p:nvPr>
-            <p:ph idx="100" type="title" hasCustomPrompt="1"/>
-          </p:nvPr>
-        </p:nvSpPr>
-        <p:spPr>
-          <a:xfrm>
-            <a:off x="457200" y="274320"/>
-            <a:ext cx="8229600" cy="640080"/>
-          </a:xfrm>
-          <a:prstGeom prst="rect">
-            <a:avLst/>
-          </a:prstGeom>
-          <a:noFill/>
-          <a:ln/>
-        </p:spPr>
-        <p:txBody>
-          <a:bodyPr wrap="square" lIns="0" tIns="0" rIns="0" bIns="0" rtlCol="0" anchor="ctr"/>
-          <a:lstStyle/>
-          <a:p>
-            <a:pPr algn="l" indent="0" marL="0">
-              <a:buNone/>
-            </a:pPr>
-            <a:r>
-              <a:rPr lang="en-US" sz="2600" b="1" dirty="0">
-                <a:solidFill>
-                  <a:schemeClr val="tx2"/>
-                </a:solidFill>
-              </a:rPr>
-              <a:t>검증 현황</a:t>
-            </a:r>
-            <a:endParaRPr lang="en-US" sz="2600" dirty="0"/>
-          </a:p>
-        </p:txBody>
-      </p:sp>
-      <p:sp>
-        <p:nvSpPr>
-          <p:cNvPr id="4" name="Text 1"/>
-          <p:cNvSpPr txBox="1"/>
-          <p:nvPr/>
-        </p:nvSpPr>
-        <p:spPr>
-          <a:xfrm>
-            <a:off x="457200" y="1051560"/>
-            <a:ext cx="2011680" cy="685800"/>
-          </a:xfrm>
-          <a:prstGeom prst="rect">
-            <a:avLst/>
-          </a:prstGeom>
-          <a:noFill/>
-          <a:ln/>
-        </p:spPr>
-        <p:txBody>
-          <a:bodyPr wrap="square" lIns="0" tIns="0" rIns="0" bIns="0" rtlCol="0" anchor="b"/>
-          <a:lstStyle/>
-          <a:p>
-            <a:pPr algn="ctr" indent="0" marL="0">
-              <a:buNone/>
-            </a:pPr>
-            <a:r>
-              <a:rPr lang="en-US" sz="3800" b="1" dirty="0">
-                <a:solidFill>
-                  <a:schemeClr val="accent1"/>
-                </a:solidFill>
-              </a:rPr>
-              <a:t>1,369</a:t>
-            </a:r>
-            <a:endParaRPr lang="en-US" sz="3800" dirty="0"/>
-          </a:p>
-        </p:txBody>
-      </p:sp>
-      <p:sp>
-        <p:nvSpPr>
-          <p:cNvPr id="5" name="Text 2"/>
-          <p:cNvSpPr txBox="1"/>
-          <p:nvPr/>
-        </p:nvSpPr>
-        <p:spPr>
-          <a:xfrm>
-            <a:off x="457200" y="1783080"/>
-            <a:ext cx="2011680" cy="502920"/>
-          </a:xfrm>
-          <a:prstGeom prst="rect">
-            <a:avLst/>
-          </a:prstGeom>
-          <a:noFill/>
-          <a:ln/>
-        </p:spPr>
-        <p:txBody>
-          <a:bodyPr wrap="square" lIns="0" tIns="0" rIns="0" bIns="0" rtlCol="0" anchor="t"/>
-          <a:lstStyle/>
-          <a:p>
-            <a:pPr algn="ctr" indent="0" marL="0">
-              <a:buNone/>
-            </a:pPr>
-            <a:r>
-              <a:rPr lang="en-US" sz="1150" dirty="0">
-                <a:solidFill>
-                  <a:schemeClr val="tx1"/>
-                </a:solidFill>
-              </a:rPr>
-              <a:t>오프라인 테스트 (통과)</a:t>
-            </a:r>
-            <a:endParaRPr lang="en-US" sz="1150" dirty="0"/>
-          </a:p>
-        </p:txBody>
-      </p:sp>
-      <p:sp>
-        <p:nvSpPr>
-          <p:cNvPr id="6" name="Text 3"/>
-          <p:cNvSpPr txBox="1"/>
-          <p:nvPr/>
-        </p:nvSpPr>
-        <p:spPr>
-          <a:xfrm>
-            <a:off x="2468880" y="1051560"/>
-            <a:ext cx="2011680" cy="685800"/>
-          </a:xfrm>
-          <a:prstGeom prst="rect">
-            <a:avLst/>
-          </a:prstGeom>
-          <a:noFill/>
-          <a:ln/>
-        </p:spPr>
-        <p:txBody>
-          <a:bodyPr wrap="square" lIns="0" tIns="0" rIns="0" bIns="0" rtlCol="0" anchor="b"/>
-          <a:lstStyle/>
-          <a:p>
-            <a:pPr algn="ctr" indent="0" marL="0">
-              <a:buNone/>
-            </a:pPr>
-            <a:r>
-              <a:rPr lang="en-US" sz="3800" b="1" dirty="0">
-                <a:solidFill>
-                  <a:schemeClr val="accent1"/>
-                </a:solidFill>
-              </a:rPr>
-              <a:t>24</a:t>
-            </a:r>
-            <a:endParaRPr lang="en-US" sz="3800" dirty="0"/>
-          </a:p>
-        </p:txBody>
-      </p:sp>
-      <p:sp>
-        <p:nvSpPr>
-          <p:cNvPr id="7" name="Text 4"/>
-          <p:cNvSpPr txBox="1"/>
-          <p:nvPr/>
-        </p:nvSpPr>
-        <p:spPr>
-          <a:xfrm>
-            <a:off x="2468880" y="1783080"/>
-            <a:ext cx="2011680" cy="502920"/>
-          </a:xfrm>
-          <a:prstGeom prst="rect">
-            <a:avLst/>
-          </a:prstGeom>
-          <a:noFill/>
-          <a:ln/>
-        </p:spPr>
-        <p:txBody>
-          <a:bodyPr wrap="square" lIns="0" tIns="0" rIns="0" bIns="0" rtlCol="0" anchor="t"/>
-          <a:lstStyle/>
-          <a:p>
-            <a:pPr algn="ctr" indent="0" marL="0">
-              <a:buNone/>
-            </a:pPr>
-            <a:r>
-              <a:rPr lang="en-US" sz="1150" dirty="0">
-                <a:solidFill>
-                  <a:schemeClr val="tx1"/>
-                </a:solidFill>
-              </a:rPr>
-              <a:t>e2e 픽스처 프로젝트</a:t>
-            </a:r>
-            <a:endParaRPr lang="en-US" sz="1150" dirty="0"/>
-          </a:p>
-        </p:txBody>
-      </p:sp>
-      <p:sp>
-        <p:nvSpPr>
-          <p:cNvPr id="8" name="Text 5"/>
-          <p:cNvSpPr txBox="1"/>
-          <p:nvPr/>
-        </p:nvSpPr>
-        <p:spPr>
-          <a:xfrm>
-            <a:off x="4480560" y="1051560"/>
-            <a:ext cx="2011680" cy="685800"/>
-          </a:xfrm>
-          <a:prstGeom prst="rect">
-            <a:avLst/>
-          </a:prstGeom>
-          <a:noFill/>
-          <a:ln/>
-        </p:spPr>
-        <p:txBody>
-          <a:bodyPr wrap="square" lIns="0" tIns="0" rIns="0" bIns="0" rtlCol="0" anchor="b"/>
-          <a:lstStyle/>
-          <a:p>
-            <a:pPr algn="ctr" indent="0" marL="0">
-              <a:buNone/>
-            </a:pPr>
-            <a:r>
-              <a:rPr lang="en-US" sz="3800" b="1" dirty="0">
-                <a:solidFill>
-                  <a:schemeClr val="accent1"/>
-                </a:solidFill>
-              </a:rPr>
-              <a:t>8 / 8</a:t>
-            </a:r>
-            <a:endParaRPr lang="en-US" sz="3800" dirty="0"/>
-          </a:p>
-        </p:txBody>
-      </p:sp>
-      <p:sp>
-        <p:nvSpPr>
-          <p:cNvPr id="9" name="Text 6"/>
-          <p:cNvSpPr txBox="1"/>
-          <p:nvPr/>
-        </p:nvSpPr>
-        <p:spPr>
-          <a:xfrm>
-            <a:off x="4480560" y="1783080"/>
-            <a:ext cx="2011680" cy="502920"/>
-          </a:xfrm>
-          <a:prstGeom prst="rect">
-            <a:avLst/>
-          </a:prstGeom>
-          <a:noFill/>
-          <a:ln/>
-        </p:spPr>
-        <p:txBody>
-          <a:bodyPr wrap="square" lIns="0" tIns="0" rIns="0" bIns="0" rtlCol="0" anchor="t"/>
-          <a:lstStyle/>
-          <a:p>
-            <a:pPr algn="ctr" indent="0" marL="0">
-              <a:buNone/>
-            </a:pPr>
-            <a:r>
-              <a:rPr lang="en-US" sz="1150" dirty="0">
-                <a:solidFill>
-                  <a:schemeClr val="tx1"/>
-                </a:solidFill>
-              </a:rPr>
-              <a:t>회사 레이아웃 e2e PASS (0 LLM)</a:t>
-            </a:r>
-            <a:endParaRPr lang="en-US" sz="1150" dirty="0"/>
-          </a:p>
-        </p:txBody>
-      </p:sp>
-      <p:sp>
-        <p:nvSpPr>
-          <p:cNvPr id="10" name="Text 7"/>
-          <p:cNvSpPr txBox="1"/>
-          <p:nvPr/>
-        </p:nvSpPr>
-        <p:spPr>
-          <a:xfrm>
-            <a:off x="6492240" y="1051560"/>
-            <a:ext cx="2011680" cy="685800"/>
-          </a:xfrm>
-          <a:prstGeom prst="rect">
-            <a:avLst/>
-          </a:prstGeom>
-          <a:noFill/>
-          <a:ln/>
-        </p:spPr>
-        <p:txBody>
-          <a:bodyPr wrap="square" lIns="0" tIns="0" rIns="0" bIns="0" rtlCol="0" anchor="b"/>
-          <a:lstStyle/>
-          <a:p>
-            <a:pPr algn="ctr" indent="0" marL="0">
-              <a:buNone/>
-            </a:pPr>
-            <a:r>
-              <a:rPr lang="en-US" sz="2600" b="1" dirty="0">
-                <a:solidFill>
-                  <a:schemeClr val="accent1"/>
-                </a:solidFill>
-              </a:rPr>
-              <a:t>23 / 33 / 14</a:t>
-            </a:r>
-            <a:endParaRPr lang="en-US" sz="2600" dirty="0"/>
-          </a:p>
-        </p:txBody>
-      </p:sp>
-      <p:sp>
-        <p:nvSpPr>
-          <p:cNvPr id="11" name="Text 8"/>
-          <p:cNvSpPr txBox="1"/>
-          <p:nvPr/>
-        </p:nvSpPr>
-        <p:spPr>
-          <a:xfrm>
-            <a:off x="6492240" y="1783080"/>
-            <a:ext cx="2011680" cy="502920"/>
-          </a:xfrm>
-          <a:prstGeom prst="rect">
-            <a:avLst/>
-          </a:prstGeom>
-          <a:noFill/>
-          <a:ln/>
-        </p:spPr>
-        <p:txBody>
-          <a:bodyPr wrap="square" lIns="0" tIns="0" rIns="0" bIns="0" rtlCol="0" anchor="t"/>
-          <a:lstStyle/>
-          <a:p>
-            <a:pPr algn="ctr" indent="0" marL="0">
-              <a:buNone/>
-            </a:pPr>
-            <a:r>
-              <a:rPr lang="en-US" sz="1150" dirty="0">
-                <a:solidFill>
-                  <a:schemeClr val="tx1"/>
-                </a:solidFill>
-              </a:rPr>
-              <a:t>핸들러 · 레시피 · 어드바이저리</a:t>
-            </a:r>
-            <a:endParaRPr lang="en-US" sz="1150" dirty="0"/>
-          </a:p>
-        </p:txBody>
-      </p:sp>
-      <p:graphicFrame>
-        <p:nvGraphicFramePr>
-          <p:cNvPr id="12" name="Chart 0" descr=""/>
-          <p:cNvGraphicFramePr/>
-          <p:nvPr/>
-        </p:nvGraphicFramePr>
-        <p:xfrm>
-          <a:off x="457200" y="2423160"/>
-          <a:ext cx="5120640" cy="2240280"/>
-        </p:xfrm>
-        <a:graphic xmlns:a="http://schemas.openxmlformats.org/drawingml/2006/main">
-          <a:graphicData uri="http://schemas.openxmlformats.org/drawingml/2006/chart">
-            <c:chart xmlns:c="http://schemas.openxmlformats.org/drawingml/2006/chart" r:id="rId1"/>
-          </a:graphicData>
-        </a:graphic>
-      </p:graphicFrame>
-      <p:sp>
-        <p:nvSpPr>
-          <p:cNvPr id="13" name="Shape 9"/>
-          <p:cNvSpPr/>
-          <p:nvPr/>
-        </p:nvSpPr>
-        <p:spPr>
-          <a:xfrm>
-            <a:off x="5760720" y="2423160"/>
-            <a:ext cx="2926080" cy="2240280"/>
-          </a:xfrm>
-          <a:prstGeom prst="roundRect">
-            <a:avLst>
-              <a:gd name="adj" fmla="val 3265"/>
-            </a:avLst>
-          </a:prstGeom>
-          <a:solidFill>
-            <a:srgbClr val="EEF3EA"/>
-          </a:solidFill>
-          <a:ln w="9525">
-            <a:solidFill>
-              <a:srgbClr val="EEF3EA"/>
-            </a:solidFill>
-            <a:prstDash val="solid"/>
-          </a:ln>
-          <a:effectLst>
-            <a:outerShdw sx="100000" sy="100000" kx="0" ky="0" algn="bl" rotWithShape="0" blurRad="38100" dist="12700" dir="5400000">
-              <a:srgbClr val="000000">
-                <a:alpha val="12000"/>
-              </a:srgbClr>
-            </a:outerShdw>
-          </a:effectLst>
-        </p:spPr>
-      </p:sp>
-      <p:sp>
-        <p:nvSpPr>
-          <p:cNvPr id="14" name="Text 10"/>
-          <p:cNvSpPr txBox="1"/>
-          <p:nvPr/>
-        </p:nvSpPr>
-        <p:spPr>
-          <a:xfrm>
-            <a:off x="5897880" y="2514600"/>
-            <a:ext cx="2651760" cy="347472"/>
-          </a:xfrm>
-          <a:prstGeom prst="rect">
-            <a:avLst/>
-          </a:prstGeom>
-          <a:noFill/>
-          <a:ln/>
-        </p:spPr>
-        <p:txBody>
-          <a:bodyPr wrap="square" lIns="0" tIns="0" rIns="0" bIns="0" rtlCol="0" anchor="t"/>
-          <a:lstStyle/>
-          <a:p>
-            <a:pPr indent="0" marL="0">
-              <a:buNone/>
-            </a:pPr>
-            <a:r>
-              <a:rPr lang="en-US" sz="1300" b="1" dirty="0">
-                <a:solidFill>
-                  <a:schemeClr val="tx2"/>
-                </a:solidFill>
-              </a:rPr>
-              <a:t>e2e가 확인하는 것</a:t>
-            </a:r>
-            <a:endParaRPr lang="en-US" sz="1300" dirty="0"/>
-          </a:p>
-        </p:txBody>
-      </p:sp>
-      <p:sp>
-        <p:nvSpPr>
-          <p:cNvPr id="15" name="Text 11"/>
-          <p:cNvSpPr txBox="1"/>
-          <p:nvPr/>
-        </p:nvSpPr>
-        <p:spPr>
-          <a:xfrm>
-            <a:off x="5897880" y="2880360"/>
-            <a:ext cx="2651760" cy="1691640"/>
-          </a:xfrm>
-          <a:prstGeom prst="rect">
-            <a:avLst/>
-          </a:prstGeom>
-          <a:noFill/>
-          <a:ln/>
-        </p:spPr>
-        <p:txBody>
-          <a:bodyPr wrap="square" lIns="0" tIns="0" rIns="0" bIns="0" rtlCol="0" anchor="t"/>
-          <a:lstStyle/>
-          <a:p>
-            <a:pPr marL="342900" indent="-342900">
-              <a:spcAft>
-                <a:spcPts val="300"/>
-              </a:spcAft>
-              <a:buSzPct val="100000"/>
-              <a:buChar char="•"/>
-            </a:pPr>
-            <a:r>
-              <a:rPr lang="en-US" sz="1050" dirty="0">
-                <a:solidFill>
-                  <a:schemeClr val="tx1"/>
-                </a:solidFill>
-              </a:rPr>
-              <a:t>실제 Maven으로 끝까지 실행, exit code·blocked·LLM 호출 수 상한</a:t>
-            </a:r>
-            <a:endParaRPr lang="en-US" sz="1050" dirty="0"/>
-          </a:p>
-          <a:p>
-            <a:pPr marL="342900" indent="-342900">
-              <a:spcAft>
-                <a:spcPts val="300"/>
-              </a:spcAft>
-              <a:buSzPct val="100000"/>
-              <a:buChar char="•"/>
-            </a:pPr>
-            <a:r>
-              <a:rPr lang="en-US" sz="1050" dirty="0">
-                <a:solidFill>
-                  <a:schemeClr val="tx1"/>
-                </a:solidFill>
-              </a:rPr>
-              <a:t>결과 pom의 부모·패키징·모듈 목록, 외부화 설정 플레이스홀더</a:t>
-            </a:r>
-            <a:endParaRPr lang="en-US" sz="1050" dirty="0"/>
-          </a:p>
-          <a:p>
-            <a:pPr marL="342900" indent="-342900">
-              <a:spcAft>
-                <a:spcPts val="300"/>
-              </a:spcAft>
-              <a:buSzPct val="100000"/>
-              <a:buChar char="•"/>
-            </a:pPr>
-            <a:r>
-              <a:rPr lang="en-US" sz="1050" dirty="0">
-                <a:solidFill>
-                  <a:schemeClr val="tx1"/>
-                </a:solidFill>
-              </a:rPr>
-              <a:t>journal 이벤트(restructure mode 등)와 단계 결과</a:t>
-            </a:r>
-            <a:endParaRPr lang="en-US" sz="1050" dirty="0"/>
-          </a:p>
-          <a:p>
-            <a:pPr marL="342900" indent="-342900">
-              <a:spcAft>
-                <a:spcPts val="300"/>
-              </a:spcAft>
-              <a:buSzPct val="100000"/>
-              <a:buChar char="•"/>
-            </a:pPr>
-            <a:r>
-              <a:rPr lang="en-US" sz="1050" dirty="0">
-                <a:solidFill>
-                  <a:schemeClr val="tx1"/>
-                </a:solidFill>
-              </a:rPr>
-              <a:t>핸드북 자체도 테스트: 적은 경로·설정 키·명령이 실제로 존재하는지</a:t>
-            </a:r>
-            <a:endParaRPr lang="en-US" sz="1050" dirty="0"/>
-          </a:p>
-        </p:txBody>
-      </p:sp>
-      <p:sp>
-        <p:nvSpPr>
-          <p:cNvPr id="25" name="Slide Number Placeholder 0"/>
-          <p:cNvSpPr>
-            <a:spLocks noGrp="1"/>
-          </p:cNvSpPr>
-          <p:nvPr>
-            <p:ph type="sldNum" sz="quarter" idx="4294967295"/>
-          </p:nvPr>
-        </p:nvSpPr>
-        <p:spPr>
-          <a:xfrm>
-            <a:off x="8229600" y="4800600"/>
-            <a:ext cx="457200" cy="228600"/>
-          </a:xfrm>
-          <a:prstGeom prst="rect">
-            <a:avLst/>
-          </a:prstGeom>
-          <a:extLst>
-            <a:ext uri="{C572A759-6A51-4108-AA02-DFA0A04FC94B}">
-              <ma14:wrappingTextBoxFlag xmlns:ma14="http://schemas.microsoft.com/office/mac/drawingml/2011/main" val="0"/>
-            </a:ext>
-          </a:extLst>
-        </p:spPr>
-        <p:txBody>
-          <a:bodyPr/>
-          <a:lstStyle>
-            <a:lvl1pPr>
-              <a:defRPr sz="900">
-                <a:solidFill>
-                  <a:srgbClr val="8A8F8A"/>
-                </a:solidFill>
-              </a:defRPr>
-            </a:lvl1pPr>
-          </a:lstStyle>
-          <a:p>
-            <a:pPr algn="r"/>
-            <a:fld id="{F7021451-1387-4CA6-816F-3879F97B5CBC}" type="slidenum">
-              <a:rPr b="0" lang="en-US"/>
               <a:t>24</a:t>
             </a:fld>
             <a:endParaRPr lang="en-US"/>
@@ -17725,7 +18862,7 @@
                   <a:schemeClr val="tx2"/>
                 </a:solidFill>
               </a:rPr>
-              <a:t>열린 결정과 다음 단계</a:t>
+              <a:t>검증 현황</a:t>
             </a:r>
             <a:endParaRPr lang="en-US" sz="2600" dirty="0"/>
           </a:p>
@@ -17733,18 +18870,322 @@
       </p:sp>
       <p:sp>
         <p:nvSpPr>
-          <p:cNvPr id="4" name="Shape 1"/>
+          <p:cNvPr id="4" name="Text 1"/>
+          <p:cNvSpPr txBox="1"/>
+          <p:nvPr/>
+        </p:nvSpPr>
+        <p:spPr>
+          <a:xfrm>
+            <a:off x="457200" y="1051560"/>
+            <a:ext cx="2011680" cy="685800"/>
+          </a:xfrm>
+          <a:prstGeom prst="rect">
+            <a:avLst/>
+          </a:prstGeom>
+          <a:noFill/>
+          <a:ln/>
+        </p:spPr>
+        <p:txBody>
+          <a:bodyPr wrap="square" lIns="0" tIns="0" rIns="0" bIns="0" rtlCol="0" anchor="b"/>
+          <a:lstStyle/>
+          <a:p>
+            <a:pPr algn="ctr" indent="0" marL="0">
+              <a:buNone/>
+            </a:pPr>
+            <a:r>
+              <a:rPr lang="en-US" sz="3800" b="1" dirty="0">
+                <a:solidFill>
+                  <a:schemeClr val="accent1"/>
+                </a:solidFill>
+              </a:rPr>
+              <a:t>2,192</a:t>
+            </a:r>
+            <a:endParaRPr lang="en-US" sz="3800" dirty="0"/>
+          </a:p>
+        </p:txBody>
+      </p:sp>
+      <p:sp>
+        <p:nvSpPr>
+          <p:cNvPr id="5" name="Text 2"/>
+          <p:cNvSpPr txBox="1"/>
+          <p:nvPr/>
+        </p:nvSpPr>
+        <p:spPr>
+          <a:xfrm>
+            <a:off x="457200" y="1783080"/>
+            <a:ext cx="2011680" cy="502920"/>
+          </a:xfrm>
+          <a:prstGeom prst="rect">
+            <a:avLst/>
+          </a:prstGeom>
+          <a:noFill/>
+          <a:ln/>
+        </p:spPr>
+        <p:txBody>
+          <a:bodyPr wrap="square" lIns="0" tIns="0" rIns="0" bIns="0" rtlCol="0" anchor="t"/>
+          <a:lstStyle/>
+          <a:p>
+            <a:pPr algn="ctr" indent="0" marL="0">
+              <a:buNone/>
+            </a:pPr>
+            <a:r>
+              <a:rPr lang="en-US" sz="1150" dirty="0">
+                <a:solidFill>
+                  <a:schemeClr val="tx1"/>
+                </a:solidFill>
+              </a:rPr>
+              <a:t>오프라인 테스트 (통과)</a:t>
+            </a:r>
+            <a:endParaRPr lang="en-US" sz="1150" dirty="0"/>
+          </a:p>
+        </p:txBody>
+      </p:sp>
+      <p:sp>
+        <p:nvSpPr>
+          <p:cNvPr id="6" name="Text 3"/>
+          <p:cNvSpPr txBox="1"/>
+          <p:nvPr/>
+        </p:nvSpPr>
+        <p:spPr>
+          <a:xfrm>
+            <a:off x="2468880" y="1051560"/>
+            <a:ext cx="2011680" cy="685800"/>
+          </a:xfrm>
+          <a:prstGeom prst="rect">
+            <a:avLst/>
+          </a:prstGeom>
+          <a:noFill/>
+          <a:ln/>
+        </p:spPr>
+        <p:txBody>
+          <a:bodyPr wrap="square" lIns="0" tIns="0" rIns="0" bIns="0" rtlCol="0" anchor="b"/>
+          <a:lstStyle/>
+          <a:p>
+            <a:pPr algn="ctr" indent="0" marL="0">
+              <a:buNone/>
+            </a:pPr>
+            <a:r>
+              <a:rPr lang="en-US" sz="3800" b="1" dirty="0">
+                <a:solidFill>
+                  <a:schemeClr val="accent1"/>
+                </a:solidFill>
+              </a:rPr>
+              <a:t>32</a:t>
+            </a:r>
+            <a:endParaRPr lang="en-US" sz="3800" dirty="0"/>
+          </a:p>
+        </p:txBody>
+      </p:sp>
+      <p:sp>
+        <p:nvSpPr>
+          <p:cNvPr id="7" name="Text 4"/>
+          <p:cNvSpPr txBox="1"/>
+          <p:nvPr/>
+        </p:nvSpPr>
+        <p:spPr>
+          <a:xfrm>
+            <a:off x="2468880" y="1783080"/>
+            <a:ext cx="2011680" cy="502920"/>
+          </a:xfrm>
+          <a:prstGeom prst="rect">
+            <a:avLst/>
+          </a:prstGeom>
+          <a:noFill/>
+          <a:ln/>
+        </p:spPr>
+        <p:txBody>
+          <a:bodyPr wrap="square" lIns="0" tIns="0" rIns="0" bIns="0" rtlCol="0" anchor="t"/>
+          <a:lstStyle/>
+          <a:p>
+            <a:pPr algn="ctr" indent="0" marL="0">
+              <a:buNone/>
+            </a:pPr>
+            <a:r>
+              <a:rPr lang="en-US" sz="1150" dirty="0">
+                <a:solidFill>
+                  <a:schemeClr val="tx1"/>
+                </a:solidFill>
+              </a:rPr>
+              <a:t>e2e 픽스처 프로젝트</a:t>
+            </a:r>
+            <a:endParaRPr lang="en-US" sz="1150" dirty="0"/>
+          </a:p>
+        </p:txBody>
+      </p:sp>
+      <p:sp>
+        <p:nvSpPr>
+          <p:cNvPr id="8" name="Text 5"/>
+          <p:cNvSpPr txBox="1"/>
+          <p:nvPr/>
+        </p:nvSpPr>
+        <p:spPr>
+          <a:xfrm>
+            <a:off x="4480560" y="1051560"/>
+            <a:ext cx="2011680" cy="685800"/>
+          </a:xfrm>
+          <a:prstGeom prst="rect">
+            <a:avLst/>
+          </a:prstGeom>
+          <a:noFill/>
+          <a:ln/>
+        </p:spPr>
+        <p:txBody>
+          <a:bodyPr wrap="square" lIns="0" tIns="0" rIns="0" bIns="0" rtlCol="0" anchor="b"/>
+          <a:lstStyle/>
+          <a:p>
+            <a:pPr algn="ctr" indent="0" marL="0">
+              <a:buNone/>
+            </a:pPr>
+            <a:r>
+              <a:rPr lang="en-US" sz="3800" b="1" dirty="0">
+                <a:solidFill>
+                  <a:schemeClr val="accent1"/>
+                </a:solidFill>
+              </a:rPr>
+              <a:t>8 / 8</a:t>
+            </a:r>
+            <a:endParaRPr lang="en-US" sz="3800" dirty="0"/>
+          </a:p>
+        </p:txBody>
+      </p:sp>
+      <p:sp>
+        <p:nvSpPr>
+          <p:cNvPr id="9" name="Text 6"/>
+          <p:cNvSpPr txBox="1"/>
+          <p:nvPr/>
+        </p:nvSpPr>
+        <p:spPr>
+          <a:xfrm>
+            <a:off x="4480560" y="1783080"/>
+            <a:ext cx="2011680" cy="502920"/>
+          </a:xfrm>
+          <a:prstGeom prst="rect">
+            <a:avLst/>
+          </a:prstGeom>
+          <a:noFill/>
+          <a:ln/>
+        </p:spPr>
+        <p:txBody>
+          <a:bodyPr wrap="square" lIns="0" tIns="0" rIns="0" bIns="0" rtlCol="0" anchor="t"/>
+          <a:lstStyle/>
+          <a:p>
+            <a:pPr algn="ctr" indent="0" marL="0">
+              <a:buNone/>
+            </a:pPr>
+            <a:r>
+              <a:rPr lang="en-US" sz="1150" dirty="0">
+                <a:solidFill>
+                  <a:schemeClr val="tx1"/>
+                </a:solidFill>
+              </a:rPr>
+              <a:t>회사 레이아웃 e2e PASS (0 LLM)</a:t>
+            </a:r>
+            <a:endParaRPr lang="en-US" sz="1150" dirty="0"/>
+          </a:p>
+        </p:txBody>
+      </p:sp>
+      <p:sp>
+        <p:nvSpPr>
+          <p:cNvPr id="10" name="Text 7"/>
+          <p:cNvSpPr txBox="1"/>
+          <p:nvPr/>
+        </p:nvSpPr>
+        <p:spPr>
+          <a:xfrm>
+            <a:off x="6492240" y="1051560"/>
+            <a:ext cx="2011680" cy="685800"/>
+          </a:xfrm>
+          <a:prstGeom prst="rect">
+            <a:avLst/>
+          </a:prstGeom>
+          <a:noFill/>
+          <a:ln/>
+        </p:spPr>
+        <p:txBody>
+          <a:bodyPr wrap="square" lIns="0" tIns="0" rIns="0" bIns="0" rtlCol="0" anchor="b"/>
+          <a:lstStyle/>
+          <a:p>
+            <a:pPr algn="ctr" indent="0" marL="0">
+              <a:buNone/>
+            </a:pPr>
+            <a:r>
+              <a:rPr lang="en-US" sz="2600" b="1" dirty="0">
+                <a:solidFill>
+                  <a:schemeClr val="accent1"/>
+                </a:solidFill>
+              </a:rPr>
+              <a:t>32 / 50 / 67</a:t>
+            </a:r>
+            <a:endParaRPr lang="en-US" sz="2600" dirty="0"/>
+          </a:p>
+        </p:txBody>
+      </p:sp>
+      <p:sp>
+        <p:nvSpPr>
+          <p:cNvPr id="11" name="Text 8"/>
+          <p:cNvSpPr txBox="1"/>
+          <p:nvPr/>
+        </p:nvSpPr>
+        <p:spPr>
+          <a:xfrm>
+            <a:off x="6492240" y="1783080"/>
+            <a:ext cx="2011680" cy="502920"/>
+          </a:xfrm>
+          <a:prstGeom prst="rect">
+            <a:avLst/>
+          </a:prstGeom>
+          <a:noFill/>
+          <a:ln/>
+        </p:spPr>
+        <p:txBody>
+          <a:bodyPr wrap="square" lIns="0" tIns="0" rIns="0" bIns="0" rtlCol="0" anchor="t"/>
+          <a:lstStyle/>
+          <a:p>
+            <a:pPr algn="ctr" indent="0" marL="0">
+              <a:buNone/>
+            </a:pPr>
+            <a:r>
+              <a:rPr lang="en-US" sz="1150" dirty="0">
+                <a:solidFill>
+                  <a:schemeClr val="tx1"/>
+                </a:solidFill>
+              </a:rPr>
+              <a:t>핸들러 · 레시피 · 어드바이저리</a:t>
+            </a:r>
+            <a:endParaRPr lang="en-US" sz="1150" dirty="0"/>
+          </a:p>
+        </p:txBody>
+      </p:sp>
+      <p:graphicFrame>
+        <p:nvGraphicFramePr>
+          <p:cNvPr id="12" name="Chart 0" descr=""/>
+          <p:cNvGraphicFramePr/>
+          <p:nvPr/>
+        </p:nvGraphicFramePr>
+        <p:xfrm>
+          <a:off x="457200" y="2423160"/>
+          <a:ext cx="5120640" cy="2240280"/>
+        </p:xfrm>
+        <a:graphic xmlns:a="http://schemas.openxmlformats.org/drawingml/2006/main">
+          <a:graphicData uri="http://schemas.openxmlformats.org/drawingml/2006/chart">
+            <c:chart xmlns:c="http://schemas.openxmlformats.org/drawingml/2006/chart" r:id="rId1"/>
+          </a:graphicData>
+        </a:graphic>
+      </p:graphicFrame>
+      <p:sp>
+        <p:nvSpPr>
+          <p:cNvPr id="13" name="Shape 9"/>
           <p:cNvSpPr/>
           <p:nvPr/>
         </p:nvSpPr>
         <p:spPr>
           <a:xfrm>
-            <a:off x="457200" y="1097280"/>
-            <a:ext cx="4023360" cy="1691640"/>
+            <a:off x="5760720" y="2423160"/>
+            <a:ext cx="2926080" cy="2240280"/>
           </a:xfrm>
           <a:prstGeom prst="roundRect">
             <a:avLst>
-              <a:gd name="adj" fmla="val 4324"/>
+              <a:gd name="adj" fmla="val 3265"/>
             </a:avLst>
           </a:prstGeom>
           <a:solidFill>
@@ -17767,14 +19208,14 @@
       </p:sp>
       <p:sp>
         <p:nvSpPr>
-          <p:cNvPr id="5" name="Text 2"/>
+          <p:cNvPr id="14" name="Text 10"/>
           <p:cNvSpPr txBox="1"/>
           <p:nvPr/>
         </p:nvSpPr>
         <p:spPr>
           <a:xfrm>
-            <a:off x="594360" y="1188720"/>
-            <a:ext cx="3749040" cy="347472"/>
+            <a:off x="5897880" y="2514600"/>
+            <a:ext cx="2651760" cy="347472"/>
           </a:xfrm>
           <a:prstGeom prst="rect">
             <a:avLst/>
@@ -17795,7 +19236,7 @@
                   <a:schemeClr val="tx2"/>
                 </a:solidFill>
               </a:rPr>
-              <a:t>회사가 정할 것</a:t>
+              <a:t>e2e가 확인하는 것</a:t>
             </a:r>
             <a:endParaRPr lang="en-US" sz="1300" dirty="0"/>
           </a:p>
@@ -17803,14 +19244,14 @@
       </p:sp>
       <p:sp>
         <p:nvSpPr>
-          <p:cNvPr id="6" name="Text 3"/>
+          <p:cNvPr id="15" name="Text 11"/>
           <p:cNvSpPr txBox="1"/>
           <p:nvPr/>
         </p:nvSpPr>
         <p:spPr>
           <a:xfrm>
-            <a:off x="594360" y="1554480"/>
-            <a:ext cx="3749040" cy="1143000"/>
+            <a:off x="5897880" y="2880360"/>
+            <a:ext cx="2651760" cy="1691640"/>
           </a:xfrm>
           <a:prstGeom prst="rect">
             <a:avLst/>
@@ -17830,14 +19271,14 @@
               <a:buChar char="•"/>
             </a:pPr>
             <a:r>
-              <a:rPr lang="en-US" sz="1100" dirty="0">
+              <a:rPr lang="en-US" sz="1050" dirty="0">
                 <a:solidFill>
                   <a:schemeClr val="tx1"/>
                 </a:solidFill>
               </a:rPr>
-              <a:t>플릿에서 단위 테스트를 돌릴지 (build.skip_tests: true가 기본 — 빠르지만 런타임 문제를 덜 잡음)</a:t>
-            </a:r>
-            <a:endParaRPr lang="en-US" sz="1100" dirty="0"/>
+              <a:t>실제 Maven으로 끝까지 실행, exit code·blocked·LLM 호출 수 상한</a:t>
+            </a:r>
+            <a:endParaRPr lang="en-US" sz="1050" dirty="0"/>
           </a:p>
           <a:p>
             <a:pPr marL="342900" indent="-342900">
@@ -17848,14 +19289,14 @@
               <a:buChar char="•"/>
             </a:pPr>
             <a:r>
-              <a:rPr lang="en-US" sz="1100" dirty="0">
+              <a:rPr lang="en-US" sz="1050" dirty="0">
                 <a:solidFill>
                   <a:schemeClr val="tx1"/>
                 </a:solidFill>
               </a:rPr>
-              <a:t>작업공간에 임시 git 저장소를 두는 것이 허용되는지 (금지면 복사 기반 스냅샷 백엔드)</a:t>
-            </a:r>
-            <a:endParaRPr lang="en-US" sz="1100" dirty="0"/>
+              <a:t>결과 pom의 부모·패키징·모듈 목록, 외부화 설정 플레이스홀더</a:t>
+            </a:r>
+            <a:endParaRPr lang="en-US" sz="1050" dirty="0"/>
           </a:p>
           <a:p>
             <a:pPr marL="342900" indent="-342900">
@@ -17866,107 +19307,15 @@
               <a:buChar char="•"/>
             </a:pPr>
             <a:r>
-              <a:rPr lang="en-US" sz="1100" dirty="0">
+              <a:rPr lang="en-US" sz="1050" dirty="0">
                 <a:solidFill>
                   <a:schemeClr val="tx1"/>
                 </a:solidFill>
               </a:rPr>
-              <a:t>xxx-boot-jar 부모가 spring-boot-maven-plugin 버전을 관리하는지 (아니면 parent_manages_spring_boot: false)</a:t>
-            </a:r>
-            <a:endParaRPr lang="en-US" sz="1100" dirty="0"/>
-          </a:p>
-        </p:txBody>
-      </p:sp>
-      <p:sp>
-        <p:nvSpPr>
-          <p:cNvPr id="7" name="Shape 4"/>
-          <p:cNvSpPr/>
-          <p:nvPr/>
-        </p:nvSpPr>
-        <p:spPr>
-          <a:xfrm>
-            <a:off x="4663440" y="1097280"/>
-            <a:ext cx="4023360" cy="1691640"/>
-          </a:xfrm>
-          <a:prstGeom prst="roundRect">
-            <a:avLst>
-              <a:gd name="adj" fmla="val 4324"/>
-            </a:avLst>
-          </a:prstGeom>
-          <a:solidFill>
-            <a:srgbClr val="EEF3EA"/>
-          </a:solidFill>
-          <a:ln w="9525">
-            <a:solidFill>
-              <a:srgbClr val="EEF3EA"/>
-            </a:solidFill>
-            <a:prstDash val="solid"/>
-          </a:ln>
-          <a:effectLst>
-            <a:outerShdw sx="100000" sy="100000" kx="0" ky="0" algn="bl" rotWithShape="0" blurRad="38100" dist="12700" dir="5400000">
-              <a:srgbClr val="000000">
-                <a:alpha val="12000"/>
-              </a:srgbClr>
-            </a:outerShdw>
-          </a:effectLst>
-        </p:spPr>
-      </p:sp>
-      <p:sp>
-        <p:nvSpPr>
-          <p:cNvPr id="8" name="Text 5"/>
-          <p:cNvSpPr txBox="1"/>
-          <p:nvPr/>
-        </p:nvSpPr>
-        <p:spPr>
-          <a:xfrm>
-            <a:off x="4800600" y="1188720"/>
-            <a:ext cx="3749040" cy="347472"/>
-          </a:xfrm>
-          <a:prstGeom prst="rect">
-            <a:avLst/>
-          </a:prstGeom>
-          <a:noFill/>
-          <a:ln/>
-        </p:spPr>
-        <p:txBody>
-          <a:bodyPr wrap="square" lIns="0" tIns="0" rIns="0" bIns="0" rtlCol="0" anchor="t"/>
-          <a:lstStyle/>
-          <a:p>
-            <a:pPr indent="0" marL="0">
-              <a:buNone/>
-            </a:pPr>
-            <a:r>
-              <a:rPr lang="en-US" sz="1300" b="1" dirty="0">
-                <a:solidFill>
-                  <a:schemeClr val="tx2"/>
-                </a:solidFill>
-              </a:rPr>
-              <a:t>다음 라운드 후보</a:t>
-            </a:r>
-            <a:endParaRPr lang="en-US" sz="1300" dirty="0"/>
-          </a:p>
-        </p:txBody>
-      </p:sp>
-      <p:sp>
-        <p:nvSpPr>
-          <p:cNvPr id="9" name="Text 6"/>
-          <p:cNvSpPr txBox="1"/>
-          <p:nvPr/>
-        </p:nvSpPr>
-        <p:spPr>
-          <a:xfrm>
-            <a:off x="4800600" y="1554480"/>
-            <a:ext cx="3749040" cy="1143000"/>
-          </a:xfrm>
-          <a:prstGeom prst="rect">
-            <a:avLst/>
-          </a:prstGeom>
-          <a:noFill/>
-          <a:ln/>
-        </p:spPr>
-        <p:txBody>
-          <a:bodyPr wrap="square" lIns="0" tIns="0" rIns="0" bIns="0" rtlCol="0" anchor="t"/>
-          <a:lstStyle/>
+              <a:t>journal 이벤트(restructure mode 등)와 단계 결과</a:t>
+            </a:r>
+            <a:endParaRPr lang="en-US" sz="1050" dirty="0"/>
+          </a:p>
           <a:p>
             <a:pPr marL="342900" indent="-342900">
               <a:spcAft>
@@ -17976,214 +19325,14 @@
               <a:buChar char="•"/>
             </a:pPr>
             <a:r>
-              <a:rPr lang="en-US" sz="1100" dirty="0">
+              <a:rPr lang="en-US" sz="1050" dirty="0">
                 <a:solidFill>
                   <a:schemeClr val="tx1"/>
                 </a:solidFill>
               </a:rPr>
-              <a:t>빌드/리라이트 로그 줄마다 시각 + compile/parse/recipes 분할 요약(큰 프로젝트 시간 분석)</a:t>
-            </a:r>
-            <a:endParaRPr lang="en-US" sz="1100" dirty="0"/>
-          </a:p>
-          <a:p>
-            <a:pPr marL="342900" indent="-342900">
-              <a:spcAft>
-                <a:spcPts val="300"/>
-              </a:spcAft>
-              <a:buSzPct val="100000"/>
-              <a:buChar char="•"/>
-            </a:pPr>
-            <a:r>
-              <a:rPr lang="en-US" sz="1100" dirty="0">
-                <a:solidFill>
-                  <a:schemeClr val="tx1"/>
-                </a:solidFill>
-              </a:rPr>
-              <a:t>심볼 단위 교차 파일 클러스터링(같은 라이브러리 메서드 N파일 → LLM 1회)</a:t>
-            </a:r>
-            <a:endParaRPr lang="en-US" sz="1100" dirty="0"/>
-          </a:p>
-          <a:p>
-            <a:pPr marL="342900" indent="-342900">
-              <a:spcAft>
-                <a:spcPts val="300"/>
-              </a:spcAft>
-              <a:buSzPct val="100000"/>
-              <a:buChar char="•"/>
-            </a:pPr>
-            <a:r>
-              <a:rPr lang="en-US" sz="1100" dirty="0">
-                <a:solidFill>
-                  <a:schemeClr val="tx1"/>
-                </a:solidFill>
-              </a:rPr>
-              <a:t>ribbon/zuul/netflix-feign 등 guide 어드바이저리의 레시피화</a:t>
-            </a:r>
-            <a:endParaRPr lang="en-US" sz="1100" dirty="0"/>
-          </a:p>
-          <a:p>
-            <a:pPr marL="342900" indent="-342900">
-              <a:spcAft>
-                <a:spcPts val="300"/>
-              </a:spcAft>
-              <a:buSzPct val="100000"/>
-              <a:buChar char="•"/>
-            </a:pPr>
-            <a:r>
-              <a:rPr lang="en-US" sz="1100" dirty="0">
-                <a:solidFill>
-                  <a:schemeClr val="tx1"/>
-                </a:solidFill>
-              </a:rPr>
-              <a:t>ADVISOR_CATALOG를 사내 레시피 인벤토리로 확장</a:t>
-            </a:r>
-            <a:endParaRPr lang="en-US" sz="1100" dirty="0"/>
-          </a:p>
-        </p:txBody>
-      </p:sp>
-      <p:sp>
-        <p:nvSpPr>
-          <p:cNvPr id="10" name="Shape 7"/>
-          <p:cNvSpPr/>
-          <p:nvPr/>
-        </p:nvSpPr>
-        <p:spPr>
-          <a:xfrm>
-            <a:off x="457200" y="2971800"/>
-            <a:ext cx="8229600" cy="1645920"/>
-          </a:xfrm>
-          <a:prstGeom prst="roundRect">
-            <a:avLst>
-              <a:gd name="adj" fmla="val 4444"/>
-            </a:avLst>
-          </a:prstGeom>
-          <a:solidFill>
-            <a:srgbClr val="EEF3EA"/>
-          </a:solidFill>
-          <a:ln w="9525">
-            <a:solidFill>
-              <a:srgbClr val="EEF3EA"/>
-            </a:solidFill>
-            <a:prstDash val="solid"/>
-          </a:ln>
-          <a:effectLst>
-            <a:outerShdw sx="100000" sy="100000" kx="0" ky="0" algn="bl" rotWithShape="0" blurRad="38100" dist="12700" dir="5400000">
-              <a:srgbClr val="000000">
-                <a:alpha val="12000"/>
-              </a:srgbClr>
-            </a:outerShdw>
-          </a:effectLst>
-        </p:spPr>
-      </p:sp>
-      <p:sp>
-        <p:nvSpPr>
-          <p:cNvPr id="11" name="Text 8"/>
-          <p:cNvSpPr txBox="1"/>
-          <p:nvPr/>
-        </p:nvSpPr>
-        <p:spPr>
-          <a:xfrm>
-            <a:off x="594360" y="3063240"/>
-            <a:ext cx="7955280" cy="347472"/>
-          </a:xfrm>
-          <a:prstGeom prst="rect">
-            <a:avLst/>
-          </a:prstGeom>
-          <a:noFill/>
-          <a:ln/>
-        </p:spPr>
-        <p:txBody>
-          <a:bodyPr wrap="square" lIns="0" tIns="0" rIns="0" bIns="0" rtlCol="0" anchor="t"/>
-          <a:lstStyle/>
-          <a:p>
-            <a:pPr indent="0" marL="0">
-              <a:buNone/>
-            </a:pPr>
-            <a:r>
-              <a:rPr lang="en-US" sz="1300" b="1" dirty="0">
-                <a:solidFill>
-                  <a:schemeClr val="tx2"/>
-                </a:solidFill>
-              </a:rPr>
-              <a:t>플릿 운영 제안</a:t>
-            </a:r>
-            <a:endParaRPr lang="en-US" sz="1300" dirty="0"/>
-          </a:p>
-        </p:txBody>
-      </p:sp>
-      <p:sp>
-        <p:nvSpPr>
-          <p:cNvPr id="12" name="Text 9"/>
-          <p:cNvSpPr txBox="1"/>
-          <p:nvPr/>
-        </p:nvSpPr>
-        <p:spPr>
-          <a:xfrm>
-            <a:off x="594360" y="3429000"/>
-            <a:ext cx="7955280" cy="1097280"/>
-          </a:xfrm>
-          <a:prstGeom prst="rect">
-            <a:avLst/>
-          </a:prstGeom>
-          <a:noFill/>
-          <a:ln/>
-        </p:spPr>
-        <p:txBody>
-          <a:bodyPr wrap="square" lIns="0" tIns="0" rIns="0" bIns="0" rtlCol="0" anchor="t"/>
-          <a:lstStyle/>
-          <a:p>
-            <a:pPr marL="342900" indent="-342900">
-              <a:spcAft>
-                <a:spcPts val="300"/>
-              </a:spcAft>
-              <a:buSzPct val="100000"/>
-              <a:buChar char="•"/>
-            </a:pPr>
-            <a:r>
-              <a:rPr lang="en-US" sz="1150" dirty="0">
-                <a:solidFill>
-                  <a:schemeClr val="tx1"/>
-                </a:solidFill>
-              </a:rPr>
-              <a:t>1) 대표 프로젝트 4종(순수 Java, Spring 5 war, Boot 2.x 멀티모듈, MSA)으로 실제 Nexus·게이트웨이에서 파일럿 → Handover 품질 확인</a:t>
-            </a:r>
-            <a:endParaRPr lang="en-US" sz="1150" dirty="0"/>
-          </a:p>
-          <a:p>
-            <a:pPr marL="342900" indent="-342900">
-              <a:spcAft>
-                <a:spcPts val="300"/>
-              </a:spcAft>
-              <a:buSzPct val="100000"/>
-              <a:buChar char="•"/>
-            </a:pPr>
-            <a:r>
-              <a:rPr lang="en-US" sz="1150" dirty="0">
-                <a:solidFill>
-                  <a:schemeClr val="tx1"/>
-                </a:solidFill>
-              </a:rPr>
-              <a:t>2) kb/를 공유 디렉터리로 두고 플릿을 순차 실행, 매일 ledger 요약과 레시피 후보 검토(sbmig kb learning / promote)</a:t>
-            </a:r>
-            <a:endParaRPr lang="en-US" sz="1150" dirty="0"/>
-          </a:p>
-          <a:p>
-            <a:pPr marL="342900" indent="-342900">
-              <a:spcAft>
-                <a:spcPts val="300"/>
-              </a:spcAft>
-              <a:buSzPct val="100000"/>
-              <a:buChar char="•"/>
-            </a:pPr>
-            <a:r>
-              <a:rPr lang="en-US" sz="1150" dirty="0">
-                <a:solidFill>
-                  <a:schemeClr val="tx1"/>
-                </a:solidFill>
-              </a:rPr>
-              <a:t>3) blocked·follow-up 통계로 Nexus 프록시 누락, 사내 라이브러리 jakarta 빌드 등 '프로젝트 밖' 과제를 모아 처리</a:t>
-            </a:r>
-            <a:endParaRPr lang="en-US" sz="1150" dirty="0"/>
+              <a:t>핸드북 자체도 테스트: 적은 경로·설정 키·명령이 실제로 존재하는지</a:t>
+            </a:r>
+            <a:endParaRPr lang="en-US" sz="1050" dirty="0"/>
           </a:p>
         </p:txBody>
       </p:sp>
@@ -18289,6 +19438,570 @@
                   <a:schemeClr val="tx2"/>
                 </a:solidFill>
               </a:rPr>
+              <a:t>열린 결정과 다음 단계</a:t>
+            </a:r>
+            <a:endParaRPr lang="en-US" sz="2600" dirty="0"/>
+          </a:p>
+        </p:txBody>
+      </p:sp>
+      <p:sp>
+        <p:nvSpPr>
+          <p:cNvPr id="4" name="Shape 1"/>
+          <p:cNvSpPr/>
+          <p:nvPr/>
+        </p:nvSpPr>
+        <p:spPr>
+          <a:xfrm>
+            <a:off x="457200" y="1097280"/>
+            <a:ext cx="4023360" cy="1691640"/>
+          </a:xfrm>
+          <a:prstGeom prst="roundRect">
+            <a:avLst>
+              <a:gd name="adj" fmla="val 4324"/>
+            </a:avLst>
+          </a:prstGeom>
+          <a:solidFill>
+            <a:srgbClr val="EEF3EA"/>
+          </a:solidFill>
+          <a:ln w="9525">
+            <a:solidFill>
+              <a:srgbClr val="EEF3EA"/>
+            </a:solidFill>
+            <a:prstDash val="solid"/>
+          </a:ln>
+          <a:effectLst>
+            <a:outerShdw sx="100000" sy="100000" kx="0" ky="0" algn="bl" rotWithShape="0" blurRad="38100" dist="12700" dir="5400000">
+              <a:srgbClr val="000000">
+                <a:alpha val="12000"/>
+              </a:srgbClr>
+            </a:outerShdw>
+          </a:effectLst>
+        </p:spPr>
+      </p:sp>
+      <p:sp>
+        <p:nvSpPr>
+          <p:cNvPr id="5" name="Text 2"/>
+          <p:cNvSpPr txBox="1"/>
+          <p:nvPr/>
+        </p:nvSpPr>
+        <p:spPr>
+          <a:xfrm>
+            <a:off x="594360" y="1188720"/>
+            <a:ext cx="3749040" cy="347472"/>
+          </a:xfrm>
+          <a:prstGeom prst="rect">
+            <a:avLst/>
+          </a:prstGeom>
+          <a:noFill/>
+          <a:ln/>
+        </p:spPr>
+        <p:txBody>
+          <a:bodyPr wrap="square" lIns="0" tIns="0" rIns="0" bIns="0" rtlCol="0" anchor="t"/>
+          <a:lstStyle/>
+          <a:p>
+            <a:pPr indent="0" marL="0">
+              <a:buNone/>
+            </a:pPr>
+            <a:r>
+              <a:rPr lang="en-US" sz="1300" b="1" dirty="0">
+                <a:solidFill>
+                  <a:schemeClr val="tx2"/>
+                </a:solidFill>
+              </a:rPr>
+              <a:t>회사가 정할 것</a:t>
+            </a:r>
+            <a:endParaRPr lang="en-US" sz="1300" dirty="0"/>
+          </a:p>
+        </p:txBody>
+      </p:sp>
+      <p:sp>
+        <p:nvSpPr>
+          <p:cNvPr id="6" name="Text 3"/>
+          <p:cNvSpPr txBox="1"/>
+          <p:nvPr/>
+        </p:nvSpPr>
+        <p:spPr>
+          <a:xfrm>
+            <a:off x="594360" y="1554480"/>
+            <a:ext cx="3749040" cy="1143000"/>
+          </a:xfrm>
+          <a:prstGeom prst="rect">
+            <a:avLst/>
+          </a:prstGeom>
+          <a:noFill/>
+          <a:ln/>
+        </p:spPr>
+        <p:txBody>
+          <a:bodyPr wrap="square" lIns="0" tIns="0" rIns="0" bIns="0" rtlCol="0" anchor="t"/>
+          <a:lstStyle/>
+          <a:p>
+            <a:pPr marL="342900" indent="-342900">
+              <a:spcAft>
+                <a:spcPts val="300"/>
+              </a:spcAft>
+              <a:buSzPct val="100000"/>
+              <a:buChar char="•"/>
+            </a:pPr>
+            <a:r>
+              <a:rPr lang="en-US" sz="1100" dirty="0">
+                <a:solidFill>
+                  <a:schemeClr val="tx1"/>
+                </a:solidFill>
+              </a:rPr>
+              <a:t>플릿에서 단위 테스트를 돌릴지 (build.skip_tests: true가 기본 — 빠르지만 런타임 문제를 덜 잡음)</a:t>
+            </a:r>
+            <a:endParaRPr lang="en-US" sz="1100" dirty="0"/>
+          </a:p>
+          <a:p>
+            <a:pPr marL="342900" indent="-342900">
+              <a:spcAft>
+                <a:spcPts val="300"/>
+              </a:spcAft>
+              <a:buSzPct val="100000"/>
+              <a:buChar char="•"/>
+            </a:pPr>
+            <a:r>
+              <a:rPr lang="en-US" sz="1100" dirty="0">
+                <a:solidFill>
+                  <a:schemeClr val="tx1"/>
+                </a:solidFill>
+              </a:rPr>
+              <a:t>작업공간에 임시 git 저장소를 두는 것이 허용되는지 (금지면 복사 기반 스냅샷 백엔드)</a:t>
+            </a:r>
+            <a:endParaRPr lang="en-US" sz="1100" dirty="0"/>
+          </a:p>
+          <a:p>
+            <a:pPr marL="342900" indent="-342900">
+              <a:spcAft>
+                <a:spcPts val="300"/>
+              </a:spcAft>
+              <a:buSzPct val="100000"/>
+              <a:buChar char="•"/>
+            </a:pPr>
+            <a:r>
+              <a:rPr lang="en-US" sz="1100" dirty="0">
+                <a:solidFill>
+                  <a:schemeClr val="tx1"/>
+                </a:solidFill>
+              </a:rPr>
+              <a:t>xxx-boot-jar 부모가 spring-boot-maven-plugin 버전을 관리하는지 (아니면 parent_manages_spring_boot: false)</a:t>
+            </a:r>
+            <a:endParaRPr lang="en-US" sz="1100" dirty="0"/>
+          </a:p>
+        </p:txBody>
+      </p:sp>
+      <p:sp>
+        <p:nvSpPr>
+          <p:cNvPr id="7" name="Shape 4"/>
+          <p:cNvSpPr/>
+          <p:nvPr/>
+        </p:nvSpPr>
+        <p:spPr>
+          <a:xfrm>
+            <a:off x="4663440" y="1097280"/>
+            <a:ext cx="4023360" cy="1691640"/>
+          </a:xfrm>
+          <a:prstGeom prst="roundRect">
+            <a:avLst>
+              <a:gd name="adj" fmla="val 4324"/>
+            </a:avLst>
+          </a:prstGeom>
+          <a:solidFill>
+            <a:srgbClr val="EEF3EA"/>
+          </a:solidFill>
+          <a:ln w="9525">
+            <a:solidFill>
+              <a:srgbClr val="EEF3EA"/>
+            </a:solidFill>
+            <a:prstDash val="solid"/>
+          </a:ln>
+          <a:effectLst>
+            <a:outerShdw sx="100000" sy="100000" kx="0" ky="0" algn="bl" rotWithShape="0" blurRad="38100" dist="12700" dir="5400000">
+              <a:srgbClr val="000000">
+                <a:alpha val="12000"/>
+              </a:srgbClr>
+            </a:outerShdw>
+          </a:effectLst>
+        </p:spPr>
+      </p:sp>
+      <p:sp>
+        <p:nvSpPr>
+          <p:cNvPr id="8" name="Text 5"/>
+          <p:cNvSpPr txBox="1"/>
+          <p:nvPr/>
+        </p:nvSpPr>
+        <p:spPr>
+          <a:xfrm>
+            <a:off x="4800600" y="1188720"/>
+            <a:ext cx="3749040" cy="347472"/>
+          </a:xfrm>
+          <a:prstGeom prst="rect">
+            <a:avLst/>
+          </a:prstGeom>
+          <a:noFill/>
+          <a:ln/>
+        </p:spPr>
+        <p:txBody>
+          <a:bodyPr wrap="square" lIns="0" tIns="0" rIns="0" bIns="0" rtlCol="0" anchor="t"/>
+          <a:lstStyle/>
+          <a:p>
+            <a:pPr indent="0" marL="0">
+              <a:buNone/>
+            </a:pPr>
+            <a:r>
+              <a:rPr lang="en-US" sz="1300" b="1" dirty="0">
+                <a:solidFill>
+                  <a:schemeClr val="tx2"/>
+                </a:solidFill>
+              </a:rPr>
+              <a:t>다음 라운드 후보</a:t>
+            </a:r>
+            <a:endParaRPr lang="en-US" sz="1300" dirty="0"/>
+          </a:p>
+        </p:txBody>
+      </p:sp>
+      <p:sp>
+        <p:nvSpPr>
+          <p:cNvPr id="9" name="Text 6"/>
+          <p:cNvSpPr txBox="1"/>
+          <p:nvPr/>
+        </p:nvSpPr>
+        <p:spPr>
+          <a:xfrm>
+            <a:off x="4800600" y="1554480"/>
+            <a:ext cx="3749040" cy="1143000"/>
+          </a:xfrm>
+          <a:prstGeom prst="rect">
+            <a:avLst/>
+          </a:prstGeom>
+          <a:noFill/>
+          <a:ln/>
+        </p:spPr>
+        <p:txBody>
+          <a:bodyPr wrap="square" lIns="0" tIns="0" rIns="0" bIns="0" rtlCol="0" anchor="t"/>
+          <a:lstStyle/>
+          <a:p>
+            <a:pPr marL="342900" indent="-342900">
+              <a:spcAft>
+                <a:spcPts val="300"/>
+              </a:spcAft>
+              <a:buSzPct val="100000"/>
+              <a:buChar char="•"/>
+            </a:pPr>
+            <a:r>
+              <a:rPr lang="en-US" sz="1100" dirty="0">
+                <a:solidFill>
+                  <a:schemeClr val="tx1"/>
+                </a:solidFill>
+              </a:rPr>
+              <a:t>빌드/리라이트 로그 줄마다 시각 + compile/parse/recipes 분할 요약(큰 프로젝트 시간 분석)</a:t>
+            </a:r>
+            <a:endParaRPr lang="en-US" sz="1100" dirty="0"/>
+          </a:p>
+          <a:p>
+            <a:pPr marL="342900" indent="-342900">
+              <a:spcAft>
+                <a:spcPts val="300"/>
+              </a:spcAft>
+              <a:buSzPct val="100000"/>
+              <a:buChar char="•"/>
+            </a:pPr>
+            <a:r>
+              <a:rPr lang="en-US" sz="1100" dirty="0">
+                <a:solidFill>
+                  <a:schemeClr val="tx1"/>
+                </a:solidFill>
+              </a:rPr>
+              <a:t>심볼 단위 교차 파일 클러스터링(같은 라이브러리 메서드 N파일 → LLM 1회)</a:t>
+            </a:r>
+            <a:endParaRPr lang="en-US" sz="1100" dirty="0"/>
+          </a:p>
+          <a:p>
+            <a:pPr marL="342900" indent="-342900">
+              <a:spcAft>
+                <a:spcPts val="300"/>
+              </a:spcAft>
+              <a:buSzPct val="100000"/>
+              <a:buChar char="•"/>
+            </a:pPr>
+            <a:r>
+              <a:rPr lang="en-US" sz="1100" dirty="0">
+                <a:solidFill>
+                  <a:schemeClr val="tx1"/>
+                </a:solidFill>
+              </a:rPr>
+              <a:t>ribbon/zuul/netflix-feign 등 guide 어드바이저리의 레시피화</a:t>
+            </a:r>
+            <a:endParaRPr lang="en-US" sz="1100" dirty="0"/>
+          </a:p>
+          <a:p>
+            <a:pPr marL="342900" indent="-342900">
+              <a:spcAft>
+                <a:spcPts val="300"/>
+              </a:spcAft>
+              <a:buSzPct val="100000"/>
+              <a:buChar char="•"/>
+            </a:pPr>
+            <a:r>
+              <a:rPr lang="en-US" sz="1100" dirty="0">
+                <a:solidFill>
+                  <a:schemeClr val="tx1"/>
+                </a:solidFill>
+              </a:rPr>
+              <a:t>ADVISOR_CATALOG를 사내 레시피 인벤토리로 확장</a:t>
+            </a:r>
+            <a:endParaRPr lang="en-US" sz="1100" dirty="0"/>
+          </a:p>
+        </p:txBody>
+      </p:sp>
+      <p:sp>
+        <p:nvSpPr>
+          <p:cNvPr id="10" name="Shape 7"/>
+          <p:cNvSpPr/>
+          <p:nvPr/>
+        </p:nvSpPr>
+        <p:spPr>
+          <a:xfrm>
+            <a:off x="457200" y="2971800"/>
+            <a:ext cx="8229600" cy="1645920"/>
+          </a:xfrm>
+          <a:prstGeom prst="roundRect">
+            <a:avLst>
+              <a:gd name="adj" fmla="val 4444"/>
+            </a:avLst>
+          </a:prstGeom>
+          <a:solidFill>
+            <a:srgbClr val="EEF3EA"/>
+          </a:solidFill>
+          <a:ln w="9525">
+            <a:solidFill>
+              <a:srgbClr val="EEF3EA"/>
+            </a:solidFill>
+            <a:prstDash val="solid"/>
+          </a:ln>
+          <a:effectLst>
+            <a:outerShdw sx="100000" sy="100000" kx="0" ky="0" algn="bl" rotWithShape="0" blurRad="38100" dist="12700" dir="5400000">
+              <a:srgbClr val="000000">
+                <a:alpha val="12000"/>
+              </a:srgbClr>
+            </a:outerShdw>
+          </a:effectLst>
+        </p:spPr>
+      </p:sp>
+      <p:sp>
+        <p:nvSpPr>
+          <p:cNvPr id="11" name="Text 8"/>
+          <p:cNvSpPr txBox="1"/>
+          <p:nvPr/>
+        </p:nvSpPr>
+        <p:spPr>
+          <a:xfrm>
+            <a:off x="594360" y="3063240"/>
+            <a:ext cx="7955280" cy="347472"/>
+          </a:xfrm>
+          <a:prstGeom prst="rect">
+            <a:avLst/>
+          </a:prstGeom>
+          <a:noFill/>
+          <a:ln/>
+        </p:spPr>
+        <p:txBody>
+          <a:bodyPr wrap="square" lIns="0" tIns="0" rIns="0" bIns="0" rtlCol="0" anchor="t"/>
+          <a:lstStyle/>
+          <a:p>
+            <a:pPr indent="0" marL="0">
+              <a:buNone/>
+            </a:pPr>
+            <a:r>
+              <a:rPr lang="en-US" sz="1300" b="1" dirty="0">
+                <a:solidFill>
+                  <a:schemeClr val="tx2"/>
+                </a:solidFill>
+              </a:rPr>
+              <a:t>플릿 운영 제안</a:t>
+            </a:r>
+            <a:endParaRPr lang="en-US" sz="1300" dirty="0"/>
+          </a:p>
+        </p:txBody>
+      </p:sp>
+      <p:sp>
+        <p:nvSpPr>
+          <p:cNvPr id="12" name="Text 9"/>
+          <p:cNvSpPr txBox="1"/>
+          <p:nvPr/>
+        </p:nvSpPr>
+        <p:spPr>
+          <a:xfrm>
+            <a:off x="594360" y="3429000"/>
+            <a:ext cx="7955280" cy="1097280"/>
+          </a:xfrm>
+          <a:prstGeom prst="rect">
+            <a:avLst/>
+          </a:prstGeom>
+          <a:noFill/>
+          <a:ln/>
+        </p:spPr>
+        <p:txBody>
+          <a:bodyPr wrap="square" lIns="0" tIns="0" rIns="0" bIns="0" rtlCol="0" anchor="t"/>
+          <a:lstStyle/>
+          <a:p>
+            <a:pPr marL="342900" indent="-342900">
+              <a:spcAft>
+                <a:spcPts val="300"/>
+              </a:spcAft>
+              <a:buSzPct val="100000"/>
+              <a:buChar char="•"/>
+            </a:pPr>
+            <a:r>
+              <a:rPr lang="en-US" sz="1150" dirty="0">
+                <a:solidFill>
+                  <a:schemeClr val="tx1"/>
+                </a:solidFill>
+              </a:rPr>
+              <a:t>1) 대표 프로젝트 4종(순수 Java, Spring 5 war, Boot 2.x 멀티모듈, MSA)으로 실제 Nexus·게이트웨이에서 파일럿 → Handover 품질 확인</a:t>
+            </a:r>
+            <a:endParaRPr lang="en-US" sz="1150" dirty="0"/>
+          </a:p>
+          <a:p>
+            <a:pPr marL="342900" indent="-342900">
+              <a:spcAft>
+                <a:spcPts val="300"/>
+              </a:spcAft>
+              <a:buSzPct val="100000"/>
+              <a:buChar char="•"/>
+            </a:pPr>
+            <a:r>
+              <a:rPr lang="en-US" sz="1150" dirty="0">
+                <a:solidFill>
+                  <a:schemeClr val="tx1"/>
+                </a:solidFill>
+              </a:rPr>
+              <a:t>2) kb/를 공유 디렉터리로 두고 플릿을 순차 실행, 매일 ledger 요약과 레시피 후보 검토(sbmig kb learning / promote)</a:t>
+            </a:r>
+            <a:endParaRPr lang="en-US" sz="1150" dirty="0"/>
+          </a:p>
+          <a:p>
+            <a:pPr marL="342900" indent="-342900">
+              <a:spcAft>
+                <a:spcPts val="300"/>
+              </a:spcAft>
+              <a:buSzPct val="100000"/>
+              <a:buChar char="•"/>
+            </a:pPr>
+            <a:r>
+              <a:rPr lang="en-US" sz="1150" dirty="0">
+                <a:solidFill>
+                  <a:schemeClr val="tx1"/>
+                </a:solidFill>
+              </a:rPr>
+              <a:t>3) blocked·follow-up 통계로 Nexus 프록시 누락, 사내 라이브러리 jakarta 빌드 등 '프로젝트 밖' 과제를 모아 처리</a:t>
+            </a:r>
+            <a:endParaRPr lang="en-US" sz="1150" dirty="0"/>
+          </a:p>
+        </p:txBody>
+      </p:sp>
+      <p:sp>
+        <p:nvSpPr>
+          <p:cNvPr id="25" name="Slide Number Placeholder 0"/>
+          <p:cNvSpPr>
+            <a:spLocks noGrp="1"/>
+          </p:cNvSpPr>
+          <p:nvPr>
+            <p:ph type="sldNum" sz="quarter" idx="4294967295"/>
+          </p:nvPr>
+        </p:nvSpPr>
+        <p:spPr>
+          <a:xfrm>
+            <a:off x="8229600" y="4800600"/>
+            <a:ext cx="457200" cy="228600"/>
+          </a:xfrm>
+          <a:prstGeom prst="rect">
+            <a:avLst/>
+          </a:prstGeom>
+          <a:extLst>
+            <a:ext uri="{C572A759-6A51-4108-AA02-DFA0A04FC94B}">
+              <ma14:wrappingTextBoxFlag xmlns:ma14="http://schemas.microsoft.com/office/mac/drawingml/2011/main" val="0"/>
+            </a:ext>
+          </a:extLst>
+        </p:spPr>
+        <p:txBody>
+          <a:bodyPr/>
+          <a:lstStyle>
+            <a:lvl1pPr>
+              <a:defRPr sz="900">
+                <a:solidFill>
+                  <a:srgbClr val="8A8F8A"/>
+                </a:solidFill>
+              </a:defRPr>
+            </a:lvl1pPr>
+          </a:lstStyle>
+          <a:p>
+            <a:pPr algn="r"/>
+            <a:fld id="{F7021451-1387-4CA6-816F-3879F97B5CBC}" type="slidenum">
+              <a:rPr b="0" lang="en-US"/>
+              <a:t>26</a:t>
+            </a:fld>
+            <a:endParaRPr lang="en-US"/>
+          </a:p>
+        </p:txBody>
+      </p:sp>
+    </p:spTree>
+  </p:cSld>
+  <p:clrMapOvr>
+    <a:masterClrMapping/>
+  </p:clrMapOvr>
+</p:sld>
+</file>
+
+<file path=ppt/slides/slide27.xml><?xml version="1.0" encoding="utf-8"?>
+<p:sld xmlns:a="http://schemas.openxmlformats.org/drawingml/2006/main" xmlns:r="http://schemas.openxmlformats.org/officeDocument/2006/relationships" xmlns:p="http://schemas.openxmlformats.org/presentationml/2006/main">
+  <p:cSld name="Slide 27">
+    <p:spTree>
+      <p:nvGrpSpPr>
+        <p:cNvPr id="1" name=""/>
+        <p:cNvGrpSpPr/>
+        <p:nvPr/>
+      </p:nvGrpSpPr>
+      <p:grpSpPr>
+        <a:xfrm>
+          <a:off x="0" y="0"/>
+          <a:ext cx="0" cy="0"/>
+          <a:chOff x="0" y="0"/>
+          <a:chExt cx="0" cy="0"/>
+        </a:xfrm>
+      </p:grpSpPr>
+      <p:sp>
+        <p:nvSpPr>
+          <p:cNvPr id="2" name="Text 0"/>
+          <p:cNvSpPr/>
+          <p:nvPr>
+            <p:ph idx="100" type="title" hasCustomPrompt="1"/>
+          </p:nvPr>
+        </p:nvSpPr>
+        <p:spPr>
+          <a:xfrm>
+            <a:off x="457200" y="274320"/>
+            <a:ext cx="8229600" cy="640080"/>
+          </a:xfrm>
+          <a:prstGeom prst="rect">
+            <a:avLst/>
+          </a:prstGeom>
+          <a:noFill/>
+          <a:ln/>
+        </p:spPr>
+        <p:txBody>
+          <a:bodyPr wrap="square" lIns="0" tIns="0" rIns="0" bIns="0" rtlCol="0" anchor="ctr"/>
+          <a:lstStyle/>
+          <a:p>
+            <a:pPr algn="l" indent="0" marL="0">
+              <a:buNone/>
+            </a:pPr>
+            <a:r>
+              <a:rPr lang="en-US" sz="2600" b="1" dirty="0">
+                <a:solidFill>
+                  <a:schemeClr val="tx2"/>
+                </a:solidFill>
+              </a:rPr>
               <a:t>부록: 문서 지도</a:t>
             </a:r>
             <a:endParaRPr lang="en-US" sz="2600" dirty="0"/>
@@ -18297,7 +20010,7 @@
       </p:sp>
       <p:graphicFrame>
         <p:nvGraphicFramePr>
-          <p:cNvPr id="27" name="Table 0"/>
+          <p:cNvPr id="28" name="Table 0"/>
           <p:cNvGraphicFramePr>
             <a:graphicFrameLocks noGrp="1"/>
           </p:cNvGraphicFramePr>
@@ -20262,7 +21975,7 @@
                           <a:ea typeface="Calibri" pitchFamily="34" charset="-122"/>
                           <a:cs typeface="Calibri" pitchFamily="34" charset="-120"/>
                         </a:rPr>
-                        <a:t>사전 준비, Nexus 미러, Windows, 리포트 읽기, 멈춤 진단, 에러 카탈로그(한국어), 플릿, KB 위생, FAQ</a:t>
+                        <a:t>사전 준비, Nexus 미러, Windows, 리포트 읽기, SBMIG-RESULT, 멈춤 진단, 에러 카탈로그(한국어), 플릿 안전장치, KB 위생, FAQ</a:t>
                       </a:r>
                       <a:endParaRPr lang="en-US" sz="950" dirty="0">
                         <a:latin typeface="Calibri" charset="0"/>
@@ -20631,7 +22344,7 @@
             <a:pPr algn="r"/>
             <a:fld id="{F7021451-1387-4CA6-816F-3879F97B5CBC}" type="slidenum">
               <a:rPr b="0" lang="en-US"/>
-              <a:t>26</a:t>
+              <a:t>27</a:t>
             </a:fld>
             <a:endParaRPr lang="en-US"/>
           </a:p>
@@ -25284,14 +26997,14 @@
               <a:buChar char="•"/>
             </a:pPr>
             <a:r>
-              <a:rPr lang="en-US" sz="1100" dirty="0">
+              <a:rPr lang="en-US" sz="1050" dirty="0">
                 <a:solidFill>
                   <a:schemeClr val="tx1"/>
                 </a:solidFill>
               </a:rPr>
               <a:t>단계별 max_iterations (3 / 6 / 6)</a:t>
             </a:r>
-            <a:endParaRPr lang="en-US" sz="1100" dirty="0"/>
+            <a:endParaRPr lang="en-US" sz="1050" dirty="0"/>
           </a:p>
           <a:p>
             <a:pPr marL="342900" indent="-342900">
@@ -25302,14 +27015,14 @@
               <a:buChar char="•"/>
             </a:pPr>
             <a:r>
-              <a:rPr lang="en-US" sz="1100" dirty="0">
+              <a:rPr lang="en-US" sz="1050" dirty="0">
                 <a:solidFill>
                   <a:schemeClr val="tx1"/>
                 </a:solidFill>
               </a:rPr>
-              <a:t>클러스터별 fix round, LLM 호출 예산(budget)</a:t>
-            </a:r>
-            <a:endParaRPr lang="en-US" sz="1100" dirty="0"/>
+              <a:t>클러스터별 LLM 시도 상한: 같은 클러스터의 채점된 실패만 셈</a:t>
+            </a:r>
+            <a:endParaRPr lang="en-US" sz="1050" dirty="0"/>
           </a:p>
           <a:p>
             <a:pPr marL="342900" indent="-342900">
@@ -25320,14 +27033,14 @@
               <a:buChar char="•"/>
             </a:pPr>
             <a:r>
-              <a:rPr lang="en-US" sz="1100" dirty="0">
+              <a:rPr lang="en-US" sz="1050" dirty="0">
                 <a:solidFill>
                   <a:schemeClr val="tx1"/>
                 </a:solidFill>
               </a:rPr>
-              <a:t>쿨다운 1회 후 'LLM unavailable'</a:t>
-            </a:r>
-            <a:endParaRPr lang="en-US" sz="1100" dirty="0"/>
+              <a:t>쿨다운 1회 후 'LLM unavailable', 같은 HTTP 400 ×2 → llm-config-error</a:t>
+            </a:r>
+            <a:endParaRPr lang="en-US" sz="1050" dirty="0"/>
           </a:p>
           <a:p>
             <a:pPr marL="342900" indent="-342900">
@@ -25338,14 +27051,14 @@
               <a:buChar char="•"/>
             </a:pPr>
             <a:r>
-              <a:rPr lang="en-US" sz="1100" dirty="0">
+              <a:rPr lang="en-US" sz="1050" dirty="0">
                 <a:solidFill>
                   <a:schemeClr val="tx1"/>
                 </a:solidFill>
               </a:rPr>
-              <a:t>예산 소진 → escalate, 리포트로</a:t>
-            </a:r>
-            <a:endParaRPr lang="en-US" sz="1100" dirty="0"/>
+              <a:t>'안 보임'은 해결 아님: partial / inconclusive</a:t>
+            </a:r>
+            <a:endParaRPr lang="en-US" sz="1050" dirty="0"/>
           </a:p>
         </p:txBody>
       </p:sp>
@@ -25923,7 +27636,7 @@
                   <a:schemeClr val="tx1"/>
                 </a:solidFill>
               </a:rPr>
-              <a:t>결정적 핸들러 23종. 에러 문구(트리거) + 프로필 조건. 0 LLM.</a:t>
+              <a:t>결정적 핸들러 32종. 에러 문구(트리거) + 프로필 조건. 0 LLM. (사람이 pin한 케이스 동작이 그보다 먼저)</a:t>
             </a:r>
             <a:endParaRPr lang="en-US" sz="1100" dirty="0"/>
           </a:p>
@@ -26715,7 +28428,7 @@
                   <a:schemeClr val="accent1"/>
                 </a:solidFill>
               </a:rPr>
-              <a:t>23</a:t>
+              <a:t>32</a:t>
             </a:r>
             <a:endParaRPr lang="en-US" sz="3800" dirty="0"/>
           </a:p>
